--- a/docs/presentacion/ENAHO_exposicion.pptx
+++ b/docs/presentacion/ENAHO_exposicion.pptx
@@ -589,7 +589,7 @@
           <a:lstStyle/>
           <a:p>
             <a:r>
-              <a:t>El repositorio tiene 98 archivos y 25 commits, sin contar los microdatos porque esos nunca entraron. src/ guarda los scripts numerados del 00 al 09 más un módulo común, y se ejecutan en ese orden fijo. models/ versiona los artefactos: los .joblib entrenados y los JSON de contrato con la app; la caché de probabilidades out-of-fold queda fuera porque es derivable y pesa. docs/ y reports/ juntan la documentación de arquitectura y la evidencia de cada paso: auditoría, torneo, ablación. data/ cierra el árbol como recordatorio de lo ya dicho: esa carpeta no existe en el repositorio. Uno de los archivos más simples de ese árbol, requirements.txt, es también uno de los más importantes.</a:t>
+              <a:t>El repositorio tiene 112 archivos y 26 commits, sin contar los microdatos porque esos nunca entraron. src/ guarda los scripts numerados del 00 al 09 más un módulo común, y se ejecutan en ese orden fijo. models/ versiona los artefactos: los .joblib entrenados y los JSON de contrato con la app; la caché de probabilidades out-of-fold queda fuera porque es derivable y pesa. docs/ y reports/ juntan la documentación de arquitectura y la evidencia de cada paso: auditoría, torneo, ablación. data/ cierra el árbol como recordatorio de lo ya dicho: esa carpeta no existe en el repositorio. Uno de los archivos más simples de ese árbol, requirements.txt, es también uno de los más importantes.</a:t>
             </a:r>
           </a:p>
         </p:txBody>
@@ -1429,7 +1429,7 @@
           <a:lstStyle/>
           <a:p>
             <a:r>
-              <a:t>El curso pedía comparar Random Forest y Gradient Boosting, así que esta es la comparación de frente. Mismos datos, mismos cinco pliegues, misma semilla. Gradient Boosting se equivoca de media en S/ 610,9 al mes y Random Forest en S/ 613,0: dos soles de diferencia sobre un error de seiscientos, es decir, empate práctico. La línea punteada es la mejor especificación lineal del torneo, E7, en S/ 686,9: ahí sí hay una diferencia real, unos setenta y cinco soles. Detrás de esto hay un torneo de nueve especificaciones, de E1 a E9, que está documentado en docs/METODOLOGIA_TORNEO.md y en la propia app. Elegimos E9 por el error en validación cruzada, nunca por el de test.</a:t>
+              <a:t>El curso pedía comparar Random Forest y Gradient Boosting, así que esta es la comparación de frente. Mismos datos, mismos cinco pliegues, misma semilla. Gradient Boosting se equivoca de media en S/ 610,9 al mes y Random Forest en S/ 613,0: dos soles de diferencia sobre un error de seiscientos, es decir, empate práctico. La línea punteada es la mejor especificación lineal del torneo, E7, en S/ 686,9: ahí sí hay una diferencia real, de S/ 76,0. Detrás de esto hay un torneo de nueve especificaciones, de E1 a E9, que está documentado en docs/METODOLOGIA_TORNEO.md y en la propia app. Elegimos E9 por el error en validación cruzada, nunca por el de test.</a:t>
             </a:r>
           </a:p>
         </p:txBody>
@@ -1709,7 +1709,7 @@
           <a:lstStyle/>
           <a:p>
             <a:r>
-              <a:t>El pipeline completo corre en local, en VS Code: los scripts numerados del 00 al 09 leen los microdatos del INEI, entrenan los modelos y escriben los artefactos. Esos microdatos no se suben a ningún lado: son 601,3 megabytes que se descargan de la fuente oficial, y el repositorio los excluye por diseño en el .gitignore. Lo único que sale de la máquina son código y unos pocos archivos pequeños: los .joblib entrenados y tres JSON, dos de contrato con la app y uno con los hiperparámetros. En total 7,39 megabytes. Streamlit Community Cloud vigila la rama main en GitHub y cada push dispara un redespliegue automático, sin ningún paso manual de por medio. Ese mismo repositorio tiene una estructura de carpetas fija que conviene mirar de cerca.</a:t>
+              <a:t>El pipeline completo corre en local, en VS Code: los scripts numerados del 00 al 09 leen los microdatos del INEI, entrenan los modelos y escriben los artefactos. Esos microdatos no se suben a ningún lado: son 601,3 megabytes que se descargan de la fuente oficial, y el repositorio los excluye por diseño en el .gitignore. Lo único que sale de la máquina son código y unos pocos archivos pequeños: los .joblib entrenados y tres JSON, dos de contrato con la app y uno con los hiperparámetros. En total 9,19 megabytes. Streamlit Community Cloud vigila la rama main en GitHub y cada push dispara un redespliegue automático, sin ningún paso manual de por medio. Ese mismo repositorio tiene una estructura de carpetas fija que conviene mirar de cerca.</a:t>
             </a:r>
           </a:p>
         </p:txBody>
@@ -5548,7 +5548,7 @@
                           </a:solidFill>
                           <a:latin typeface="Consolas"/>
                         </a:rPr>
-                        <a:t>20 · 45</a:t>
+                        <a:t>34 · 45</a:t>
                       </a:r>
                     </a:p>
                   </a:txBody>
@@ -5710,7 +5710,7 @@
                 </a:solidFill>
                 <a:latin typeface="Consolas"/>
               </a:rPr>
-              <a:t>98 archivos versionados · 25 commits · 7,39 MB</a:t>
+              <a:t>112 archivos versionados · 26 commits · 9,19 MB</a:t>
             </a:r>
           </a:p>
         </p:txBody>
@@ -14291,7 +14291,7 @@
                 </a:solidFill>
                 <a:latin typeface="Calibri"/>
               </a:rPr>
-              <a:t>Fuente: docs/arquitectura.md · .gitignore · repositorio en la rama main, commit be7a26a · tamaños medidos del disco</a:t>
+              <a:t>Fuente: docs/arquitectura.md · .gitignore · repositorio en la rama main, commit 0c7a001 · tamaños medidos del disco</a:t>
             </a:r>
           </a:p>
         </p:txBody>

--- a/docs/presentacion/ENAHO_exposicion.pptx
+++ b/docs/presentacion/ENAHO_exposicion.pptx
@@ -863,7 +863,7 @@
           <a:lstStyle/>
           <a:p>
             <a:r>
-              <a:t>Esta es la lámina que sostiene todo lo demás. El pipeline completo corre en local, en VS Code: los scripts numerados del 00 al 09 leen los microdatos del INEI, entrenan los modelos y escriben los artefactos: dos .joblib y los JSON de contrato con la app. Los microdatos son 601,3 megabytes que el .gitignore excluye por diseño: no se redistribuyen, se enlaza a la fuente. Lo que sale de la máquina son 8,67 megabytes en 108 archivos, en carpetas con un rol fijo: src/ para el entrenamiento, models/ para los artefactos, app/ para lo desplegado, docs/ y reports/ para la evidencia. GitHub recibe el push, avisa por webhook a Streamlit Community Cloud, y la nube reconstruye el entorno y publica. Entre guardar en el editor y ver el cambio en el navegador no hay ningún paso manual: esa es la definición de despliegue continuo que defendemos aquí.</a:t>
+              <a:t>Esta es la lámina que sostiene todo lo demás. El pipeline completo corre en local, en VS Code: los scripts numerados del 00 al 09 leen los microdatos del INEI, entrenan los modelos y escriben los artefactos: dos .joblib y los JSON de contrato con la app. Los microdatos son 601,3 megabytes que el .gitignore excluye por diseño: no se redistribuyen, se enlaza a la fuente. Lo que sale de la máquina son 8,70 megabytes en 108 archivos, en carpetas con un rol fijo: src/ para el entrenamiento, models/ para los artefactos, app/ para lo desplegado, docs/ y reports/ para la evidencia. GitHub recibe el push, avisa por webhook a Streamlit Community Cloud, y la nube reconstruye el entorno y publica. Entre guardar en el editor y ver el cambio en el navegador no hay ningún paso manual: esa es la definición de despliegue continuo que defendemos aquí.</a:t>
             </a:r>
           </a:p>
         </p:txBody>
@@ -933,7 +933,7 @@
           <a:lstStyle/>
           <a:p>
             <a:r>
-              <a:t>La decisión de ingeniería que más se nota al usar la app es esta: nada pesado se calcula mientras alguien la mira. Las curvas de umbral, los histogramas, las tablas de consecuencias y las dependencias parciales se calculan una sola vez, en 09_precomputar_ui.py, y viajan como un JSON de 44,7 kilobytes. La app en producción abre ese archivo y dibuja. Los .joblib solo entran cuando hay que predecir el perfil puntual que arma el usuario: una llamada a predict y una a predict_proba. Además, cache_data y cache_resource evitan releer el JSON y los modelos en cada interacción de la sesión. Community Cloud da poca memoria por aplicación: mantener el trabajo pesado fuera del tiempo de ejecución es lo que permite que cargue rápido y no se quede sin memoria. Qué gana el usuario: una app que responde al instante; qué ganamos nosotros: una app que no se cae.</a:t>
+              <a:t>Este es el recorrido real de abrir la app: cero ejecuciones del modelo. Las curvas de umbral, los histogramas, las tablas de consecuencias y las dependencias parciales se calcularon una sola vez, en 09_precomputar_ui.py, y viajan como un JSON de 44,7 kilobytes. La app en producción abre ese archivo y dibuja: no hay nada que calcular ahí. Los .joblib solo entran cuando el usuario arma un perfil y pulsa «Estimar»: una llamada a predict, que da S/ 849 para el perfil por defecto, y una a predict_proba. Además, cache_data y cache_resource evitan releer el JSON y los modelos en cada interacción de la sesión. Community Cloud da poca memoria por aplicación: mantener el trabajo pesado fuera del tiempo de ejecución es lo que permite que cargue rápido y no se quede sin memoria. Qué gana el usuario: una app que responde al instante; qué ganamos nosotros: una app que no se cae.</a:t>
             </a:r>
           </a:p>
         </p:txBody>
@@ -5543,7 +5543,7 @@
                 </a:solidFill>
                 <a:latin typeface="Calibri"/>
               </a:rPr>
-              <a:t>La auditoría encontró cuatro problemas y publicó los cuatro</a:t>
+              <a:t>Revisamos nuestro propio trabajo: cuatro errores encontrados, cuatro publicados</a:t>
             </a:r>
           </a:p>
         </p:txBody>
@@ -7206,8 +7206,8 @@
         </p:blipFill>
         <p:spPr>
           <a:xfrm>
-            <a:off x="1864740" y="2066543"/>
-            <a:ext cx="8459471" cy="3246120"/>
+            <a:off x="1091220" y="2066543"/>
+            <a:ext cx="10006510" cy="3840479"/>
           </a:xfrm>
           <a:prstGeom prst="rect">
             <a:avLst/>
@@ -7216,71 +7216,7 @@
       </p:pic>
       <p:sp>
         <p:nvSpPr>
-          <p:cNvPr id="6" name="Rounded Rectangle 5"/>
-          <p:cNvSpPr/>
-          <p:nvPr/>
-        </p:nvSpPr>
-        <p:spPr>
-          <a:xfrm>
-            <a:off x="566928" y="5422392"/>
-            <a:ext cx="11055096" cy="841248"/>
-          </a:xfrm>
-          <a:prstGeom prst="roundRect">
-            <a:avLst>
-              <a:gd name="adj" fmla="val 5000"/>
-            </a:avLst>
-          </a:prstGeom>
-          <a:solidFill>
-            <a:srgbClr val="E6E8FA"/>
-          </a:solidFill>
-          <a:ln w="15875">
-            <a:solidFill>
-              <a:srgbClr val="4353CC"/>
-            </a:solidFill>
-          </a:ln>
-          <a:effectLst/>
-        </p:spPr>
-        <p:style>
-          <a:lnRef idx="1">
-            <a:schemeClr val="accent1"/>
-          </a:lnRef>
-          <a:fillRef idx="3">
-            <a:schemeClr val="accent1"/>
-          </a:fillRef>
-          <a:effectRef idx="2">
-            <a:schemeClr val="accent1"/>
-          </a:effectRef>
-          <a:fontRef idx="minor">
-            <a:schemeClr val="lt1"/>
-          </a:fontRef>
-        </p:style>
-        <p:txBody>
-          <a:bodyPr rtlCol="0" anchor="t" wrap="square" lIns="182880" rIns="182880" tIns="128016" bIns="128016"/>
-          <a:lstStyle/>
-          <a:p>
-            <a:pPr algn="ctr">
-              <a:lnSpc>
-                <a:spcPct val="106000"/>
-              </a:lnSpc>
-              <a:spcAft>
-                <a:spcPts val="0"/>
-              </a:spcAft>
-            </a:pPr>
-            <a:r>
-              <a:rPr sz="1800" b="0">
-                <a:solidFill>
-                  <a:srgbClr val="1E232B"/>
-                </a:solidFill>
-                <a:latin typeface="Calibri"/>
-              </a:rPr>
-              <a:t>Al repositorio viajan el código y los artefactos: 8,67 MB en 108 archivos. Los 601,3 MB de microdatos del INEI nunca salen de la máquina: el repositorio enlaza a la fuente oficial.</a:t>
-            </a:r>
-          </a:p>
-        </p:txBody>
-      </p:sp>
-      <p:sp>
-        <p:nvSpPr>
-          <p:cNvPr id="7" name="TextBox 6"/>
+          <p:cNvPr id="6" name="TextBox 5"/>
           <p:cNvSpPr txBox="1"/>
           <p:nvPr/>
         </p:nvSpPr>
@@ -7424,7 +7360,7 @@
                 </a:solidFill>
                 <a:latin typeface="Calibri"/>
               </a:rPr>
-              <a:t>Nada se calcula en caliente: la app lee artefactos precomputados y por eso carga rápido</a:t>
+              <a:t>La app no calcula al abrirse: lee resultados ya guardados</a:t>
             </a:r>
           </a:p>
         </p:txBody>
@@ -7487,8 +7423,8 @@
         </p:blipFill>
         <p:spPr>
           <a:xfrm>
-            <a:off x="2929914" y="2066543"/>
-            <a:ext cx="6329123" cy="2670048"/>
+            <a:off x="2734838" y="2066543"/>
+            <a:ext cx="6719275" cy="2834640"/>
           </a:xfrm>
           <a:prstGeom prst="rect">
             <a:avLst/>
@@ -7503,8 +7439,8 @@
         </p:nvSpPr>
         <p:spPr>
           <a:xfrm>
-            <a:off x="566928" y="4791456"/>
-            <a:ext cx="5358384" cy="1554480"/>
+            <a:off x="566928" y="5020055"/>
+            <a:ext cx="11055096" cy="1142999"/>
           </a:xfrm>
           <a:prstGeom prst="roundRect">
             <a:avLst>
@@ -7512,11 +7448,11 @@
             </a:avLst>
           </a:prstGeom>
           <a:solidFill>
-            <a:srgbClr val="FCFBF8"/>
+            <a:srgbClr val="E6E8FA"/>
           </a:solidFill>
           <a:ln w="15875">
             <a:solidFill>
-              <a:srgbClr val="D5D1C6"/>
+              <a:srgbClr val="4353CC"/>
             </a:solidFill>
           </a:ln>
           <a:effectLst/>
@@ -7536,52 +7472,37 @@
           </a:fontRef>
         </p:style>
         <p:txBody>
-          <a:bodyPr rtlCol="0" anchor="t" wrap="square" lIns="182880" rIns="182880" tIns="128016" bIns="128016"/>
-          <a:lstStyle/>
-          <a:p>
-            <a:pPr algn="ctr">
-              <a:spcAft>
-                <a:spcPts val="400"/>
-              </a:spcAft>
-            </a:pPr>
-            <a:r>
-              <a:rPr sz="1400" b="0">
+          <a:bodyPr rtlCol="0" anchor="ctr" wrap="square" lIns="182880" rIns="182880" tIns="128016" bIns="128016"/>
+          <a:lstStyle/>
+          <a:p>
+            <a:pPr algn="ctr"/>
+            <a:r>
+              <a:rPr sz="1800" b="0">
+                <a:solidFill>
+                  <a:srgbClr val="49525F"/>
+                </a:solidFill>
+                <a:latin typeface="Calibri"/>
+              </a:rPr>
+              <a:t>Abrir la app</a:t>
+            </a:r>
+            <a:r>
+              <a:rPr sz="2600" b="1">
                 <a:solidFill>
                   <a:srgbClr val="5F6875"/>
                 </a:solidFill>
                 <a:latin typeface="Consolas"/>
               </a:rPr>
-              <a:t>UI_ARTIFACTS.JSON</a:t>
-            </a:r>
-          </a:p>
-          <a:p>
-            <a:pPr>
-              <a:lnSpc>
-                <a:spcPct val="95000"/>
-              </a:lnSpc>
-              <a:spcAft>
-                <a:spcPts val="600"/>
-              </a:spcAft>
-            </a:pPr>
-            <a:r>
-              <a:rPr sz="3000" b="1">
-                <a:solidFill>
-                  <a:srgbClr val="4353CC"/>
+              <a:t>   →   </a:t>
+            </a:r>
+            <a:r>
+              <a:rPr sz="3400" b="1">
+                <a:solidFill>
+                  <a:srgbClr val="177A4C"/>
                 </a:solidFill>
                 <a:latin typeface="Consolas"/>
               </a:rPr>
-              <a:t>44,7 KB</a:t>
-            </a:r>
-          </a:p>
-          <a:p>
-            <a:pPr>
-              <a:lnSpc>
-                <a:spcPct val="105000"/>
-              </a:lnSpc>
-              <a:spcAft>
-                <a:spcPts val="0"/>
-              </a:spcAft>
-            </a:pPr>
+              <a:t>0</a:t>
+            </a:r>
             <a:r>
               <a:rPr sz="1800" b="0">
                 <a:solidFill>
@@ -7589,98 +7510,44 @@
                 </a:solidFill>
                 <a:latin typeface="Calibri"/>
               </a:rPr>
-              <a:t>Todo lo que la app dibuja en cada visita. No recalcula nada.</a:t>
-            </a:r>
-          </a:p>
-        </p:txBody>
-      </p:sp>
-      <p:sp>
-        <p:nvSpPr>
-          <p:cNvPr id="7" name="Rounded Rectangle 6"/>
-          <p:cNvSpPr/>
-          <p:nvPr/>
-        </p:nvSpPr>
-        <p:spPr>
-          <a:xfrm>
-            <a:off x="6263640" y="4791456"/>
-            <a:ext cx="5358384" cy="1554480"/>
-          </a:xfrm>
-          <a:prstGeom prst="roundRect">
-            <a:avLst>
-              <a:gd name="adj" fmla="val 5000"/>
-            </a:avLst>
-          </a:prstGeom>
-          <a:solidFill>
-            <a:srgbClr val="FCFBF8"/>
-          </a:solidFill>
-          <a:ln w="15875">
-            <a:solidFill>
-              <a:srgbClr val="D5D1C6"/>
-            </a:solidFill>
-          </a:ln>
-          <a:effectLst/>
-        </p:spPr>
-        <p:style>
-          <a:lnRef idx="1">
-            <a:schemeClr val="accent1"/>
-          </a:lnRef>
-          <a:fillRef idx="3">
-            <a:schemeClr val="accent1"/>
-          </a:fillRef>
-          <a:effectRef idx="2">
-            <a:schemeClr val="accent1"/>
-          </a:effectRef>
-          <a:fontRef idx="minor">
-            <a:schemeClr val="lt1"/>
-          </a:fontRef>
-        </p:style>
-        <p:txBody>
-          <a:bodyPr rtlCol="0" anchor="t" wrap="square" lIns="182880" rIns="182880" tIns="128016" bIns="128016"/>
-          <a:lstStyle/>
-          <a:p>
-            <a:pPr algn="ctr">
-              <a:spcAft>
-                <a:spcPts val="400"/>
-              </a:spcAft>
-            </a:pPr>
-            <a:r>
-              <a:rPr sz="1400" b="0">
+              <a:t> ejecuciones del modelo</a:t>
+            </a:r>
+            <a:r>
+              <a:rPr sz="1800" b="0">
+                <a:solidFill>
+                  <a:srgbClr val="5F6875"/>
+                </a:solidFill>
+                <a:latin typeface="Calibri"/>
+              </a:rPr>
+              <a:t>     ·     </a:t>
+            </a:r>
+            <a:r>
+              <a:rPr sz="1800" b="0">
+                <a:solidFill>
+                  <a:srgbClr val="49525F"/>
+                </a:solidFill>
+                <a:latin typeface="Calibri"/>
+              </a:rPr>
+              <a:t>Pulsar «Estimar»</a:t>
+            </a:r>
+            <a:r>
+              <a:rPr sz="2600" b="1">
                 <a:solidFill>
                   <a:srgbClr val="5F6875"/>
                 </a:solidFill>
                 <a:latin typeface="Consolas"/>
               </a:rPr>
-              <a:t>LOS DOS MODELOS .JOBLIB</a:t>
-            </a:r>
-          </a:p>
-          <a:p>
-            <a:pPr>
-              <a:lnSpc>
-                <a:spcPct val="95000"/>
-              </a:lnSpc>
-              <a:spcAft>
-                <a:spcPts val="600"/>
-              </a:spcAft>
-            </a:pPr>
-            <a:r>
-              <a:rPr sz="3000" b="1">
-                <a:solidFill>
-                  <a:srgbClr val="177A4C"/>
+              <a:t>   →   </a:t>
+            </a:r>
+            <a:r>
+              <a:rPr sz="3400" b="1">
+                <a:solidFill>
+                  <a:srgbClr val="4353CC"/>
                 </a:solidFill>
                 <a:latin typeface="Consolas"/>
               </a:rPr>
-              <a:t>880 KB</a:t>
-            </a:r>
-          </a:p>
-          <a:p>
-            <a:pPr>
-              <a:lnSpc>
-                <a:spcPct val="105000"/>
-              </a:lnSpc>
-              <a:spcAft>
-                <a:spcPts val="0"/>
-              </a:spcAft>
-            </a:pPr>
+              <a:t>1</a:t>
+            </a:r>
             <a:r>
               <a:rPr sz="1800" b="0">
                 <a:solidFill>
@@ -7688,14 +7555,32 @@
                 </a:solidFill>
                 <a:latin typeface="Calibri"/>
               </a:rPr>
-              <a:t>Solo entran a trabajar cuando hay que predecir el perfil del formulario.</a:t>
-            </a:r>
-          </a:p>
-        </p:txBody>
-      </p:sp>
-      <p:sp>
-        <p:nvSpPr>
-          <p:cNvPr id="8" name="TextBox 7"/>
+              <a:t> llamada a predict()</a:t>
+            </a:r>
+            <a:r>
+              <a:rPr sz="2600" b="1">
+                <a:solidFill>
+                  <a:srgbClr val="5F6875"/>
+                </a:solidFill>
+                <a:latin typeface="Consolas"/>
+              </a:rPr>
+              <a:t>   →   </a:t>
+            </a:r>
+            <a:r>
+              <a:rPr sz="3400" b="1">
+                <a:solidFill>
+                  <a:srgbClr val="3542B8"/>
+                </a:solidFill>
+                <a:latin typeface="Consolas"/>
+              </a:rPr>
+              <a:t>S/ 849</a:t>
+            </a:r>
+          </a:p>
+        </p:txBody>
+      </p:sp>
+      <p:sp>
+        <p:nvSpPr>
+          <p:cNvPr id="7" name="TextBox 6"/>
           <p:cNvSpPr txBox="1"/>
           <p:nvPr/>
         </p:nvSpPr>
@@ -7727,7 +7612,7 @@
                 </a:solidFill>
                 <a:latin typeface="Calibri"/>
               </a:rPr>
-              <a:t>Fuente: src/09_precomputar_ui.py · models/ui_artifacts.json · models/*.joblib · tamaños medidos del disco</a:t>
+              <a:t>Fuente: src/09_precomputar_ui.py · models/ui_artifacts.json · models/*.joblib · docs/presentacion/verificacion_local.py</a:t>
             </a:r>
           </a:p>
         </p:txBody>
@@ -8571,7 +8456,68 @@
       </p:sp>
       <p:sp>
         <p:nvSpPr>
-          <p:cNvPr id="10" name="TextBox 9"/>
+          <p:cNvPr id="10" name="Rounded Rectangle 9"/>
+          <p:cNvSpPr/>
+          <p:nvPr/>
+        </p:nvSpPr>
+        <p:spPr>
+          <a:xfrm>
+            <a:off x="1166317" y="3097072"/>
+            <a:ext cx="144475" cy="274320"/>
+          </a:xfrm>
+          <a:prstGeom prst="roundRect">
+            <a:avLst>
+              <a:gd name="adj" fmla="val 35000"/>
+            </a:avLst>
+          </a:prstGeom>
+          <a:solidFill>
+            <a:srgbClr val="E6E8FA"/>
+          </a:solidFill>
+          <a:ln w="12700">
+            <a:solidFill>
+              <a:srgbClr val="3542B8"/>
+            </a:solidFill>
+          </a:ln>
+          <a:effectLst/>
+        </p:spPr>
+        <p:style>
+          <a:lnRef idx="1">
+            <a:schemeClr val="accent1"/>
+          </a:lnRef>
+          <a:fillRef idx="3">
+            <a:schemeClr val="accent1"/>
+          </a:fillRef>
+          <a:effectRef idx="2">
+            <a:schemeClr val="accent1"/>
+          </a:effectRef>
+          <a:fontRef idx="minor">
+            <a:schemeClr val="lt1"/>
+          </a:fontRef>
+        </p:style>
+        <p:txBody>
+          <a:bodyPr rtlCol="0" anchor="ctr" lIns="54864" rIns="54864" tIns="0" bIns="0"/>
+          <a:lstStyle/>
+          <a:p>
+            <a:pPr algn="ctr">
+              <a:spcAft>
+                <a:spcPts val="0"/>
+              </a:spcAft>
+            </a:pPr>
+            <a:r>
+              <a:rPr sz="1400" b="1">
+                <a:solidFill>
+                  <a:srgbClr val="3542B8"/>
+                </a:solidFill>
+                <a:latin typeface="Consolas"/>
+              </a:rPr>
+              <a:t>5</a:t>
+            </a:r>
+          </a:p>
+        </p:txBody>
+      </p:sp>
+      <p:sp>
+        <p:nvSpPr>
+          <p:cNvPr id="11" name="TextBox 10"/>
           <p:cNvSpPr txBox="1"/>
           <p:nvPr/>
         </p:nvSpPr>
@@ -8734,7 +8680,7 @@
       </p:sp>
       <p:sp>
         <p:nvSpPr>
-          <p:cNvPr id="11" name="Rounded Rectangle 10"/>
+          <p:cNvPr id="12" name="Rounded Rectangle 11"/>
           <p:cNvSpPr/>
           <p:nvPr/>
         </p:nvSpPr>
@@ -8788,7 +8734,7 @@
                 </a:solidFill>
                 <a:latin typeface="Consolas"/>
               </a:rPr>
-              <a:t>st.slider + st.fragment</a:t>
+              <a:t>5 · st.slider + st.fragment</a:t>
             </a:r>
           </a:p>
           <a:p>
@@ -8807,14 +8753,14 @@
                 </a:solidFill>
                 <a:latin typeface="Calibri"/>
               </a:rPr>
-              <a:t>El umbral vive dentro de un fragmento: moverlo reejecuta solo ese bloque, no la página entera.</a:t>
-            </a:r>
-          </a:p>
-        </p:txBody>
-      </p:sp>
-      <p:sp>
-        <p:nvSpPr>
-          <p:cNvPr id="12" name="TextBox 11"/>
+              <a:t>El umbral vive en «Empleo informal» (marcador 5): moverlo reejecuta solo ese fragmento, no la página entera.</a:t>
+            </a:r>
+          </a:p>
+        </p:txBody>
+      </p:sp>
+      <p:sp>
+        <p:nvSpPr>
+          <p:cNvPr id="13" name="TextBox 12"/>
           <p:cNvSpPr txBox="1"/>
           <p:nvPr/>
         </p:nvSpPr>
@@ -9514,7 +9460,7 @@
                 </a:solidFill>
                 <a:latin typeface="Calibri"/>
               </a:rPr>
-              <a:t>Probamos Random Forest y Gradient Boosting en ambos problemas; ganó GB por poco</a:t>
+              <a:t>Elegimos Gradient Boosting: le gana a Random Forest por poco, con las mismas 11 variables</a:t>
             </a:r>
           </a:p>
         </p:txBody>
@@ -9922,7 +9868,7 @@
                           </a:solidFill>
                           <a:latin typeface="Calibri"/>
                         </a:rPr>
-                        <a:t>las mismas once en los dos modelos</a:t>
+                        <a:t>las mismas 11 variables en los dos modelos</a:t>
                       </a:r>
                     </a:p>
                   </a:txBody>

--- a/docs/presentacion/ENAHO_exposicion.pptx
+++ b/docs/presentacion/ENAHO_exposicion.pptx
@@ -863,7 +863,7 @@
           <a:lstStyle/>
           <a:p>
             <a:r>
-              <a:t>Esta es la lámina que sostiene todo lo demás. El pipeline completo corre en local, en VS Code: los scripts numerados del 00 al 09 leen los microdatos del INEI, entrenan los modelos y escriben los artefactos: dos .joblib y los JSON de contrato con la app. Los microdatos son 601,3 megabytes que el .gitignore excluye por diseño: no se redistribuyen, se enlaza a la fuente. Lo que sale de la máquina son 8,70 megabytes en 108 archivos, en carpetas con un rol fijo: src/ para el entrenamiento, models/ para los artefactos, app/ para lo desplegado, docs/ y reports/ para la evidencia. GitHub recibe el push, avisa por webhook a Streamlit Community Cloud, y la nube reconstruye el entorno y publica. Entre guardar en el editor y ver el cambio en el navegador no hay ningún paso manual: esa es la definición de despliegue continuo que defendemos aquí.</a:t>
+              <a:t>Esta es la lámina que sostiene todo lo demás. El pipeline completo corre en local, en VS Code: los scripts numerados del 00 al 09 leen los microdatos del INEI, entrenan los modelos y escriben los artefactos: dos .joblib y los JSON de contrato con la app. Los microdatos son 601,3 megabytes que el .gitignore excluye por diseño: no se redistribuyen, se enlaza a la fuente. Lo que sale de la máquina son 8,74 megabytes en 108 archivos, en carpetas con un rol fijo: src/ para el entrenamiento, models/ para los artefactos, app/ para lo desplegado, docs/ y reports/ para la evidencia. GitHub recibe el push, avisa por webhook a Streamlit Community Cloud, y la nube reconstruye el entorno y publica. Entre guardar en el editor y ver el cambio en el navegador no hay ningún paso manual: esa es la definición de despliegue continuo que defendemos aquí.</a:t>
             </a:r>
           </a:p>
         </p:txBody>
@@ -4593,8 +4593,8 @@
         </p:nvSpPr>
         <p:spPr>
           <a:xfrm>
-            <a:off x="566928" y="5230368"/>
-            <a:ext cx="11055096" cy="1463040"/>
+            <a:off x="566928" y="5358384"/>
+            <a:ext cx="11055096" cy="1133856"/>
           </a:xfrm>
           <a:prstGeom prst="roundRect">
             <a:avLst>
@@ -4629,9 +4629,9 @@
           <a:bodyPr rtlCol="0" anchor="t" wrap="square" lIns="182880" rIns="182880" tIns="128016" bIns="128016"/>
           <a:lstStyle/>
           <a:p>
-            <a:pPr algn="ctr">
+            <a:pPr algn="l">
               <a:spcAft>
-                <a:spcPts val="100"/>
+                <a:spcPts val="1000"/>
               </a:spcAft>
             </a:pPr>
             <a:r>
@@ -4641,15 +4641,8 @@
                 </a:solidFill>
                 <a:latin typeface="Calibri"/>
               </a:rPr>
-              <a:t>App</a:t>
-            </a:r>
-          </a:p>
-          <a:p>
-            <a:pPr>
-              <a:spcAft>
-                <a:spcPts val="700"/>
-              </a:spcAft>
-            </a:pPr>
+              <a:t>App:  </a:t>
+            </a:r>
             <a:r>
               <a:rPr sz="1800" b="1">
                 <a:solidFill>
@@ -4661,27 +4654,20 @@
             </a:r>
           </a:p>
           <a:p>
-            <a:pPr>
-              <a:spcAft>
-                <a:spcPts val="100"/>
-              </a:spcAft>
-            </a:pPr>
-            <a:r>
-              <a:rPr sz="1800" b="0">
-                <a:solidFill>
-                  <a:srgbClr val="49525F"/>
-                </a:solidFill>
-                <a:latin typeface="Calibri"/>
-              </a:rPr>
-              <a:t>Repositorio</a:t>
-            </a:r>
-          </a:p>
-          <a:p>
-            <a:pPr>
+            <a:pPr algn="l">
               <a:spcAft>
                 <a:spcPts val="0"/>
               </a:spcAft>
             </a:pPr>
+            <a:r>
+              <a:rPr sz="1800" b="0">
+                <a:solidFill>
+                  <a:srgbClr val="49525F"/>
+                </a:solidFill>
+                <a:latin typeface="Calibri"/>
+              </a:rPr>
+              <a:t>Repositorio:  </a:t>
+            </a:r>
             <a:r>
               <a:rPr sz="1800" b="1">
                 <a:solidFill>
@@ -5609,9 +5595,9 @@
                 <a:tableStyleId>{5C22544A-7EE6-4342-B048-85BDC9FD1C3A}</a:tableStyleId>
               </a:tblPr>
               <a:tblGrid>
-                <a:gridCol w="3537630"/>
-                <a:gridCol w="2653223"/>
-                <a:gridCol w="4864242"/>
+                <a:gridCol w="3316528"/>
+                <a:gridCol w="2542672"/>
+                <a:gridCol w="5195895"/>
               </a:tblGrid>
               <a:tr h="484632">
                 <a:tc>
@@ -5694,7 +5680,7 @@
                           </a:solidFill>
                           <a:latin typeface="Calibri"/>
                         </a:rPr>
-                        <a:t>El centinela 999999 leído como un ingreso</a:t>
+                        <a:t>El código de faltante, leído como un sueldo</a:t>
                       </a:r>
                     </a:p>
                   </a:txBody>
@@ -5738,7 +5724,7 @@
                           </a:solidFill>
                           <a:latin typeface="Calibri"/>
                         </a:rPr>
-                        <a:t>El R² pasa de 0,023 a 0,248 al tratarlo como faltante</a:t>
+                        <a:t>999999 es «no sabe», pero entraba como S/ 999.999: tratarlo como faltante subió el R² de 0,023 a 0,248</a:t>
                       </a:r>
                     </a:p>
                   </a:txBody>
@@ -5806,7 +5792,7 @@
                           </a:solidFill>
                           <a:latin typeface="Calibri"/>
                         </a:rPr>
-                        <a:t>El error baja de S/ 610,90 a S/ 607,31: 0,59 %. No se promovió</a:t>
+                        <a:t>Los tres quedaron en el borde. Ampliada, el error baja de S/ 610,90 a S/ 607,31 (0,59 %): no se promovió</a:t>
                       </a:r>
                     </a:p>
                   </a:txBody>
@@ -5874,7 +5860,7 @@
                           </a:solidFill>
                           <a:latin typeface="Calibri"/>
                         </a:rPr>
-                        <a:t>El 88,6 % es del tramo 1-10, no de «Hasta 20»</a:t>
+                        <a:t>El 88,6 % es del tramo 1-10 del INEI; nuestra categoría «Hasta 20» da 81,1 %</a:t>
                       </a:r>
                     </a:p>
                   </a:txBody>
@@ -5942,7 +5928,7 @@
                           </a:solidFill>
                           <a:latin typeface="Calibri"/>
                         </a:rPr>
-                        <a:t>Ni Lemieux ni Heckman reportan ese R²</a:t>
+                        <a:t>Circulaban «0,4–0,5», «rara vez supera 0,4» y «ninguno supera 0,5»: quedó una, sobre Mincer y Card</a:t>
                       </a:r>
                     </a:p>
                   </a:txBody>
@@ -5965,8 +5951,8 @@
         </p:nvSpPr>
         <p:spPr>
           <a:xfrm>
-            <a:off x="566928" y="4855464"/>
-            <a:ext cx="11055096" cy="1353312"/>
+            <a:off x="566928" y="5212079"/>
+            <a:ext cx="11055096" cy="1097280"/>
           </a:xfrm>
           <a:prstGeom prst="roundRect">
             <a:avLst>
@@ -6003,7 +5989,7 @@
           <a:p>
             <a:pPr algn="ctr">
               <a:spcAft>
-                <a:spcPts val="600"/>
+                <a:spcPts val="400"/>
               </a:spcAft>
             </a:pPr>
             <a:r>
@@ -6019,7 +6005,7 @@
           <a:p>
             <a:pPr>
               <a:lnSpc>
-                <a:spcPct val="106000"/>
+                <a:spcPct val="104000"/>
               </a:lnSpc>
               <a:spcAft>
                 <a:spcPts val="0"/>
@@ -6032,7 +6018,7 @@
                 </a:solidFill>
                 <a:latin typeface="Calibri"/>
               </a:rPr>
-              <a:t>Los problemas de origen se corrigen y se documentan; los propios se corrigen y se aprende de ellos; los de cita se verifican yendo al texto completo. Ninguno se borra: un hallazgo corregido en silencio es un hallazgo desperdiciado.</a:t>
+              <a:t>Los de origen se corrigen y se documentan; los propios se corrigen y se aprende de ellos; los de cita se verifican en el texto completo. Ninguno se borra en silencio.</a:t>
             </a:r>
           </a:p>
         </p:txBody>
@@ -7206,8 +7192,8 @@
         </p:blipFill>
         <p:spPr>
           <a:xfrm>
-            <a:off x="1091220" y="2066543"/>
-            <a:ext cx="10006510" cy="3840479"/>
+            <a:off x="1943553" y="2066543"/>
+            <a:ext cx="8301844" cy="3200399"/>
           </a:xfrm>
           <a:prstGeom prst="rect">
             <a:avLst/>
@@ -7216,7 +7202,71 @@
       </p:pic>
       <p:sp>
         <p:nvSpPr>
-          <p:cNvPr id="6" name="TextBox 5"/>
+          <p:cNvPr id="6" name="Rounded Rectangle 5"/>
+          <p:cNvSpPr/>
+          <p:nvPr/>
+        </p:nvSpPr>
+        <p:spPr>
+          <a:xfrm>
+            <a:off x="566928" y="5413248"/>
+            <a:ext cx="11055096" cy="804672"/>
+          </a:xfrm>
+          <a:prstGeom prst="roundRect">
+            <a:avLst>
+              <a:gd name="adj" fmla="val 5000"/>
+            </a:avLst>
+          </a:prstGeom>
+          <a:solidFill>
+            <a:srgbClr val="E2F2E9"/>
+          </a:solidFill>
+          <a:ln w="15875">
+            <a:solidFill>
+              <a:srgbClr val="177A4C"/>
+            </a:solidFill>
+          </a:ln>
+          <a:effectLst/>
+        </p:spPr>
+        <p:style>
+          <a:lnRef idx="1">
+            <a:schemeClr val="accent1"/>
+          </a:lnRef>
+          <a:fillRef idx="3">
+            <a:schemeClr val="accent1"/>
+          </a:fillRef>
+          <a:effectRef idx="2">
+            <a:schemeClr val="accent1"/>
+          </a:effectRef>
+          <a:fontRef idx="minor">
+            <a:schemeClr val="lt1"/>
+          </a:fontRef>
+        </p:style>
+        <p:txBody>
+          <a:bodyPr rtlCol="0" anchor="t" wrap="square" lIns="182880" rIns="182880" tIns="128016" bIns="128016"/>
+          <a:lstStyle/>
+          <a:p>
+            <a:pPr algn="ctr">
+              <a:lnSpc>
+                <a:spcPct val="106000"/>
+              </a:lnSpc>
+              <a:spcAft>
+                <a:spcPts val="0"/>
+              </a:spcAft>
+            </a:pPr>
+            <a:r>
+              <a:rPr sz="1800" b="1">
+                <a:solidFill>
+                  <a:srgbClr val="177A4C"/>
+                </a:solidFill>
+                <a:latin typeface="Calibri"/>
+              </a:rPr>
+              <a:t>Los microdatos se quedan en la máquina: los 601,3 MB de la ENAHO no viajan al repositorio, que enlaza a la fuente oficial del INEI.</a:t>
+            </a:r>
+          </a:p>
+        </p:txBody>
+      </p:sp>
+      <p:sp>
+        <p:nvSpPr>
+          <p:cNvPr id="7" name="TextBox 6"/>
           <p:cNvSpPr txBox="1"/>
           <p:nvPr/>
         </p:nvSpPr>
@@ -7475,7 +7525,11 @@
           <a:bodyPr rtlCol="0" anchor="ctr" wrap="square" lIns="182880" rIns="182880" tIns="128016" bIns="128016"/>
           <a:lstStyle/>
           <a:p>
-            <a:pPr algn="ctr"/>
+            <a:pPr algn="ctr">
+              <a:spcAft>
+                <a:spcPts val="0"/>
+              </a:spcAft>
+            </a:pPr>
             <a:r>
               <a:rPr sz="1800" b="0">
                 <a:solidFill>
@@ -7486,16 +7540,16 @@
               <a:t>Abrir la app</a:t>
             </a:r>
             <a:r>
-              <a:rPr sz="2600" b="1">
+              <a:rPr sz="1800" b="1">
                 <a:solidFill>
                   <a:srgbClr val="5F6875"/>
                 </a:solidFill>
                 <a:latin typeface="Consolas"/>
               </a:rPr>
-              <a:t>   →   </a:t>
-            </a:r>
-            <a:r>
-              <a:rPr sz="3400" b="1">
+              <a:t>  →  </a:t>
+            </a:r>
+            <a:r>
+              <a:rPr sz="2600" b="1">
                 <a:solidFill>
                   <a:srgbClr val="177A4C"/>
                 </a:solidFill>
@@ -7510,37 +7564,28 @@
                 </a:solidFill>
                 <a:latin typeface="Calibri"/>
               </a:rPr>
-              <a:t> ejecuciones del modelo</a:t>
+              <a:t> ejecuciones</a:t>
             </a:r>
             <a:r>
               <a:rPr sz="1800" b="0">
                 <a:solidFill>
-                  <a:srgbClr val="5F6875"/>
+                  <a:srgbClr val="49525F"/>
                 </a:solidFill>
                 <a:latin typeface="Calibri"/>
               </a:rPr>
-              <a:t>     ·     </a:t>
-            </a:r>
-            <a:r>
-              <a:rPr sz="1800" b="0">
-                <a:solidFill>
-                  <a:srgbClr val="49525F"/>
-                </a:solidFill>
-                <a:latin typeface="Calibri"/>
-              </a:rPr>
-              <a:t>Pulsar «Estimar»</a:t>
-            </a:r>
-            <a:r>
-              <a:rPr sz="2600" b="1">
+              <a:t>      Pulsar «Estimar»</a:t>
+            </a:r>
+            <a:r>
+              <a:rPr sz="1800" b="1">
                 <a:solidFill>
                   <a:srgbClr val="5F6875"/>
                 </a:solidFill>
                 <a:latin typeface="Consolas"/>
               </a:rPr>
-              <a:t>   →   </a:t>
-            </a:r>
-            <a:r>
-              <a:rPr sz="3400" b="1">
+              <a:t>  →  </a:t>
+            </a:r>
+            <a:r>
+              <a:rPr sz="2600" b="1">
                 <a:solidFill>
                   <a:srgbClr val="4353CC"/>
                 </a:solidFill>
@@ -7555,19 +7600,19 @@
                 </a:solidFill>
                 <a:latin typeface="Calibri"/>
               </a:rPr>
-              <a:t> llamada a predict()</a:t>
-            </a:r>
-            <a:r>
-              <a:rPr sz="2600" b="1">
+              <a:t> predicción</a:t>
+            </a:r>
+            <a:r>
+              <a:rPr sz="1800" b="1">
                 <a:solidFill>
                   <a:srgbClr val="5F6875"/>
                 </a:solidFill>
                 <a:latin typeface="Consolas"/>
               </a:rPr>
-              <a:t>   →   </a:t>
-            </a:r>
-            <a:r>
-              <a:rPr sz="3400" b="1">
+              <a:t>  →  </a:t>
+            </a:r>
+            <a:r>
+              <a:rPr sz="2600" b="1">
                 <a:solidFill>
                   <a:srgbClr val="3542B8"/>
                 </a:solidFill>
@@ -8456,13 +8501,287 @@
       </p:sp>
       <p:sp>
         <p:nvSpPr>
-          <p:cNvPr id="10" name="Rounded Rectangle 9"/>
+          <p:cNvPr id="10" name="TextBox 9"/>
+          <p:cNvSpPr txBox="1"/>
+          <p:nvPr/>
+        </p:nvSpPr>
+        <p:spPr>
+          <a:xfrm>
+            <a:off x="7086600" y="2084831"/>
+            <a:ext cx="4535424" cy="2267712"/>
+          </a:xfrm>
+          <a:prstGeom prst="rect">
+            <a:avLst/>
+          </a:prstGeom>
+          <a:noFill/>
+        </p:spPr>
+        <p:txBody>
+          <a:bodyPr wrap="square" lIns="0" rIns="0" tIns="0" bIns="0">
+            <a:spAutoFit/>
+          </a:bodyPr>
+          <a:lstStyle/>
+          <a:p>
+            <a:pPr>
+              <a:spcAft>
+                <a:spcPts val="100"/>
+              </a:spcAft>
+            </a:pPr>
+            <a:r>
+              <a:rPr sz="1800" b="1">
+                <a:solidFill>
+                  <a:srgbClr val="3542B8"/>
+                </a:solidFill>
+                <a:latin typeface="Consolas"/>
+              </a:rPr>
+              <a:t>1 · st.radio</a:t>
+            </a:r>
+          </a:p>
+          <a:p>
+            <a:pPr>
+              <a:lnSpc>
+                <a:spcPct val="100000"/>
+              </a:lnSpc>
+              <a:spcAft>
+                <a:spcPts val="400"/>
+              </a:spcAft>
+            </a:pPr>
+            <a:r>
+              <a:rPr sz="1800" b="0">
+                <a:solidFill>
+                  <a:srgbClr val="49525F"/>
+                </a:solidFill>
+                <a:latin typeface="Calibri"/>
+              </a:rPr>
+              <a:t>cambia de tema desde PALETAS</a:t>
+            </a:r>
+          </a:p>
+          <a:p>
+            <a:pPr>
+              <a:spcAft>
+                <a:spcPts val="100"/>
+              </a:spcAft>
+            </a:pPr>
+            <a:r>
+              <a:rPr sz="1800" b="1">
+                <a:solidFill>
+                  <a:srgbClr val="3542B8"/>
+                </a:solidFill>
+                <a:latin typeface="Consolas"/>
+              </a:rPr>
+              <a:t>2 · st.number_input</a:t>
+            </a:r>
+          </a:p>
+          <a:p>
+            <a:pPr>
+              <a:lnSpc>
+                <a:spcPct val="100000"/>
+              </a:lnSpc>
+              <a:spcAft>
+                <a:spcPts val="400"/>
+              </a:spcAft>
+            </a:pPr>
+            <a:r>
+              <a:rPr sz="1800" b="0">
+                <a:solidFill>
+                  <a:srgbClr val="49525F"/>
+                </a:solidFill>
+                <a:latin typeface="Calibri"/>
+              </a:rPr>
+              <a:t>una por variable numérica</a:t>
+            </a:r>
+          </a:p>
+          <a:p>
+            <a:pPr>
+              <a:spcAft>
+                <a:spcPts val="100"/>
+              </a:spcAft>
+            </a:pPr>
+            <a:r>
+              <a:rPr sz="1800" b="1">
+                <a:solidFill>
+                  <a:srgbClr val="3542B8"/>
+                </a:solidFill>
+                <a:latin typeface="Consolas"/>
+              </a:rPr>
+              <a:t>3 · st.selectbox</a:t>
+            </a:r>
+          </a:p>
+          <a:p>
+            <a:pPr>
+              <a:lnSpc>
+                <a:spcPct val="100000"/>
+              </a:lnSpc>
+              <a:spcAft>
+                <a:spcPts val="400"/>
+              </a:spcAft>
+            </a:pPr>
+            <a:r>
+              <a:rPr sz="1800" b="0">
+                <a:solidFill>
+                  <a:srgbClr val="49525F"/>
+                </a:solidFill>
+                <a:latin typeface="Calibri"/>
+              </a:rPr>
+              <a:t>una por variable categórica</a:t>
+            </a:r>
+          </a:p>
+          <a:p>
+            <a:pPr>
+              <a:spcAft>
+                <a:spcPts val="100"/>
+              </a:spcAft>
+            </a:pPr>
+            <a:r>
+              <a:rPr sz="1800" b="1">
+                <a:solidFill>
+                  <a:srgbClr val="3542B8"/>
+                </a:solidFill>
+                <a:latin typeface="Consolas"/>
+              </a:rPr>
+              <a:t>4 · st.expander · st.popover</a:t>
+            </a:r>
+          </a:p>
+          <a:p>
+            <a:pPr>
+              <a:lnSpc>
+                <a:spcPct val="100000"/>
+              </a:lnSpc>
+              <a:spcAft>
+                <a:spcPts val="400"/>
+              </a:spcAft>
+            </a:pPr>
+            <a:r>
+              <a:rPr sz="1800" b="0">
+                <a:solidFill>
+                  <a:srgbClr val="49525F"/>
+                </a:solidFill>
+                <a:latin typeface="Calibri"/>
+              </a:rPr>
+              <a:t>lectura llana y lectura técnica</a:t>
+            </a:r>
+          </a:p>
+        </p:txBody>
+      </p:sp>
+      <p:sp>
+        <p:nvSpPr>
+          <p:cNvPr id="11" name="Rounded Rectangle 10"/>
           <p:cNvSpPr/>
           <p:nvPr/>
         </p:nvSpPr>
         <p:spPr>
           <a:xfrm>
-            <a:off x="1166317" y="3097072"/>
+            <a:off x="7086600" y="4626864"/>
+            <a:ext cx="4535424" cy="1668948"/>
+          </a:xfrm>
+          <a:prstGeom prst="roundRect">
+            <a:avLst>
+              <a:gd name="adj" fmla="val 5000"/>
+            </a:avLst>
+          </a:prstGeom>
+          <a:solidFill>
+            <a:srgbClr val="E6E8FA"/>
+          </a:solidFill>
+          <a:ln w="15875">
+            <a:solidFill>
+              <a:srgbClr val="4353CC"/>
+            </a:solidFill>
+          </a:ln>
+          <a:effectLst/>
+        </p:spPr>
+        <p:style>
+          <a:lnRef idx="1">
+            <a:schemeClr val="accent1"/>
+          </a:lnRef>
+          <a:fillRef idx="3">
+            <a:schemeClr val="accent1"/>
+          </a:fillRef>
+          <a:effectRef idx="2">
+            <a:schemeClr val="accent1"/>
+          </a:effectRef>
+          <a:fontRef idx="minor">
+            <a:schemeClr val="lt1"/>
+          </a:fontRef>
+        </p:style>
+        <p:txBody>
+          <a:bodyPr rtlCol="0" anchor="t" wrap="square" lIns="182880" rIns="182880" tIns="128016" bIns="128016"/>
+          <a:lstStyle/>
+          <a:p>
+            <a:pPr algn="ctr"/>
+          </a:p>
+        </p:txBody>
+      </p:sp>
+      <p:sp>
+        <p:nvSpPr>
+          <p:cNvPr id="12" name="TextBox 11"/>
+          <p:cNvSpPr txBox="1"/>
+          <p:nvPr/>
+        </p:nvSpPr>
+        <p:spPr>
+          <a:xfrm>
+            <a:off x="7269480" y="4754879"/>
+            <a:ext cx="4206240" cy="292608"/>
+          </a:xfrm>
+          <a:prstGeom prst="rect">
+            <a:avLst/>
+          </a:prstGeom>
+          <a:noFill/>
+        </p:spPr>
+        <p:txBody>
+          <a:bodyPr wrap="square" lIns="0" rIns="0" tIns="0" bIns="0">
+            <a:spAutoFit/>
+          </a:bodyPr>
+          <a:lstStyle/>
+          <a:p>
+            <a:pPr>
+              <a:spcAft>
+                <a:spcPts val="0"/>
+              </a:spcAft>
+            </a:pPr>
+            <a:r>
+              <a:rPr sz="1800" b="1">
+                <a:solidFill>
+                  <a:srgbClr val="3542B8"/>
+                </a:solidFill>
+                <a:latin typeface="Consolas"/>
+              </a:rPr>
+              <a:t>5 · st.slider + st.fragment</a:t>
+            </a:r>
+          </a:p>
+        </p:txBody>
+      </p:sp>
+      <p:pic>
+        <p:nvPicPr>
+          <p:cNvPr id="13" name="Picture 12" descr="cloud_umbral_control_pulida.png"/>
+          <p:cNvPicPr>
+            <a:picLocks noChangeAspect="1"/>
+          </p:cNvPicPr>
+          <p:nvPr/>
+        </p:nvPicPr>
+        <p:blipFill>
+          <a:blip r:embed="rId3"/>
+          <a:stretch>
+            <a:fillRect/>
+          </a:stretch>
+        </p:blipFill>
+        <p:spPr>
+          <a:xfrm>
+            <a:off x="7242048" y="5102352"/>
+            <a:ext cx="4224528" cy="974004"/>
+          </a:xfrm>
+          <a:prstGeom prst="rect">
+            <a:avLst/>
+          </a:prstGeom>
+        </p:spPr>
+      </p:pic>
+      <p:sp>
+        <p:nvSpPr>
+          <p:cNvPr id="14" name="Rounded Rectangle 13"/>
+          <p:cNvSpPr/>
+          <p:nvPr/>
+        </p:nvSpPr>
+        <p:spPr>
+          <a:xfrm>
+            <a:off x="10030236" y="5530913"/>
             <a:ext cx="144475" cy="274320"/>
           </a:xfrm>
           <a:prstGeom prst="roundRect">
@@ -8517,250 +8836,7 @@
       </p:sp>
       <p:sp>
         <p:nvSpPr>
-          <p:cNvPr id="11" name="TextBox 10"/>
-          <p:cNvSpPr txBox="1"/>
-          <p:nvPr/>
-        </p:nvSpPr>
-        <p:spPr>
-          <a:xfrm>
-            <a:off x="7086600" y="2103120"/>
-            <a:ext cx="4535424" cy="2724912"/>
-          </a:xfrm>
-          <a:prstGeom prst="rect">
-            <a:avLst/>
-          </a:prstGeom>
-          <a:noFill/>
-        </p:spPr>
-        <p:txBody>
-          <a:bodyPr wrap="square" lIns="0" rIns="0" tIns="0" bIns="0">
-            <a:spAutoFit/>
-          </a:bodyPr>
-          <a:lstStyle/>
-          <a:p>
-            <a:pPr>
-              <a:spcAft>
-                <a:spcPts val="100"/>
-              </a:spcAft>
-            </a:pPr>
-            <a:r>
-              <a:rPr sz="1800" b="1">
-                <a:solidFill>
-                  <a:srgbClr val="3542B8"/>
-                </a:solidFill>
-                <a:latin typeface="Consolas"/>
-              </a:rPr>
-              <a:t>1 · st.radio</a:t>
-            </a:r>
-          </a:p>
-          <a:p>
-            <a:pPr>
-              <a:lnSpc>
-                <a:spcPct val="102000"/>
-              </a:lnSpc>
-              <a:spcAft>
-                <a:spcPts val="1300"/>
-              </a:spcAft>
-            </a:pPr>
-            <a:r>
-              <a:rPr sz="1800" b="0">
-                <a:solidFill>
-                  <a:srgbClr val="49525F"/>
-                </a:solidFill>
-                <a:latin typeface="Calibri"/>
-              </a:rPr>
-              <a:t>cambia de tema desde PALETAS</a:t>
-            </a:r>
-          </a:p>
-          <a:p>
-            <a:pPr>
-              <a:spcAft>
-                <a:spcPts val="100"/>
-              </a:spcAft>
-            </a:pPr>
-            <a:r>
-              <a:rPr sz="1800" b="1">
-                <a:solidFill>
-                  <a:srgbClr val="3542B8"/>
-                </a:solidFill>
-                <a:latin typeface="Consolas"/>
-              </a:rPr>
-              <a:t>2 · st.number_input</a:t>
-            </a:r>
-          </a:p>
-          <a:p>
-            <a:pPr>
-              <a:lnSpc>
-                <a:spcPct val="102000"/>
-              </a:lnSpc>
-              <a:spcAft>
-                <a:spcPts val="1300"/>
-              </a:spcAft>
-            </a:pPr>
-            <a:r>
-              <a:rPr sz="1800" b="0">
-                <a:solidFill>
-                  <a:srgbClr val="49525F"/>
-                </a:solidFill>
-                <a:latin typeface="Calibri"/>
-              </a:rPr>
-              <a:t>una por variable numérica</a:t>
-            </a:r>
-          </a:p>
-          <a:p>
-            <a:pPr>
-              <a:spcAft>
-                <a:spcPts val="100"/>
-              </a:spcAft>
-            </a:pPr>
-            <a:r>
-              <a:rPr sz="1800" b="1">
-                <a:solidFill>
-                  <a:srgbClr val="3542B8"/>
-                </a:solidFill>
-                <a:latin typeface="Consolas"/>
-              </a:rPr>
-              <a:t>3 · st.selectbox</a:t>
-            </a:r>
-          </a:p>
-          <a:p>
-            <a:pPr>
-              <a:lnSpc>
-                <a:spcPct val="102000"/>
-              </a:lnSpc>
-              <a:spcAft>
-                <a:spcPts val="1300"/>
-              </a:spcAft>
-            </a:pPr>
-            <a:r>
-              <a:rPr sz="1800" b="0">
-                <a:solidFill>
-                  <a:srgbClr val="49525F"/>
-                </a:solidFill>
-                <a:latin typeface="Calibri"/>
-              </a:rPr>
-              <a:t>una por variable categórica</a:t>
-            </a:r>
-          </a:p>
-          <a:p>
-            <a:pPr>
-              <a:spcAft>
-                <a:spcPts val="100"/>
-              </a:spcAft>
-            </a:pPr>
-            <a:r>
-              <a:rPr sz="1800" b="1">
-                <a:solidFill>
-                  <a:srgbClr val="3542B8"/>
-                </a:solidFill>
-                <a:latin typeface="Consolas"/>
-              </a:rPr>
-              <a:t>4 · st.expander · st.popover</a:t>
-            </a:r>
-          </a:p>
-          <a:p>
-            <a:pPr>
-              <a:lnSpc>
-                <a:spcPct val="102000"/>
-              </a:lnSpc>
-              <a:spcAft>
-                <a:spcPts val="1300"/>
-              </a:spcAft>
-            </a:pPr>
-            <a:r>
-              <a:rPr sz="1800" b="0">
-                <a:solidFill>
-                  <a:srgbClr val="49525F"/>
-                </a:solidFill>
-                <a:latin typeface="Calibri"/>
-              </a:rPr>
-              <a:t>lectura llana y lectura técnica</a:t>
-            </a:r>
-          </a:p>
-        </p:txBody>
-      </p:sp>
-      <p:sp>
-        <p:nvSpPr>
-          <p:cNvPr id="12" name="Rounded Rectangle 11"/>
-          <p:cNvSpPr/>
-          <p:nvPr/>
-        </p:nvSpPr>
-        <p:spPr>
-          <a:xfrm>
-            <a:off x="7086600" y="4864608"/>
-            <a:ext cx="4535424" cy="1417320"/>
-          </a:xfrm>
-          <a:prstGeom prst="roundRect">
-            <a:avLst>
-              <a:gd name="adj" fmla="val 5000"/>
-            </a:avLst>
-          </a:prstGeom>
-          <a:solidFill>
-            <a:srgbClr val="E6E8FA"/>
-          </a:solidFill>
-          <a:ln w="15875">
-            <a:solidFill>
-              <a:srgbClr val="4353CC"/>
-            </a:solidFill>
-          </a:ln>
-          <a:effectLst/>
-        </p:spPr>
-        <p:style>
-          <a:lnRef idx="1">
-            <a:schemeClr val="accent1"/>
-          </a:lnRef>
-          <a:fillRef idx="3">
-            <a:schemeClr val="accent1"/>
-          </a:fillRef>
-          <a:effectRef idx="2">
-            <a:schemeClr val="accent1"/>
-          </a:effectRef>
-          <a:fontRef idx="minor">
-            <a:schemeClr val="lt1"/>
-          </a:fontRef>
-        </p:style>
-        <p:txBody>
-          <a:bodyPr rtlCol="0" anchor="t" wrap="square" lIns="182880" rIns="182880" tIns="128016" bIns="128016"/>
-          <a:lstStyle/>
-          <a:p>
-            <a:pPr algn="ctr">
-              <a:spcAft>
-                <a:spcPts val="200"/>
-              </a:spcAft>
-            </a:pPr>
-            <a:r>
-              <a:rPr sz="1800" b="1">
-                <a:solidFill>
-                  <a:srgbClr val="3542B8"/>
-                </a:solidFill>
-                <a:latin typeface="Consolas"/>
-              </a:rPr>
-              <a:t>5 · st.slider + st.fragment</a:t>
-            </a:r>
-          </a:p>
-          <a:p>
-            <a:pPr>
-              <a:lnSpc>
-                <a:spcPct val="102000"/>
-              </a:lnSpc>
-              <a:spcAft>
-                <a:spcPts val="0"/>
-              </a:spcAft>
-            </a:pPr>
-            <a:r>
-              <a:rPr sz="1800" b="0">
-                <a:solidFill>
-                  <a:srgbClr val="1E232B"/>
-                </a:solidFill>
-                <a:latin typeface="Calibri"/>
-              </a:rPr>
-              <a:t>El umbral vive en «Empleo informal» (marcador 5): moverlo reejecuta solo ese fragmento, no la página entera.</a:t>
-            </a:r>
-          </a:p>
-        </p:txBody>
-      </p:sp>
-      <p:sp>
-        <p:nvSpPr>
-          <p:cNvPr id="13" name="TextBox 12"/>
+          <p:cNvPr id="15" name="TextBox 14"/>
           <p:cNvSpPr txBox="1"/>
           <p:nvPr/>
         </p:nvSpPr>
@@ -8946,7 +9022,7 @@
                 </a:solidFill>
                 <a:latin typeface="Calibri"/>
               </a:rPr>
-              <a:t>Tres controles rodean cada entrega: los contratos app–artefactos, la autoría de cada commit y el QA del DOM real.</a:t>
+              <a:t>Tres controles rodean cada entrega: que la app y los archivos del modelo digan lo mismo, quién publicó cada versión, y qué se ve de verdad en la app.</a:t>
             </a:r>
           </a:p>
         </p:txBody>
@@ -9077,7 +9153,7 @@
                           </a:solidFill>
                           <a:latin typeface="Calibri"/>
                         </a:rPr>
-                        <a:t>Los tres fallos que la app tuvo en producción, reproducidos sin navegador: si vuelven, saltan en local, no en la nube.</a:t>
+                        <a:t>Que la app no pida nada que sus archivos no tengan. Los tres fallos reales están reproducidos sin navegador: si vuelven, saltan en local y no en la nube.</a:t>
                       </a:r>
                     </a:p>
                   </a:txBody>
@@ -9258,8 +9334,8 @@
         </p:nvSpPr>
         <p:spPr>
           <a:xfrm>
-            <a:off x="566928" y="5084064"/>
-            <a:ext cx="11055096" cy="1005840"/>
+            <a:off x="566928" y="4919472"/>
+            <a:ext cx="11055096" cy="1389888"/>
           </a:xfrm>
           <a:prstGeom prst="roundRect">
             <a:avLst>
@@ -9295,11 +9371,27 @@
           <a:lstStyle/>
           <a:p>
             <a:pPr algn="ctr">
+              <a:spcAft>
+                <a:spcPts val="500"/>
+              </a:spcAft>
+            </a:pPr>
+            <a:r>
+              <a:rPr sz="1400" b="0">
+                <a:solidFill>
+                  <a:srgbClr val="3542B8"/>
+                </a:solidFill>
+                <a:latin typeface="Consolas"/>
+              </a:rPr>
+              <a:t>LOS TRES FALLOS DEL 20 DE AGOSTO, HOY CADA UNO UN TEST</a:t>
+            </a:r>
+          </a:p>
+          <a:p>
+            <a:pPr>
               <a:lnSpc>
-                <a:spcPct val="106000"/>
+                <a:spcPct val="100000"/>
               </a:lnSpc>
               <a:spcAft>
-                <a:spcPts val="0"/>
+                <a:spcPts val="200"/>
               </a:spcAft>
             </a:pPr>
             <a:r>
@@ -9309,7 +9401,45 @@
                 </a:solidFill>
                 <a:latin typeface="Calibri"/>
               </a:rPr>
-              <a:t>Un despliegue del 20 de agosto rompió tres contratos entre la app y sus proveedores. Hoy cada uno de esos fallos es un test que corre antes de publicar: el mismo error no puede volver.</a:t>
+              <a:t>—  Un tema del selector no estaba en la paleta: elegirlo dejaba la app en blanco, sin vuelta atrás.</a:t>
+            </a:r>
+          </a:p>
+          <a:p>
+            <a:pPr>
+              <a:lnSpc>
+                <a:spcPct val="100000"/>
+              </a:lnSpc>
+              <a:spcAft>
+                <a:spcPts val="200"/>
+              </a:spcAft>
+            </a:pPr>
+            <a:r>
+              <a:rPr sz="1800" b="0">
+                <a:solidFill>
+                  <a:srgbClr val="1E232B"/>
+                </a:solidFill>
+                <a:latin typeface="Calibri"/>
+              </a:rPr>
+              <a:t>—  La app pedía un gráfico que el módulo desplegado no tenía: la página se cortaba a medio dibujo.</a:t>
+            </a:r>
+          </a:p>
+          <a:p>
+            <a:pPr>
+              <a:lnSpc>
+                <a:spcPct val="100000"/>
+              </a:lnSpc>
+              <a:spcAft>
+                <a:spcPts val="200"/>
+              </a:spcAft>
+            </a:pPr>
+            <a:r>
+              <a:rPr sz="1800" b="0">
+                <a:solidFill>
+                  <a:srgbClr val="1E232B"/>
+                </a:solidFill>
+                <a:latin typeface="Calibri"/>
+              </a:rPr>
+              <a:t>—  Se renombró una clave del artefacto y la app siguió sirviendo la vieja desde su caché.</a:t>
             </a:r>
           </a:p>
         </p:txBody>
@@ -10227,7 +10357,7 @@
                 </a:solidFill>
                 <a:latin typeface="Calibri"/>
               </a:rPr>
-              <a:t>Se baraja una variable al azar y se mide cuántos soles más falla el modelo: mide uso, no causa.</a:t>
+              <a:t>Con el modelo ya entrenado, desordenamos una columna a la vez y medimos cuánto empeora el error promedio. Mide cuánto la usa el modelo, no qué la causa.</a:t>
             </a:r>
           </a:p>
         </p:txBody>
@@ -10350,7 +10480,7 @@
                 </a:solidFill>
                 <a:latin typeface="Calibri"/>
               </a:rPr>
-              <a:t>Lo que sube el error medio al desordenar esta columna al azar.</a:t>
+              <a:t>Lo que sube el error al mes si el modelo se queda sin ella.</a:t>
             </a:r>
           </a:p>
         </p:txBody>
@@ -10449,7 +10579,7 @@
                 </a:solidFill>
                 <a:latin typeface="Calibri"/>
               </a:rPr>
-              <a:t>La segunda que más pesa: juntas, la mitad del efecto.</a:t>
+              <a:t>La segunda que más usa el modelo, con el mismo cálculo.</a:t>
             </a:r>
           </a:p>
         </p:txBody>

--- a/docs/presentacion/ENAHO_exposicion.pptx
+++ b/docs/presentacion/ENAHO_exposicion.pptx
@@ -793,7 +793,7 @@
           <a:lstStyle/>
           <a:p>
             <a:r>
-              <a:t>La app tiene cuatro secciones; estas son las dos que hacen predicción. A la izquierda, el formulario del regresor: se describe un perfil laboral y devuelve un ingreso mensual típico en soles. A la derecha, la pestaña de informalidad: con las mismas once variables devuelve una probabilidad y, según dónde se ponga el umbral, un veredicto. Son dos modelos independientes que comparten las entradas, no un modelo con dos salidas. Las otras dos secciones son el torneo de modelos y la ficha técnica. Y toda la app se explica sola: cada sección tiene una lectura llana y un expander de detalle técnico, los gráficos etiquetan qué es DATO, qué es MECÁNICA y qué es HIPÓTESIS, la matriz de confusión está nombrada en castellano, y hay 15 referencias bibliográficas con el enlace comprobado una a una. Nadie necesita abrir el código para entender qué está viendo.</a:t>
+              <a:t>Primero la base, que es la franja de arriba: microdatos públicos de la ENAHO 2025 del INEI, tres módulos —el 02 de miembros del hogar, el 03 de educación y el 05 de empleo e ingresos— cruzados por persona. Tras los filtros documentados quedan 47.632 trabajadores con ingreso laboral, descritos por once variables: cinco numéricas y seis categóricas, las mismas para los dos modelos; el detalle variable a variable viene unas láminas más adelante. Sobre esa base, la app tiene cuatro secciones y estas son las dos que hacen predicción. A la izquierda, el formulario del regresor: se describe un perfil laboral y devuelve un ingreso mensual típico en soles. A la derecha, la pestaña de informalidad: con las mismas once variables devuelve una probabilidad y, según dónde se ponga el umbral, un veredicto. Son dos modelos independientes que comparten las entradas, no un modelo con dos salidas. Y toda la app se explica sola: lectura llana con expander técnico, gráficos etiquetados como DATO, MECÁNICA o HIPÓTESIS, la matriz de confusión en castellano, y 15 referencias con el enlace comprobado una a una. Nadie necesita abrir el código para entender qué está viendo.</a:t>
             </a:r>
           </a:p>
         </p:txBody>
@@ -863,7 +863,7 @@
           <a:lstStyle/>
           <a:p>
             <a:r>
-              <a:t>Esta es la lámina que sostiene todo lo demás. El pipeline completo corre en local, en VS Code: los scripts numerados del 00 al 09 leen los microdatos del INEI, entrenan los modelos y escriben los artefactos: dos .joblib y los JSON de contrato con la app. Los microdatos son 601,3 megabytes que el .gitignore excluye por diseño: no se redistribuyen, se enlaza a la fuente. Lo que sale de la máquina son 8,74 megabytes en 108 archivos, en carpetas con un rol fijo: src/ para el entrenamiento, models/ para los artefactos, app/ para lo desplegado, docs/ y reports/ para la evidencia. GitHub recibe el push, avisa por webhook a Streamlit Community Cloud, y la nube reconstruye el entorno y publica. Entre guardar en el editor y ver el cambio en el navegador no hay ningún paso manual: esa es la definición de despliegue continuo que defendemos aquí.</a:t>
+              <a:t>Esta es la lámina que sostiene todo lo demás. El pipeline completo corre en local, en VS Code: los scripts numerados del 00 al 09 leen los microdatos del INEI, entrenan los modelos y escriben los artefactos: dos .joblib y los JSON de contrato con la app. Los microdatos son 601,3 megabytes que el .gitignore excluye por diseño: no se redistribuyen, se enlaza a la fuente. Lo que sale de la máquina son 8,80 megabytes en 111 archivos, en carpetas con un rol fijo: src/ para el entrenamiento, models/ para los artefactos, app/ para lo desplegado, docs/ y reports/ para la evidencia. GitHub recibe el push, avisa por webhook a Streamlit Community Cloud, y la nube reconstruye el entorno y publica. Entre guardar en el editor y ver el cambio en el navegador no hay ningún paso manual: esa es la definición de despliegue continuo que defendemos aquí.</a:t>
             </a:r>
           </a:p>
         </p:txBody>
@@ -1283,7 +1283,7 @@
           <a:lstStyle/>
           <a:p>
             <a:r>
-              <a:t>Tomamos una variable, desordenamos sus valores al azar entre las personas, y medimos cuántos soles más se equivoca el modelo. La categoría ocupacional sube el error en unos S/ 139 al mes y los años de educación en unos S/ 128. Ojo con la lectura: esto mide cuánto usa el modelo cada variable, no cuánto causa cada variable en el ingreso real. Para la lectura causal está el modelo explicativo E6, una regresión ponderada aparte que está en la app: ahí cada año de educación se asocia a un 4,8 % más de ingreso y vivir en zona urbana a un 32,3 % más. En el clasificador hicimos además una ablación estructural: quitar el tamaño de empresa y la categoría ocupacional baja el PR-AUC de 0,9626 a 0,9415; esas dos variables llevan gran parte de la señal, lo cual es coherente con cómo se define la informalidad.</a:t>
+              <a:t>Tomamos una variable, desordenamos sus valores al azar entre las personas, y medimos cuánto empeora cada modelo ya entrenado. En el regresor eso se mide en soles: la categoría ocupacional sube el error en unos S/ 139 al mes y los años de educación en unos S/ 128. En el clasificador, el mismo ejercicio se mide en puntos de PR-AUC: barajar el tamaño de empresa le quita 0,046, la categoría ocupacional 0,031 y los años de educación 0,025. Es el mismo trío en los dos modelos, en distinto orden — y coherente con la ablación estructural: quitar tamaño y categoría juntas baja el PR-AUC de 0,9626 a 0,9415. Ojo con la lectura: esto mide cuánto usa cada modelo la variable, no cuánto causa la variable en la realidad. Para la lectura causal está el modelo explicativo E6, una regresión ponderada aparte que está en la app: ahí cada año de educación se asocia a un 4,8 % más de ingreso y vivir en zona urbana a un 32,3 % más.</a:t>
             </a:r>
           </a:p>
         </p:txBody>
@@ -6775,9 +6775,163 @@
           </a:p>
         </p:txBody>
       </p:sp>
+      <p:sp>
+        <p:nvSpPr>
+          <p:cNvPr id="5" name="Rounded Rectangle 4"/>
+          <p:cNvSpPr/>
+          <p:nvPr/>
+        </p:nvSpPr>
+        <p:spPr>
+          <a:xfrm>
+            <a:off x="566928" y="2066543"/>
+            <a:ext cx="11055096" cy="731520"/>
+          </a:xfrm>
+          <a:prstGeom prst="roundRect">
+            <a:avLst>
+              <a:gd name="adj" fmla="val 5000"/>
+            </a:avLst>
+          </a:prstGeom>
+          <a:solidFill>
+            <a:srgbClr val="E6E8FA"/>
+          </a:solidFill>
+          <a:ln w="15875">
+            <a:solidFill>
+              <a:srgbClr val="4353CC"/>
+            </a:solidFill>
+          </a:ln>
+          <a:effectLst/>
+        </p:spPr>
+        <p:style>
+          <a:lnRef idx="1">
+            <a:schemeClr val="accent1"/>
+          </a:lnRef>
+          <a:fillRef idx="3">
+            <a:schemeClr val="accent1"/>
+          </a:fillRef>
+          <a:effectRef idx="2">
+            <a:schemeClr val="accent1"/>
+          </a:effectRef>
+          <a:fontRef idx="minor">
+            <a:schemeClr val="lt1"/>
+          </a:fontRef>
+        </p:style>
+        <p:txBody>
+          <a:bodyPr rtlCol="0" anchor="ctr" wrap="square" lIns="182880" rIns="182880" tIns="128016" bIns="128016"/>
+          <a:lstStyle/>
+          <a:p>
+            <a:pPr algn="ctr">
+              <a:lnSpc>
+                <a:spcPct val="104000"/>
+              </a:lnSpc>
+              <a:spcAft>
+                <a:spcPts val="0"/>
+              </a:spcAft>
+            </a:pPr>
+            <a:r>
+              <a:rPr sz="1800" b="0">
+                <a:solidFill>
+                  <a:srgbClr val="1E232B"/>
+                </a:solidFill>
+                <a:latin typeface="Calibri"/>
+              </a:rPr>
+              <a:t>La base: ENAHO 2025 (INEI), módulos </a:t>
+            </a:r>
+            <a:r>
+              <a:rPr sz="1800" b="1">
+                <a:solidFill>
+                  <a:srgbClr val="3542B8"/>
+                </a:solidFill>
+                <a:latin typeface="Consolas"/>
+              </a:rPr>
+              <a:t>02 · 03 · 05</a:t>
+            </a:r>
+            <a:r>
+              <a:rPr sz="1800" b="0">
+                <a:solidFill>
+                  <a:srgbClr val="5F6875"/>
+                </a:solidFill>
+                <a:latin typeface="Calibri"/>
+              </a:rPr>
+              <a:t> — </a:t>
+            </a:r>
+            <a:r>
+              <a:rPr sz="1800" b="1">
+                <a:solidFill>
+                  <a:srgbClr val="3542B8"/>
+                </a:solidFill>
+                <a:latin typeface="Consolas"/>
+              </a:rPr>
+              <a:t>47.632</a:t>
+            </a:r>
+            <a:r>
+              <a:rPr sz="1800" b="0">
+                <a:solidFill>
+                  <a:srgbClr val="1E232B"/>
+                </a:solidFill>
+                <a:latin typeface="Calibri"/>
+              </a:rPr>
+              <a:t> trabajadores con ingreso laboral · </a:t>
+            </a:r>
+            <a:r>
+              <a:rPr sz="1800" b="1">
+                <a:solidFill>
+                  <a:srgbClr val="3542B8"/>
+                </a:solidFill>
+                <a:latin typeface="Consolas"/>
+              </a:rPr>
+              <a:t>11</a:t>
+            </a:r>
+            <a:r>
+              <a:rPr sz="1800" b="0">
+                <a:solidFill>
+                  <a:srgbClr val="1E232B"/>
+                </a:solidFill>
+                <a:latin typeface="Calibri"/>
+              </a:rPr>
+              <a:t> variables de entrada: </a:t>
+            </a:r>
+            <a:r>
+              <a:rPr sz="1800" b="1">
+                <a:solidFill>
+                  <a:srgbClr val="3542B8"/>
+                </a:solidFill>
+                <a:latin typeface="Consolas"/>
+              </a:rPr>
+              <a:t>5</a:t>
+            </a:r>
+            <a:r>
+              <a:rPr sz="1800" b="0">
+                <a:solidFill>
+                  <a:srgbClr val="1E232B"/>
+                </a:solidFill>
+                <a:latin typeface="Calibri"/>
+              </a:rPr>
+              <a:t> numéricas y </a:t>
+            </a:r>
+            <a:r>
+              <a:rPr sz="1800" b="1">
+                <a:solidFill>
+                  <a:srgbClr val="3542B8"/>
+                </a:solidFill>
+                <a:latin typeface="Consolas"/>
+              </a:rPr>
+              <a:t>6</a:t>
+            </a:r>
+            <a:r>
+              <a:rPr sz="1800" b="0">
+                <a:solidFill>
+                  <a:srgbClr val="1E232B"/>
+                </a:solidFill>
+                <a:latin typeface="Calibri"/>
+              </a:rPr>
+              <a:t> categóricas</a:t>
+            </a:r>
+          </a:p>
+        </p:txBody>
+      </p:sp>
       <p:pic>
         <p:nvPicPr>
-          <p:cNvPr id="5" name="Picture 4" descr="cloud_reg_panel_pulida.png"/>
+          <p:cNvPr id="6" name="Picture 5" descr="cloud_reg_panel_pulida.png"/>
           <p:cNvPicPr>
             <a:picLocks noChangeAspect="1"/>
           </p:cNvPicPr>
@@ -6791,8 +6945,8 @@
         </p:blipFill>
         <p:spPr>
           <a:xfrm>
-            <a:off x="1293661" y="2066543"/>
-            <a:ext cx="3904916" cy="2761487"/>
+            <a:off x="1681567" y="2907791"/>
+            <a:ext cx="3129105" cy="2212848"/>
           </a:xfrm>
           <a:prstGeom prst="rect">
             <a:avLst/>
@@ -6801,7 +6955,7 @@
       </p:pic>
       <p:pic>
         <p:nvPicPr>
-          <p:cNvPr id="6" name="Picture 5" descr="cloud_clf_panel_pulida.png"/>
+          <p:cNvPr id="7" name="Picture 6" descr="cloud_clf_panel_pulida.png"/>
           <p:cNvPicPr>
             <a:picLocks noChangeAspect="1"/>
           </p:cNvPicPr>
@@ -6815,8 +6969,8 @@
         </p:blipFill>
         <p:spPr>
           <a:xfrm>
-            <a:off x="6990373" y="2066543"/>
-            <a:ext cx="3904916" cy="2761487"/>
+            <a:off x="7378279" y="2907791"/>
+            <a:ext cx="3129105" cy="2212848"/>
           </a:xfrm>
           <a:prstGeom prst="rect">
             <a:avLst/>
@@ -6825,14 +6979,14 @@
       </p:pic>
       <p:sp>
         <p:nvSpPr>
-          <p:cNvPr id="7" name="Rounded Rectangle 6"/>
+          <p:cNvPr id="8" name="Rounded Rectangle 7"/>
           <p:cNvSpPr/>
           <p:nvPr/>
         </p:nvSpPr>
         <p:spPr>
           <a:xfrm>
-            <a:off x="566928" y="4937760"/>
-            <a:ext cx="5358384" cy="1353312"/>
+            <a:off x="566928" y="5230368"/>
+            <a:ext cx="5358384" cy="1170432"/>
           </a:xfrm>
           <a:prstGeom prst="roundRect">
             <a:avLst>
@@ -6869,7 +7023,7 @@
           <a:p>
             <a:pPr algn="ctr">
               <a:spcAft>
-                <a:spcPts val="600"/>
+                <a:spcPts val="500"/>
               </a:spcAft>
             </a:pPr>
             <a:r>
@@ -6885,7 +7039,7 @@
           <a:p>
             <a:pPr>
               <a:lnSpc>
-                <a:spcPct val="106000"/>
+                <a:spcPct val="104000"/>
               </a:lnSpc>
               <a:spcAft>
                 <a:spcPts val="0"/>
@@ -6898,21 +7052,21 @@
                 </a:solidFill>
                 <a:latin typeface="Calibri"/>
               </a:rPr>
-              <a:t>Estima el ingreso laboral mensual en soles con Gradient Boosting sobre el logaritmo del ingreso (especificación E9).</a:t>
-            </a:r>
-          </a:p>
-        </p:txBody>
-      </p:sp>
-      <p:sp>
-        <p:nvSpPr>
-          <p:cNvPr id="8" name="Rounded Rectangle 7"/>
+              <a:t>Estima el ingreso laboral mensual en soles con Gradient Boosting (especificación E9).</a:t>
+            </a:r>
+          </a:p>
+        </p:txBody>
+      </p:sp>
+      <p:sp>
+        <p:nvSpPr>
+          <p:cNvPr id="9" name="Rounded Rectangle 8"/>
           <p:cNvSpPr/>
           <p:nvPr/>
         </p:nvSpPr>
         <p:spPr>
           <a:xfrm>
-            <a:off x="6263640" y="4937760"/>
-            <a:ext cx="5358384" cy="1353312"/>
+            <a:off x="6263640" y="5230368"/>
+            <a:ext cx="5358384" cy="1170432"/>
           </a:xfrm>
           <a:prstGeom prst="roundRect">
             <a:avLst>
@@ -6949,7 +7103,7 @@
           <a:p>
             <a:pPr algn="ctr">
               <a:spcAft>
-                <a:spcPts val="600"/>
+                <a:spcPts val="500"/>
               </a:spcAft>
             </a:pPr>
             <a:r>
@@ -6965,7 +7119,7 @@
           <a:p>
             <a:pPr>
               <a:lnSpc>
-                <a:spcPct val="106000"/>
+                <a:spcPct val="104000"/>
               </a:lnSpc>
               <a:spcAft>
                 <a:spcPts val="0"/>
@@ -6978,14 +7132,14 @@
                 </a:solidFill>
                 <a:latin typeface="Calibri"/>
               </a:rPr>
-              <a:t>Estima la probabilidad de que el empleo sea informal, también con Gradient Boosting, sobre las mismas once variables.</a:t>
-            </a:r>
-          </a:p>
-        </p:txBody>
-      </p:sp>
-      <p:sp>
-        <p:nvSpPr>
-          <p:cNvPr id="9" name="TextBox 8"/>
+              <a:t>Estima la probabilidad de que el empleo sea informal, con las mismas 11 variables.</a:t>
+            </a:r>
+          </a:p>
+        </p:txBody>
+      </p:sp>
+      <p:sp>
+        <p:nvSpPr>
+          <p:cNvPr id="10" name="TextBox 9"/>
           <p:cNvSpPr txBox="1"/>
           <p:nvPr/>
         </p:nvSpPr>
@@ -7017,7 +7171,7 @@
                 </a:solidFill>
                 <a:latin typeface="Calibri"/>
               </a:rPr>
-              <a:t>Fuente: capturas de la app desplegada en Streamlit Community Cloud (enaho-ingresos-informalidad.streamlit.app).</a:t>
+              <a:t>Fuente: INFORME_AUDITORIA.md §4 (embudo) · models/feature_schema.json (variables) · capturas de la app desplegada (enaho-ingresos-informalidad.streamlit.app).</a:t>
             </a:r>
           </a:p>
         </p:txBody>
@@ -10315,7 +10469,7 @@
                 </a:solidFill>
                 <a:latin typeface="Calibri"/>
               </a:rPr>
-              <a:t>La categoría ocupacional y la educación son las variables que más cargan el regresor</a:t>
+              <a:t>Las mismas tres variables cargan los dos modelos: categoría, educación y tamaño de empresa</a:t>
             </a:r>
           </a:p>
         </p:txBody>
@@ -10357,7 +10511,7 @@
                 </a:solidFill>
                 <a:latin typeface="Calibri"/>
               </a:rPr>
-              <a:t>Con el modelo ya entrenado, desordenamos una columna a la vez y medimos cuánto empeora el error promedio. Mide cuánto la usa el modelo, no qué la causa.</a:t>
+              <a:t>Con cada modelo ya entrenado, desordenamos una columna a la vez y medimos cuánto empeora: soles de error en el regresor, puntos de PR-AUC en el clasificador. Uso, no causa.</a:t>
             </a:r>
           </a:p>
         </p:txBody>
@@ -10394,8 +10548,8 @@
         </p:nvSpPr>
         <p:spPr>
           <a:xfrm>
-            <a:off x="8101583" y="2203703"/>
-            <a:ext cx="3520440" cy="1737360"/>
+            <a:off x="8101583" y="2112263"/>
+            <a:ext cx="3520440" cy="1261872"/>
           </a:xfrm>
           <a:prstGeom prst="roundRect">
             <a:avLst>
@@ -10455,7 +10609,7 @@
               </a:spcAft>
             </a:pPr>
             <a:r>
-              <a:rPr sz="3400" b="1">
+              <a:rPr sz="3000" b="1">
                 <a:solidFill>
                   <a:srgbClr val="4353CC"/>
                 </a:solidFill>
@@ -10480,7 +10634,7 @@
                 </a:solidFill>
                 <a:latin typeface="Calibri"/>
               </a:rPr>
-              <a:t>Lo que sube el error al mes si el modelo se queda sin ella.</a:t>
+              <a:t>Soles de error si se pierde.</a:t>
             </a:r>
           </a:p>
         </p:txBody>
@@ -10493,8 +10647,8 @@
         </p:nvSpPr>
         <p:spPr>
           <a:xfrm>
-            <a:off x="8101583" y="4078224"/>
-            <a:ext cx="3520440" cy="1737360"/>
+            <a:off x="8101583" y="3465576"/>
+            <a:ext cx="3520440" cy="1261872"/>
           </a:xfrm>
           <a:prstGeom prst="roundRect">
             <a:avLst>
@@ -10554,7 +10708,7 @@
               </a:spcAft>
             </a:pPr>
             <a:r>
-              <a:rPr sz="3400" b="1">
+              <a:rPr sz="3000" b="1">
                 <a:solidFill>
                   <a:srgbClr val="4353CC"/>
                 </a:solidFill>
@@ -10579,32 +10733,154 @@
                 </a:solidFill>
                 <a:latin typeface="Calibri"/>
               </a:rPr>
-              <a:t>La segunda que más usa el modelo, con el mismo cálculo.</a:t>
-            </a:r>
-          </a:p>
-        </p:txBody>
-      </p:sp>
-      <p:sp>
-        <p:nvSpPr>
-          <p:cNvPr id="8" name="TextBox 7"/>
-          <p:cNvSpPr txBox="1"/>
+              <a:t>La segunda, mismo cálculo.</a:t>
+            </a:r>
+          </a:p>
+        </p:txBody>
+      </p:sp>
+      <p:sp>
+        <p:nvSpPr>
+          <p:cNvPr id="8" name="Rounded Rectangle 7"/>
+          <p:cNvSpPr/>
           <p:nvPr/>
         </p:nvSpPr>
         <p:spPr>
           <a:xfrm>
-            <a:off x="566928" y="6419088"/>
-            <a:ext cx="11057839" cy="310896"/>
-          </a:xfrm>
-          <a:prstGeom prst="rect">
-            <a:avLst/>
+            <a:off x="8101583" y="4818888"/>
+            <a:ext cx="3520440" cy="1517904"/>
+          </a:xfrm>
+          <a:prstGeom prst="roundRect">
+            <a:avLst>
+              <a:gd name="adj" fmla="val 5000"/>
+            </a:avLst>
           </a:prstGeom>
-          <a:noFill/>
-        </p:spPr>
-        <p:txBody>
-          <a:bodyPr wrap="square" lIns="0" rIns="0" tIns="0" bIns="0">
-            <a:spAutoFit/>
-          </a:bodyPr>
-          <a:lstStyle/>
+          <a:solidFill>
+            <a:srgbClr val="E6E8FA"/>
+          </a:solidFill>
+          <a:ln w="15875">
+            <a:solidFill>
+              <a:srgbClr val="4353CC"/>
+            </a:solidFill>
+          </a:ln>
+          <a:effectLst/>
+        </p:spPr>
+        <p:style>
+          <a:lnRef idx="1">
+            <a:schemeClr val="accent1"/>
+          </a:lnRef>
+          <a:fillRef idx="3">
+            <a:schemeClr val="accent1"/>
+          </a:fillRef>
+          <a:effectRef idx="2">
+            <a:schemeClr val="accent1"/>
+          </a:effectRef>
+          <a:fontRef idx="minor">
+            <a:schemeClr val="lt1"/>
+          </a:fontRef>
+        </p:style>
+        <p:txBody>
+          <a:bodyPr rtlCol="0" anchor="t" wrap="square" lIns="182880" rIns="182880" tIns="128016" bIns="128016"/>
+          <a:lstStyle/>
+          <a:p>
+            <a:pPr algn="ctr">
+              <a:spcAft>
+                <a:spcPts val="400"/>
+              </a:spcAft>
+            </a:pPr>
+            <a:r>
+              <a:rPr sz="1400" b="0">
+                <a:solidFill>
+                  <a:srgbClr val="3542B8"/>
+                </a:solidFill>
+                <a:latin typeface="Consolas"/>
+              </a:rPr>
+              <a:t>Y EN EL CLASIFICADOR · TOP 3</a:t>
+            </a:r>
+          </a:p>
+          <a:p>
+            <a:pPr>
+              <a:lnSpc>
+                <a:spcPct val="100000"/>
+              </a:lnSpc>
+              <a:spcAft>
+                <a:spcPts val="200"/>
+              </a:spcAft>
+            </a:pPr>
+            <a:r>
+              <a:rPr sz="1800" b="0">
+                <a:solidFill>
+                  <a:srgbClr val="1E232B"/>
+                </a:solidFill>
+                <a:latin typeface="Calibri"/>
+              </a:rPr>
+              <a:t>tamaño de empresa</a:t>
+            </a:r>
+            <a:r>
+              <a:rPr sz="1800" b="1">
+                <a:solidFill>
+                  <a:srgbClr val="3542B8"/>
+                </a:solidFill>
+                <a:latin typeface="Consolas"/>
+              </a:rPr>
+              <a:t>  −0,046</a:t>
+            </a:r>
+          </a:p>
+          <a:p>
+            <a:pPr>
+              <a:lnSpc>
+                <a:spcPct val="100000"/>
+              </a:lnSpc>
+              <a:spcAft>
+                <a:spcPts val="200"/>
+              </a:spcAft>
+            </a:pPr>
+            <a:r>
+              <a:rPr sz="1800" b="0">
+                <a:solidFill>
+                  <a:srgbClr val="1E232B"/>
+                </a:solidFill>
+                <a:latin typeface="Calibri"/>
+              </a:rPr>
+              <a:t>categoría ocupacional</a:t>
+            </a:r>
+            <a:r>
+              <a:rPr sz="1800" b="1">
+                <a:solidFill>
+                  <a:srgbClr val="3542B8"/>
+                </a:solidFill>
+                <a:latin typeface="Consolas"/>
+              </a:rPr>
+              <a:t>  −0,031</a:t>
+            </a:r>
+          </a:p>
+          <a:p>
+            <a:pPr>
+              <a:lnSpc>
+                <a:spcPct val="100000"/>
+              </a:lnSpc>
+              <a:spcAft>
+                <a:spcPts val="200"/>
+              </a:spcAft>
+            </a:pPr>
+            <a:r>
+              <a:rPr sz="1800" b="0">
+                <a:solidFill>
+                  <a:srgbClr val="1E232B"/>
+                </a:solidFill>
+                <a:latin typeface="Calibri"/>
+              </a:rPr>
+              <a:t>años de educación</a:t>
+            </a:r>
+            <a:r>
+              <a:rPr sz="1800" b="1">
+                <a:solidFill>
+                  <a:srgbClr val="3542B8"/>
+                </a:solidFill>
+                <a:latin typeface="Consolas"/>
+              </a:rPr>
+              <a:t>  −0,025</a:t>
+            </a:r>
+          </a:p>
           <a:p>
             <a:pPr>
               <a:spcAft>
@@ -10612,13 +10888,52 @@
               </a:spcAft>
             </a:pPr>
             <a:r>
+              <a:rPr sz="1400" b="0">
+                <a:solidFill>
+                  <a:srgbClr val="5F6875"/>
+                </a:solidFill>
+                <a:latin typeface="Consolas"/>
+              </a:rPr>
+              <a:t>PUNTOS DE PR-AUC PERDIDOS</a:t>
+            </a:r>
+          </a:p>
+        </p:txBody>
+      </p:sp>
+      <p:sp>
+        <p:nvSpPr>
+          <p:cNvPr id="9" name="TextBox 8"/>
+          <p:cNvSpPr txBox="1"/>
+          <p:nvPr/>
+        </p:nvSpPr>
+        <p:spPr>
+          <a:xfrm>
+            <a:off x="566928" y="6419088"/>
+            <a:ext cx="11057839" cy="310896"/>
+          </a:xfrm>
+          <a:prstGeom prst="rect">
+            <a:avLst/>
+          </a:prstGeom>
+          <a:noFill/>
+        </p:spPr>
+        <p:txBody>
+          <a:bodyPr wrap="square" lIns="0" rIns="0" tIns="0" bIns="0">
+            <a:spAutoFit/>
+          </a:bodyPr>
+          <a:lstStyle/>
+          <a:p>
+            <a:pPr>
+              <a:spcAft>
+                <a:spcPts val="0"/>
+              </a:spcAft>
+            </a:pPr>
+            <a:r>
               <a:rPr sz="1200" b="0">
                 <a:solidFill>
                   <a:srgbClr val="5F6875"/>
                 </a:solidFill>
                 <a:latin typeface="Calibri"/>
               </a:rPr>
-              <a:t>Fuente: models/ui_artifacts.json (regresor.importancia_permutacion): 5 repeticiones sobre 9.000 filas de test</a:t>
+              <a:t>Fuente: models/ui_artifacts.json (importancia_permutacion del regresor y del clasificador): 5 repeticiones sobre 9.000 filas de test en ambos</a:t>
             </a:r>
           </a:p>
         </p:txBody>

--- a/docs/presentacion/ENAHO_exposicion.pptx
+++ b/docs/presentacion/ENAHO_exposicion.pptx
@@ -6,17 +6,18 @@
   </p:sldMasterIdLst>
   <p:sldIdLst>
     <p:sldId id="256" r:id="rId7"/>
-    <p:sldId id="257" r:id="rId9"/>
-    <p:sldId id="258" r:id="rId10"/>
-    <p:sldId id="259" r:id="rId11"/>
-    <p:sldId id="260" r:id="rId12"/>
-    <p:sldId id="261" r:id="rId13"/>
-    <p:sldId id="262" r:id="rId14"/>
-    <p:sldId id="263" r:id="rId15"/>
-    <p:sldId id="264" r:id="rId16"/>
-    <p:sldId id="265" r:id="rId17"/>
-    <p:sldId id="266" r:id="rId18"/>
-    <p:sldId id="267" r:id="rId19"/>
+    <p:sldId id="257" r:id="rId8"/>
+    <p:sldId id="258" r:id="rId9"/>
+    <p:sldId id="264" r:id="rId15"/>
+    <p:sldId id="265" r:id="rId16"/>
+    <p:sldId id="259" r:id="rId10"/>
+    <p:sldId id="260" r:id="rId11"/>
+    <p:sldId id="261" r:id="rId12"/>
+    <p:sldId id="262" r:id="rId13"/>
+    <p:sldId id="263" r:id="rId14"/>
+    <p:sldId id="266" r:id="rId17"/>
+    <p:sldId id="267" r:id="rId18"/>
+    <p:sldId id="268" r:id="rId19"/>
   </p:sldIdLst>
   <p:sldSz cx="12191695" cy="6858000" type="screen4x3"/>
   <p:notesSz cx="6858000" cy="9144000"/>
@@ -513,7 +514,7 @@
           <a:lstStyle/>
           <a:p>
             <a:r>
-              <a:t>Buenas. Somos el grupo de Alan, Magdalena, Yoichi y Edgar, del curso de Machine Learning de la ENEI, con el profesor Orlando Advíncula. Presentamos dos modelos entrenados sobre los microdatos públicos de la ENAHO 2025 del INEI: uno estima el ingreso laboral mensual y otro clasifica si un empleo es informal. Los dos están desplegados en una app pública de Streamlit que vamos a abrir en vivo. El curso es de despliegue, así que el peso de la exposición está en cómo llega el modelo del editor al navegador y en qué garantías tenemos de que lo que corre en la nube es lo que entrenamos. Esos dos enlaces son los únicos que hace falta apuntar; no vuelven a aparecer.</a:t>
+              <a:t>Fuente: AUTHORS.md · CITATION.cff · enlaces verificados en pantalla</a:t>
             </a:r>
           </a:p>
         </p:txBody>
@@ -583,7 +584,7 @@
           <a:lstStyle/>
           <a:p>
             <a:r>
-              <a:t>Antes de dar la app por buena corrimos el mismo perfil —los once valores por defecto del formulario— en la consola local de VS Code y lo comparamos con la app ya desplegada. El regresor da S/ 849 de ingreso típico, la mediana del Gradient Boosting E9, y S/ 1.189 de ingreso esperado, que aplica el factor de smearing de Duan 1,4009 sobre esa mediana. El clasificador da 97,5 % de probabilidad de informalidad, y con el umbral operativo 0,6054 el empleo queda señalado: la consola imprime INFORMAL y la app dice «señalado para focalización», que es lo mismo dicho con cuidado, porque la señal es sobre una configuración de empleo y no sobre la persona. Un detalle honesto: el formulario del clasificador arranca con un valor de horas distinto al del regresor, así que los dos perfiles no son idénticos entre sí; dentro de cada fila, consola y app comparan exactamente el mismo perfil. Cuidado con lo que prueba esto: no valida que el modelo prediga bien, valida que la nube corre exactamente el artefacto que entrenamos, no una copia vieja ni un reentrenamiento distinto.</a:t>
+              <a:t>Fuente: models/ui_artifacts.json (importancia_permutacion del regresor y del clasificador): 5 repeticiones sobre 9.000 filas de test en ambos</a:t>
             </a:r>
           </a:p>
         </p:txBody>
@@ -653,7 +654,7 @@
           <a:lstStyle/>
           <a:p>
             <a:r>
-              <a:t>Antes de publicar, el proyecto se auditó a sí mismo: cada cifra contra el script que la genera, cada cita contra su fuente original. Aparecieron cuatro problemas y se publicaron los cuatro, cada uno con la etiqueta de dónde nació. El primero venía en los datos: el INEI codifica «no sabe» como 999999 y ese valor se estaba leyendo como un ingreso real de casi un millón de soles; convertirlo en dato faltante subió el R² de 0,023 a 0,248 y devolvió el sentido económico a los coeficientes. Los otros tres nacieron en nuestro propio trabajo. El de la rejilla merece una frase más: la rejilla original dejaba los tres hiperparámetros ganadores en el borde, la ampliada baja el error a S/ 607,31, y aun así NO se promovió, porque un 0,59 % de mejora no justifica invalidar la evidencia ya documentada: esa disciplina —separar «es mejor» de «vale la pena cambiarlo»— es parte del método. Ninguno de los hallazgos cambia el modelo en producción. El valor de auditar no fue que no hubiera errores: fue encontrarlos y dejarlos escritos.</a:t>
+              <a:t>Fuente: docs/presentacion/verificacion_local.py · salida_consola_verificacion.txt · capturas de la app desplegada</a:t>
             </a:r>
           </a:p>
         </p:txBody>
@@ -723,7 +724,77 @@
           <a:lstStyle/>
           <a:p>
             <a:r>
-              <a:t>Para cerrar, los límites. El regresor da un ingreso típico con un error medio de unos S/ 611 al mes: sirve para comparar perfiles entre sí, no para decirle a una persona cuánto va a cobrar. El clasificador identifica si una configuración laboral observable se asocia a la informalidad, con un PR-AUC de test de 0,9605; es una herramienta de focalización, no predice el futuro de nadie. Del despliegue nos llevamos dos cosas concretas: fijar las versiones exactas de las librerías, porque un pickle no es portable entre versiones, y sacar todo el cálculo pesado del tiempo de ejecución. Los enlaces están en la portada. Gracias.</a:t>
+              <a:t>Fuente: INFORME_AUDITORIA.md · models/ui_artifacts.json (torneo.autopsia) · la sección «Qué encontró la auditoría» de la propia app</a:t>
+            </a:r>
+          </a:p>
+        </p:txBody>
+      </p:sp>
+      <p:sp>
+        <p:nvSpPr>
+          <p:cNvPr id="4" name="Slide Number Placeholder 3"/>
+          <p:cNvSpPr>
+            <a:spLocks noGrp="1"/>
+          </p:cNvSpPr>
+          <p:nvPr>
+            <p:ph type="sldNum" idx="5" sz="quarter"/>
+          </p:nvPr>
+        </p:nvSpPr>
+        <p:spPr/>
+      </p:sp>
+    </p:spTree>
+  </p:cSld>
+  <p:clrMapOvr>
+    <a:masterClrMapping/>
+  </p:clrMapOvr>
+</p:notes>
+</file>
+
+<file path=ppt/notesSlides/notesSlide13.xml><?xml version="1.0" encoding="utf-8"?>
+<p:notes xmlns:a="http://schemas.openxmlformats.org/drawingml/2006/main" xmlns:p="http://schemas.openxmlformats.org/presentationml/2006/main" xmlns:r="http://schemas.openxmlformats.org/officeDocument/2006/relationships">
+  <p:cSld>
+    <p:spTree>
+      <p:nvGrpSpPr>
+        <p:cNvPr id="1" name=""/>
+        <p:cNvGrpSpPr/>
+        <p:nvPr/>
+      </p:nvGrpSpPr>
+      <p:grpSpPr>
+        <a:xfrm>
+          <a:off x="0" y="0"/>
+          <a:ext cx="0" cy="0"/>
+          <a:chOff x="0" y="0"/>
+          <a:chExt cx="0" cy="0"/>
+        </a:xfrm>
+      </p:grpSpPr>
+      <p:sp>
+        <p:nvSpPr>
+          <p:cNvPr id="2" name="Slide Image Placeholder 1"/>
+          <p:cNvSpPr>
+            <a:spLocks noGrp="1"/>
+          </p:cNvSpPr>
+          <p:nvPr>
+            <p:ph type="sldImg" idx="2"/>
+          </p:nvPr>
+        </p:nvSpPr>
+        <p:spPr/>
+      </p:sp>
+      <p:sp>
+        <p:nvSpPr>
+          <p:cNvPr id="3" name="Notes Placeholder 2"/>
+          <p:cNvSpPr>
+            <a:spLocks noGrp="1"/>
+          </p:cNvSpPr>
+          <p:nvPr>
+            <p:ph type="body" idx="3" sz="quarter"/>
+          </p:nvPr>
+        </p:nvSpPr>
+        <p:spPr/>
+        <p:txBody>
+          <a:bodyPr/>
+          <a:lstStyle/>
+          <a:p>
+            <a:r>
+              <a:t>Fuente: models/feature_schema.json (métricas de test) · AUTHORS.md · CITATION.cff · LICENSE (Apache-2.0) y docs/LICENSE-DOCS.md</a:t>
             </a:r>
           </a:p>
         </p:txBody>
@@ -793,7 +864,7 @@
           <a:lstStyle/>
           <a:p>
             <a:r>
-              <a:t>Primero la base, que es la franja de arriba: microdatos públicos de la ENAHO 2025 del INEI, tres módulos —el 02 de miembros del hogar, el 03 de educación y el 05 de empleo e ingresos— cruzados por persona. Tras los filtros documentados quedan 47.632 trabajadores con ingreso laboral, descritos por once variables: cinco numéricas y seis categóricas, las mismas para los dos modelos; el detalle variable a variable viene unas láminas más adelante. Sobre esa base, la app tiene cuatro secciones y estas son las dos que hacen predicción. A la izquierda, el formulario del regresor: se describe un perfil laboral y devuelve un ingreso mensual típico en soles. A la derecha, la pestaña de informalidad: con las mismas once variables devuelve una probabilidad y, según dónde se ponga el umbral, un veredicto. Son dos modelos independientes que comparten las entradas, no un modelo con dos salidas. Y toda la app se explica sola: lectura llana con expander técnico, gráficos etiquetados como DATO, MECÁNICA o HIPÓTESIS, la matriz de confusión en castellano, y 15 referencias con el enlace comprobado una a una. Nadie necesita abrir el código para entender qué está viendo.</a:t>
+              <a:t>Fuente: INFORME_AUDITORIA.md §4 (embudo) · models/feature_schema.json (variables) · capturas de la app desplegada (enaho-ingresos-informalidad.streamlit.app).</a:t>
             </a:r>
           </a:p>
         </p:txBody>
@@ -863,7 +934,7 @@
           <a:lstStyle/>
           <a:p>
             <a:r>
-              <a:t>Esta es la lámina que sostiene todo lo demás. El pipeline completo corre en local, en VS Code: los scripts numerados del 00 al 09 leen los microdatos del INEI, entrenan los modelos y escriben los artefactos: dos .joblib y los JSON de contrato con la app. Los microdatos son 601,3 megabytes que el .gitignore excluye por diseño: no se redistribuyen, se enlaza a la fuente. Lo que sale de la máquina son 8,80 megabytes en 111 archivos, en carpetas con un rol fijo: src/ para el entrenamiento, models/ para los artefactos, app/ para lo desplegado, docs/ y reports/ para la evidencia. GitHub recibe el push, avisa por webhook a Streamlit Community Cloud, y la nube reconstruye el entorno y publica. Entre guardar en el editor y ver el cambio en el navegador no hay ningún paso manual: esa es la definición de despliegue continuo que defendemos aquí.</a:t>
+              <a:t>Fuente: models/feature_schema.json (nombre, tipo, rango y niveles de cada variable) · models/ui_artifacts.json (torneo.tabla) · docs/METODOLOGIA_TORNEO.md</a:t>
             </a:r>
           </a:p>
         </p:txBody>
@@ -933,7 +1004,7 @@
           <a:lstStyle/>
           <a:p>
             <a:r>
-              <a:t>Este es el recorrido real de abrir la app: cero ejecuciones del modelo. Las curvas de umbral, los histogramas, las tablas de consecuencias y las dependencias parciales se calcularon una sola vez, en 09_precomputar_ui.py, y viajan como un JSON de 44,7 kilobytes. La app en producción abre ese archivo y dibuja: no hay nada que calcular ahí. Los .joblib solo entran cuando el usuario arma un perfil y pulsa «Estimar»: una llamada a predict, que da S/ 849 para el perfil por defecto, y una a predict_proba. Además, cache_data y cache_resource evitan releer el JSON y los modelos en cada interacción de la sesión. Community Cloud da poca memoria por aplicación: mantener el trabajo pesado fuera del tiempo de ejecución es lo que permite que cargue rápido y no se quede sin memoria. Qué gana el usuario: una app que responde al instante; qué ganamos nosotros: una app que no se cae.</a:t>
+              <a:t>Fuente: docs/arquitectura.md · .gitignore · git ls-files · tamaños medidos del disco al generar esta lámina</a:t>
             </a:r>
           </a:p>
         </p:txBody>
@@ -1003,7 +1074,7 @@
           <a:lstStyle/>
           <a:p>
             <a:r>
-              <a:t>requirements.txt no deja ninguna versión suelta. scikit-learn queda fijado en 1.9.0, la misma con la que se generaron los .joblib, porque un modelo serializado con otra versión puede no cargar, o cargar y comportarse distinto, sin ningún aviso. La comprobación no es una promesa del archivo: el propio generador de esta presentación compara requirements.txt con la versión anotada en los artefactos y se niega a producir el .pptx si no coinciden. Del lado de la nube, Streamlit Cloud apunta a un archivo y una rama fijos —app/streamlit_app.py en main— y reconstruye ese entorno en cada push. La versión de pandas, 3.0.5, queda fijada por la misma razón.</a:t>
+              <a:t>Fuente: src/09_precomputar_ui.py · models/ui_artifacts.json · models/*.joblib · docs/presentacion/verificacion_local.py</a:t>
             </a:r>
           </a:p>
         </p:txBody>
@@ -1073,7 +1144,7 @@
           <a:lstStyle/>
           <a:p>
             <a:r>
-              <a:t>El formulario no declara ningún campo a mano: recorre feature_schema.json y arma un control por variable, número o selector según el tipo. Los numéricos usan number_input con su paso y su rango; los categóricos, selectbox con las opciones que realmente vio el codificador entrenado. Si mañana cambia una variable en el schema, el formulario cambia solo: el schema es el contrato entre el entrenamiento y la interfaz. El slider del umbral vive en un st.fragment: moverlo reejecuta solo ese fragmento y no la página entera, así que la predicción y los artefactos no se vuelven a cargar en cada arrastre. El expander separa la lectura llana de la técnica, el popover resuelve una pregunta puntual sin ocupar espacio permanente, y el selector de tema es un radio que lee sus opciones de PALETAS, la misma paleta que estás viendo en estas láminas.</a:t>
+              <a:t>Fuente: requirements.txt · models/ui_artifacts.json (meta) · panel de Streamlit Community Cloud</a:t>
             </a:r>
           </a:p>
         </p:txBody>
@@ -1143,7 +1214,7 @@
           <a:lstStyle/>
           <a:p>
             <a:r>
-              <a:t>Tres controles distintos, cada uno contra un tipo de fallo distinto. Primero, los tests de contrato: un despliegue del 20 de agosto rompió la app tres veces con la misma forma de error, la app pedía algo que su proveedor no tenía: un tema que no estaba en la paleta, una función de dibujo que no existía, una clave del artefacto renombrada. Cada uno de esos fallos está hoy reproducido como un test de pytest que corre sin navegador: si el error vuelve, salta en local antes del push, no en producción delante del usuario. Segundo, la autoría: cada commit va firmado con una clave SSH y git log muestra la firma buena; en un repositorio público, saber quién publicó qué no es un adorno. Tercero, el QA: cuando afirmamos algo de la app desplegada, por ejemplo que un gráfico ya no se corta, no lo miramos a ojo: se mide sobre el DOM real con Playwright. Ese estándar quedó escrito en la guía de post-entrega del proyecto.</a:t>
+              <a:t>Fuente: captura de la app desplegada · app/streamlit_app.py (componentes realmente usados) · models/feature_schema.json</a:t>
             </a:r>
           </a:p>
         </p:txBody>
@@ -1213,7 +1284,7 @@
           <a:lstStyle/>
           <a:p>
             <a:r>
-              <a:t>La guía pide comparar Random Forest y Gradient Boosting, y esta es la comparación en los dos problemas a la vez. En regresión, Gradient Boosting se equivoca de media en S/ 610,9 al mes y Random Forest en S/ 613,0: empate práctico; la mejor especificación lineal, E7, queda en S/ 686,9, y ahí sí hay distancia. En clasificación gana también Gradient Boosting: PR-AUC de 0,9626 contra 0,9619 del Random Forest y 0,9553 de la logística. Contexto que conviene tener a mano: detrás de la fila de regresión hay un torneo de nueve especificaciones, de la consigna E1 con S/ 900,6 de error hasta E9; los datos vienen de un embudo documentado: 84.853 registros del módulo de empleo, 57.716 ocupados de 14 años o más, 47.899 con ingreso positivo y 47.632 casos completos, partidos en 38.105 de entrenamiento y 9.527 de prueba con semilla fija. Medimos PR-AUC y no accuracy porque la prevalencia es 0,6778: decir «informal» a todos ya acierta el 67,8 % de las veces. Y la selección es siempre por validación cruzada: el test se miró una sola vez, al final.</a:t>
+              <a:t>Fuente: tests/test_contratos.py · docs/presentacion/verificar_ppt.py · docs/POST_ENTREGA.md (estándares de la corrida de entrega)</a:t>
             </a:r>
           </a:p>
         </p:txBody>
@@ -1283,7 +1354,7 @@
           <a:lstStyle/>
           <a:p>
             <a:r>
-              <a:t>Tomamos una variable, desordenamos sus valores al azar entre las personas, y medimos cuánto empeora cada modelo ya entrenado. En el regresor eso se mide en soles: la categoría ocupacional sube el error en unos S/ 139 al mes y los años de educación en unos S/ 128. En el clasificador, el mismo ejercicio se mide en puntos de PR-AUC: barajar el tamaño de empresa le quita 0,046, la categoría ocupacional 0,031 y los años de educación 0,025. Es el mismo trío en los dos modelos, en distinto orden — y coherente con la ablación estructural: quitar tamaño y categoría juntas baja el PR-AUC de 0,9626 a 0,9415. Ojo con la lectura: esto mide cuánto usa cada modelo la variable, no cuánto causa la variable en la realidad. Para la lectura causal está el modelo explicativo E6, una regresión ponderada aparte que está en la app: ahí cada año de educación se asocia a un 4,8 % más de ingreso y vivir en zona urbana a un 32,3 % más.</a:t>
+              <a:t>Fuente: models/ui_artifacts.json (torneo.tabla, clasificador.comparacion) · models/feature_schema.json · src/04, src/06</a:t>
             </a:r>
           </a:p>
         </p:txBody>
@@ -4680,6 +4751,94 @@
           </a:p>
         </p:txBody>
       </p:sp>
+      <p:sp>
+        <p:nvSpPr>
+          <p:cNvPr id="9" name="Rectangle 8">
+            <a:hlinkClick r:id="rId4"/>
+          </p:cNvPr>
+          <p:cNvSpPr/>
+          <p:nvPr/>
+        </p:nvSpPr>
+        <p:spPr>
+          <a:xfrm>
+            <a:off x="1024128" y="5468112"/>
+            <a:ext cx="5486400" cy="347472"/>
+          </a:xfrm>
+          <a:prstGeom prst="rect">
+            <a:avLst/>
+          </a:prstGeom>
+          <a:noFill/>
+          <a:ln>
+            <a:noFill/>
+          </a:ln>
+          <a:effectLst/>
+        </p:spPr>
+        <p:style>
+          <a:lnRef idx="1">
+            <a:schemeClr val="accent1"/>
+          </a:lnRef>
+          <a:fillRef idx="3">
+            <a:schemeClr val="accent1"/>
+          </a:fillRef>
+          <a:effectRef idx="2">
+            <a:schemeClr val="accent1"/>
+          </a:effectRef>
+          <a:fontRef idx="minor">
+            <a:schemeClr val="lt1"/>
+          </a:fontRef>
+        </p:style>
+        <p:txBody>
+          <a:bodyPr rtlCol="0" anchor="ctr"/>
+          <a:lstStyle/>
+          <a:p>
+            <a:pPr algn="ctr"/>
+          </a:p>
+        </p:txBody>
+      </p:sp>
+      <p:sp>
+        <p:nvSpPr>
+          <p:cNvPr id="10" name="Rectangle 9">
+            <a:hlinkClick r:id="rId5"/>
+          </p:cNvPr>
+          <p:cNvSpPr/>
+          <p:nvPr/>
+        </p:nvSpPr>
+        <p:spPr>
+          <a:xfrm>
+            <a:off x="1719072" y="5870448"/>
+            <a:ext cx="5760720" cy="347472"/>
+          </a:xfrm>
+          <a:prstGeom prst="rect">
+            <a:avLst/>
+          </a:prstGeom>
+          <a:noFill/>
+          <a:ln>
+            <a:noFill/>
+          </a:ln>
+          <a:effectLst/>
+        </p:spPr>
+        <p:style>
+          <a:lnRef idx="1">
+            <a:schemeClr val="accent1"/>
+          </a:lnRef>
+          <a:fillRef idx="3">
+            <a:schemeClr val="accent1"/>
+          </a:fillRef>
+          <a:effectRef idx="2">
+            <a:schemeClr val="accent1"/>
+          </a:effectRef>
+          <a:fontRef idx="minor">
+            <a:schemeClr val="lt1"/>
+          </a:fontRef>
+        </p:style>
+        <p:txBody>
+          <a:bodyPr rtlCol="0" anchor="ctr"/>
+          <a:lstStyle/>
+          <a:p>
+            <a:pPr algn="ctr"/>
+          </a:p>
+        </p:txBody>
+      </p:sp>
     </p:spTree>
   </p:cSld>
   <p:clrMapOvr>
@@ -4787,6 +4946,569 @@
                 </a:solidFill>
                 <a:latin typeface="Calibri"/>
               </a:rPr>
+              <a:t>Las mismas tres variables cargan los dos modelos: categoría, educación y tamaño de empresa</a:t>
+            </a:r>
+          </a:p>
+        </p:txBody>
+      </p:sp>
+      <p:sp>
+        <p:nvSpPr>
+          <p:cNvPr id="4" name="TextBox 3"/>
+          <p:cNvSpPr txBox="1"/>
+          <p:nvPr/>
+        </p:nvSpPr>
+        <p:spPr>
+          <a:xfrm>
+            <a:off x="566928" y="1408176"/>
+            <a:ext cx="10881360" cy="603504"/>
+          </a:xfrm>
+          <a:prstGeom prst="rect">
+            <a:avLst/>
+          </a:prstGeom>
+          <a:noFill/>
+        </p:spPr>
+        <p:txBody>
+          <a:bodyPr wrap="square" lIns="0" rIns="0" tIns="0" bIns="0">
+            <a:spAutoFit/>
+          </a:bodyPr>
+          <a:lstStyle/>
+          <a:p>
+            <a:pPr>
+              <a:lnSpc>
+                <a:spcPct val="102000"/>
+              </a:lnSpc>
+              <a:spcAft>
+                <a:spcPts val="0"/>
+              </a:spcAft>
+            </a:pPr>
+            <a:r>
+              <a:rPr sz="2000" b="0">
+                <a:solidFill>
+                  <a:srgbClr val="49525F"/>
+                </a:solidFill>
+                <a:latin typeface="Calibri"/>
+              </a:rPr>
+              <a:t>Con cada modelo ya entrenado, desordenamos una columna a la vez y medimos cuánto empeora: soles de error en el regresor, puntos de PR-AUC en el clasificador. Uso, no causa.</a:t>
+            </a:r>
+          </a:p>
+        </p:txBody>
+      </p:sp>
+      <p:pic>
+        <p:nvPicPr>
+          <p:cNvPr id="5" name="Picture 4" descr="fig_importancia.png"/>
+          <p:cNvPicPr>
+            <a:picLocks noChangeAspect="1"/>
+          </p:cNvPicPr>
+          <p:nvPr/>
+        </p:nvPicPr>
+        <p:blipFill>
+          <a:blip r:embed="rId2"/>
+          <a:stretch>
+            <a:fillRect/>
+          </a:stretch>
+        </p:blipFill>
+        <p:spPr>
+          <a:xfrm>
+            <a:off x="566928" y="2240966"/>
+            <a:ext cx="7315200" cy="3811674"/>
+          </a:xfrm>
+          <a:prstGeom prst="rect">
+            <a:avLst/>
+          </a:prstGeom>
+        </p:spPr>
+      </p:pic>
+      <p:sp>
+        <p:nvSpPr>
+          <p:cNvPr id="6" name="Rounded Rectangle 5"/>
+          <p:cNvSpPr/>
+          <p:nvPr/>
+        </p:nvSpPr>
+        <p:spPr>
+          <a:xfrm>
+            <a:off x="8101583" y="2084831"/>
+            <a:ext cx="3520440" cy="1207008"/>
+          </a:xfrm>
+          <a:prstGeom prst="roundRect">
+            <a:avLst>
+              <a:gd name="adj" fmla="val 5000"/>
+            </a:avLst>
+          </a:prstGeom>
+          <a:solidFill>
+            <a:srgbClr val="FCFBF8"/>
+          </a:solidFill>
+          <a:ln w="15875">
+            <a:solidFill>
+              <a:srgbClr val="D5D1C6"/>
+            </a:solidFill>
+          </a:ln>
+          <a:effectLst/>
+        </p:spPr>
+        <p:style>
+          <a:lnRef idx="1">
+            <a:schemeClr val="accent1"/>
+          </a:lnRef>
+          <a:fillRef idx="3">
+            <a:schemeClr val="accent1"/>
+          </a:fillRef>
+          <a:effectRef idx="2">
+            <a:schemeClr val="accent1"/>
+          </a:effectRef>
+          <a:fontRef idx="minor">
+            <a:schemeClr val="lt1"/>
+          </a:fontRef>
+        </p:style>
+        <p:txBody>
+          <a:bodyPr rtlCol="0" anchor="t" wrap="square" lIns="182880" rIns="182880" tIns="128016" bIns="128016"/>
+          <a:lstStyle/>
+          <a:p>
+            <a:pPr algn="ctr">
+              <a:spcAft>
+                <a:spcPts val="400"/>
+              </a:spcAft>
+            </a:pPr>
+            <a:r>
+              <a:rPr sz="1400" b="0">
+                <a:solidFill>
+                  <a:srgbClr val="5F6875"/>
+                </a:solidFill>
+                <a:latin typeface="Consolas"/>
+              </a:rPr>
+              <a:t>CATEGORÍA OCUPACIONAL</a:t>
+            </a:r>
+          </a:p>
+          <a:p>
+            <a:pPr>
+              <a:lnSpc>
+                <a:spcPct val="95000"/>
+              </a:lnSpc>
+              <a:spcAft>
+                <a:spcPts val="600"/>
+              </a:spcAft>
+            </a:pPr>
+            <a:r>
+              <a:rPr sz="3000" b="1">
+                <a:solidFill>
+                  <a:srgbClr val="4353CC"/>
+                </a:solidFill>
+                <a:latin typeface="Consolas"/>
+              </a:rPr>
+              <a:t>S/ 139</a:t>
+            </a:r>
+          </a:p>
+          <a:p>
+            <a:pPr>
+              <a:lnSpc>
+                <a:spcPct val="105000"/>
+              </a:lnSpc>
+              <a:spcAft>
+                <a:spcPts val="0"/>
+              </a:spcAft>
+            </a:pPr>
+            <a:r>
+              <a:rPr sz="1800" b="0">
+                <a:solidFill>
+                  <a:srgbClr val="49525F"/>
+                </a:solidFill>
+                <a:latin typeface="Calibri"/>
+              </a:rPr>
+              <a:t>Soles de error si se pierde.</a:t>
+            </a:r>
+          </a:p>
+        </p:txBody>
+      </p:sp>
+      <p:sp>
+        <p:nvSpPr>
+          <p:cNvPr id="7" name="Rounded Rectangle 6"/>
+          <p:cNvSpPr/>
+          <p:nvPr/>
+        </p:nvSpPr>
+        <p:spPr>
+          <a:xfrm>
+            <a:off x="8101583" y="3401568"/>
+            <a:ext cx="3520440" cy="1207008"/>
+          </a:xfrm>
+          <a:prstGeom prst="roundRect">
+            <a:avLst>
+              <a:gd name="adj" fmla="val 5000"/>
+            </a:avLst>
+          </a:prstGeom>
+          <a:solidFill>
+            <a:srgbClr val="FCFBF8"/>
+          </a:solidFill>
+          <a:ln w="15875">
+            <a:solidFill>
+              <a:srgbClr val="D5D1C6"/>
+            </a:solidFill>
+          </a:ln>
+          <a:effectLst/>
+        </p:spPr>
+        <p:style>
+          <a:lnRef idx="1">
+            <a:schemeClr val="accent1"/>
+          </a:lnRef>
+          <a:fillRef idx="3">
+            <a:schemeClr val="accent1"/>
+          </a:fillRef>
+          <a:effectRef idx="2">
+            <a:schemeClr val="accent1"/>
+          </a:effectRef>
+          <a:fontRef idx="minor">
+            <a:schemeClr val="lt1"/>
+          </a:fontRef>
+        </p:style>
+        <p:txBody>
+          <a:bodyPr rtlCol="0" anchor="t" wrap="square" lIns="182880" rIns="182880" tIns="128016" bIns="128016"/>
+          <a:lstStyle/>
+          <a:p>
+            <a:pPr algn="ctr">
+              <a:spcAft>
+                <a:spcPts val="400"/>
+              </a:spcAft>
+            </a:pPr>
+            <a:r>
+              <a:rPr sz="1400" b="0">
+                <a:solidFill>
+                  <a:srgbClr val="5F6875"/>
+                </a:solidFill>
+                <a:latin typeface="Consolas"/>
+              </a:rPr>
+              <a:t>AÑOS DE EDUCACIÓN</a:t>
+            </a:r>
+          </a:p>
+          <a:p>
+            <a:pPr>
+              <a:lnSpc>
+                <a:spcPct val="95000"/>
+              </a:lnSpc>
+              <a:spcAft>
+                <a:spcPts val="600"/>
+              </a:spcAft>
+            </a:pPr>
+            <a:r>
+              <a:rPr sz="3000" b="1">
+                <a:solidFill>
+                  <a:srgbClr val="4353CC"/>
+                </a:solidFill>
+                <a:latin typeface="Consolas"/>
+              </a:rPr>
+              <a:t>S/ 128</a:t>
+            </a:r>
+          </a:p>
+          <a:p>
+            <a:pPr>
+              <a:lnSpc>
+                <a:spcPct val="105000"/>
+              </a:lnSpc>
+              <a:spcAft>
+                <a:spcPts val="0"/>
+              </a:spcAft>
+            </a:pPr>
+            <a:r>
+              <a:rPr sz="1800" b="0">
+                <a:solidFill>
+                  <a:srgbClr val="49525F"/>
+                </a:solidFill>
+                <a:latin typeface="Calibri"/>
+              </a:rPr>
+              <a:t>La segunda, mismo cálculo.</a:t>
+            </a:r>
+          </a:p>
+        </p:txBody>
+      </p:sp>
+      <p:sp>
+        <p:nvSpPr>
+          <p:cNvPr id="8" name="Rounded Rectangle 7"/>
+          <p:cNvSpPr/>
+          <p:nvPr/>
+        </p:nvSpPr>
+        <p:spPr>
+          <a:xfrm>
+            <a:off x="8101583" y="4718304"/>
+            <a:ext cx="3520440" cy="1645920"/>
+          </a:xfrm>
+          <a:prstGeom prst="roundRect">
+            <a:avLst>
+              <a:gd name="adj" fmla="val 5000"/>
+            </a:avLst>
+          </a:prstGeom>
+          <a:solidFill>
+            <a:srgbClr val="E6E8FA"/>
+          </a:solidFill>
+          <a:ln w="15875">
+            <a:solidFill>
+              <a:srgbClr val="4353CC"/>
+            </a:solidFill>
+          </a:ln>
+          <a:effectLst/>
+        </p:spPr>
+        <p:style>
+          <a:lnRef idx="1">
+            <a:schemeClr val="accent1"/>
+          </a:lnRef>
+          <a:fillRef idx="3">
+            <a:schemeClr val="accent1"/>
+          </a:fillRef>
+          <a:effectRef idx="2">
+            <a:schemeClr val="accent1"/>
+          </a:effectRef>
+          <a:fontRef idx="minor">
+            <a:schemeClr val="lt1"/>
+          </a:fontRef>
+        </p:style>
+        <p:txBody>
+          <a:bodyPr rtlCol="0" anchor="t" wrap="square" lIns="182880" rIns="182880" tIns="128016" bIns="128016"/>
+          <a:lstStyle/>
+          <a:p>
+            <a:pPr algn="ctr">
+              <a:lnSpc>
+                <a:spcPct val="105000"/>
+              </a:lnSpc>
+              <a:spcAft>
+                <a:spcPts val="600"/>
+              </a:spcAft>
+            </a:pPr>
+            <a:r>
+              <a:rPr sz="1400" b="0">
+                <a:solidFill>
+                  <a:srgbClr val="3542B8"/>
+                </a:solidFill>
+                <a:latin typeface="Consolas"/>
+              </a:rPr>
+              <a:t>CLASIFICADOR · TOP 3 — CAÍDA DE PR-AUC AL DESORDENAR</a:t>
+            </a:r>
+          </a:p>
+          <a:p>
+            <a:pPr>
+              <a:lnSpc>
+                <a:spcPct val="100000"/>
+              </a:lnSpc>
+              <a:spcAft>
+                <a:spcPts val="500"/>
+              </a:spcAft>
+            </a:pPr>
+            <a:r>
+              <a:rPr sz="1800" b="1">
+                <a:solidFill>
+                  <a:srgbClr val="3542B8"/>
+                </a:solidFill>
+                <a:latin typeface="Consolas"/>
+              </a:rPr>
+              <a:t>−0,046</a:t>
+            </a:r>
+            <a:r>
+              <a:rPr sz="1800" b="0">
+                <a:solidFill>
+                  <a:srgbClr val="1E232B"/>
+                </a:solidFill>
+                <a:latin typeface="Calibri"/>
+              </a:rPr>
+              <a:t>  tamaño de empresa</a:t>
+            </a:r>
+          </a:p>
+          <a:p>
+            <a:pPr>
+              <a:lnSpc>
+                <a:spcPct val="100000"/>
+              </a:lnSpc>
+              <a:spcAft>
+                <a:spcPts val="500"/>
+              </a:spcAft>
+            </a:pPr>
+            <a:r>
+              <a:rPr sz="1800" b="1">
+                <a:solidFill>
+                  <a:srgbClr val="3542B8"/>
+                </a:solidFill>
+                <a:latin typeface="Consolas"/>
+              </a:rPr>
+              <a:t>−0,031</a:t>
+            </a:r>
+            <a:r>
+              <a:rPr sz="1800" b="0">
+                <a:solidFill>
+                  <a:srgbClr val="1E232B"/>
+                </a:solidFill>
+                <a:latin typeface="Calibri"/>
+              </a:rPr>
+              <a:t>  categoría ocupacional</a:t>
+            </a:r>
+          </a:p>
+          <a:p>
+            <a:pPr>
+              <a:lnSpc>
+                <a:spcPct val="100000"/>
+              </a:lnSpc>
+              <a:spcAft>
+                <a:spcPts val="500"/>
+              </a:spcAft>
+            </a:pPr>
+            <a:r>
+              <a:rPr sz="1800" b="1">
+                <a:solidFill>
+                  <a:srgbClr val="3542B8"/>
+                </a:solidFill>
+                <a:latin typeface="Consolas"/>
+              </a:rPr>
+              <a:t>−0,025</a:t>
+            </a:r>
+            <a:r>
+              <a:rPr sz="1800" b="0">
+                <a:solidFill>
+                  <a:srgbClr val="1E232B"/>
+                </a:solidFill>
+                <a:latin typeface="Calibri"/>
+              </a:rPr>
+              <a:t>  años de educación</a:t>
+            </a:r>
+          </a:p>
+        </p:txBody>
+      </p:sp>
+      <p:sp>
+        <p:nvSpPr>
+          <p:cNvPr id="9" name="TextBox 8"/>
+          <p:cNvSpPr txBox="1"/>
+          <p:nvPr/>
+        </p:nvSpPr>
+        <p:spPr>
+          <a:xfrm>
+            <a:off x="566928" y="6419088"/>
+            <a:ext cx="11057839" cy="310896"/>
+          </a:xfrm>
+          <a:prstGeom prst="rect">
+            <a:avLst/>
+          </a:prstGeom>
+          <a:noFill/>
+        </p:spPr>
+        <p:txBody>
+          <a:bodyPr wrap="square" lIns="0" rIns="0" tIns="0" bIns="0">
+            <a:spAutoFit/>
+          </a:bodyPr>
+          <a:lstStyle/>
+          <a:p>
+            <a:pPr>
+              <a:spcAft>
+                <a:spcPts val="0"/>
+              </a:spcAft>
+            </a:pPr>
+            <a:r>
+              <a:rPr sz="1200" b="0">
+                <a:solidFill>
+                  <a:srgbClr val="5F6875"/>
+                </a:solidFill>
+                <a:latin typeface="Calibri"/>
+              </a:rPr>
+              <a:t>Fuente: models/ui_artifacts.json (importancia_permutacion del regresor y del clasificador): 5 repeticiones sobre 9.000 filas de test en ambos</a:t>
+            </a:r>
+          </a:p>
+        </p:txBody>
+      </p:sp>
+    </p:spTree>
+  </p:cSld>
+  <p:clrMapOvr>
+    <a:masterClrMapping/>
+  </p:clrMapOvr>
+</p:sld>
+</file>
+
+<file path=ppt/slides/slide11.xml><?xml version="1.0" encoding="utf-8"?>
+<p:sld xmlns:a="http://schemas.openxmlformats.org/drawingml/2006/main" xmlns:p="http://schemas.openxmlformats.org/presentationml/2006/main" xmlns:r="http://schemas.openxmlformats.org/officeDocument/2006/relationships">
+  <p:cSld>
+    <p:bg>
+      <p:bgPr>
+        <a:solidFill>
+          <a:srgbClr val="F7F5F0"/>
+        </a:solidFill>
+        <a:effectLst/>
+      </p:bgPr>
+    </p:bg>
+    <p:spTree>
+      <p:nvGrpSpPr>
+        <p:cNvPr id="1" name=""/>
+        <p:cNvGrpSpPr/>
+        <p:nvPr/>
+      </p:nvGrpSpPr>
+      <p:grpSpPr/>
+      <p:sp>
+        <p:nvSpPr>
+          <p:cNvPr id="2" name="Rectangle 1"/>
+          <p:cNvSpPr/>
+          <p:nvPr/>
+        </p:nvSpPr>
+        <p:spPr>
+          <a:xfrm>
+            <a:off x="0" y="0"/>
+            <a:ext cx="12191695" cy="64008"/>
+          </a:xfrm>
+          <a:prstGeom prst="rect">
+            <a:avLst/>
+          </a:prstGeom>
+          <a:solidFill>
+            <a:srgbClr val="4353CC"/>
+          </a:solidFill>
+          <a:ln>
+            <a:noFill/>
+          </a:ln>
+          <a:effectLst/>
+        </p:spPr>
+        <p:style>
+          <a:lnRef idx="1">
+            <a:schemeClr val="accent1"/>
+          </a:lnRef>
+          <a:fillRef idx="3">
+            <a:schemeClr val="accent1"/>
+          </a:fillRef>
+          <a:effectRef idx="2">
+            <a:schemeClr val="accent1"/>
+          </a:effectRef>
+          <a:fontRef idx="minor">
+            <a:schemeClr val="lt1"/>
+          </a:fontRef>
+        </p:style>
+        <p:txBody>
+          <a:bodyPr rtlCol="0" anchor="ctr"/>
+          <a:lstStyle/>
+          <a:p>
+            <a:pPr algn="ctr"/>
+          </a:p>
+        </p:txBody>
+      </p:sp>
+      <p:sp>
+        <p:nvSpPr>
+          <p:cNvPr id="3" name="TextBox 2"/>
+          <p:cNvSpPr txBox="1"/>
+          <p:nvPr/>
+        </p:nvSpPr>
+        <p:spPr>
+          <a:xfrm>
+            <a:off x="566928" y="384048"/>
+            <a:ext cx="11057839" cy="969264"/>
+          </a:xfrm>
+          <a:prstGeom prst="rect">
+            <a:avLst/>
+          </a:prstGeom>
+          <a:noFill/>
+        </p:spPr>
+        <p:txBody>
+          <a:bodyPr wrap="square" lIns="0" rIns="0" tIns="0" bIns="0">
+            <a:spAutoFit/>
+          </a:bodyPr>
+          <a:lstStyle/>
+          <a:p>
+            <a:pPr>
+              <a:lnSpc>
+                <a:spcPct val="92000"/>
+              </a:lnSpc>
+              <a:spcAft>
+                <a:spcPts val="0"/>
+              </a:spcAft>
+            </a:pPr>
+            <a:r>
+              <a:rPr sz="3600" b="1">
+                <a:solidFill>
+                  <a:srgbClr val="1E232B"/>
+                </a:solidFill>
+                <a:latin typeface="Calibri"/>
+              </a:rPr>
               <a:t>El modelo local y el desplegado dan el mismo número, dígito a dígito</a:t>
             </a:r>
           </a:p>
@@ -5430,7 +6152,7 @@
 </p:sld>
 </file>
 
-<file path=ppt/slides/slide11.xml><?xml version="1.0" encoding="utf-8"?>
+<file path=ppt/slides/slide12.xml><?xml version="1.0" encoding="utf-8"?>
 <p:sld xmlns:a="http://schemas.openxmlformats.org/drawingml/2006/main" xmlns:p="http://schemas.openxmlformats.org/presentationml/2006/main" xmlns:r="http://schemas.openxmlformats.org/officeDocument/2006/relationships">
   <p:cSld>
     <p:bg>
@@ -6070,7 +6792,7 @@
 </p:sld>
 </file>
 
-<file path=ppt/slides/slide12.xml><?xml version="1.0" encoding="utf-8"?>
+<file path=ppt/slides/slide13.xml><?xml version="1.0" encoding="utf-8"?>
 <p:sld xmlns:a="http://schemas.openxmlformats.org/drawingml/2006/main" xmlns:p="http://schemas.openxmlformats.org/presentationml/2006/main" xmlns:r="http://schemas.openxmlformats.org/officeDocument/2006/relationships">
   <p:cSld>
     <p:bg>
@@ -6784,7 +7506,7 @@
         <p:spPr>
           <a:xfrm>
             <a:off x="566928" y="2066543"/>
-            <a:ext cx="11055096" cy="731520"/>
+            <a:ext cx="3383280" cy="841248"/>
           </a:xfrm>
           <a:prstGeom prst="roundRect">
             <a:avLst>
@@ -6816,13 +7538,26 @@
           </a:fontRef>
         </p:style>
         <p:txBody>
-          <a:bodyPr rtlCol="0" anchor="ctr" wrap="square" lIns="182880" rIns="182880" tIns="128016" bIns="128016"/>
+          <a:bodyPr rtlCol="0" anchor="t" wrap="square" lIns="182880" rIns="182880" tIns="128016" bIns="128016"/>
           <a:lstStyle/>
           <a:p>
             <a:pPr algn="ctr">
-              <a:lnSpc>
-                <a:spcPct val="104000"/>
-              </a:lnSpc>
+              <a:spcAft>
+                <a:spcPts val="100"/>
+              </a:spcAft>
+            </a:pPr>
+            <a:r>
+              <a:rPr sz="2000" b="1">
+                <a:solidFill>
+                  <a:srgbClr val="3542B8"/>
+                </a:solidFill>
+                <a:latin typeface="Calibri"/>
+              </a:rPr>
+              <a:t>ENAHO 2025 · INEI</a:t>
+            </a:r>
+          </a:p>
+          <a:p>
+            <a:pPr algn="ctr">
               <a:spcAft>
                 <a:spcPts val="0"/>
               </a:spcAft>
@@ -6830,32 +7565,75 @@
             <a:r>
               <a:rPr sz="1800" b="0">
                 <a:solidFill>
-                  <a:srgbClr val="1E232B"/>
+                  <a:srgbClr val="49525F"/>
                 </a:solidFill>
                 <a:latin typeface="Calibri"/>
               </a:rPr>
-              <a:t>La base: ENAHO 2025 (INEI), módulos </a:t>
+              <a:t>módulos </a:t>
             </a:r>
             <a:r>
               <a:rPr sz="1800" b="1">
                 <a:solidFill>
-                  <a:srgbClr val="3542B8"/>
+                  <a:srgbClr val="1E232B"/>
                 </a:solidFill>
                 <a:latin typeface="Consolas"/>
               </a:rPr>
               <a:t>02 · 03 · 05</a:t>
             </a:r>
-            <a:r>
-              <a:rPr sz="1800" b="0">
-                <a:solidFill>
-                  <a:srgbClr val="5F6875"/>
-                </a:solidFill>
-                <a:latin typeface="Calibri"/>
-              </a:rPr>
-              <a:t> — </a:t>
-            </a:r>
-            <a:r>
-              <a:rPr sz="1800" b="1">
+          </a:p>
+        </p:txBody>
+      </p:sp>
+      <p:sp>
+        <p:nvSpPr>
+          <p:cNvPr id="6" name="Rounded Rectangle 5"/>
+          <p:cNvSpPr/>
+          <p:nvPr/>
+        </p:nvSpPr>
+        <p:spPr>
+          <a:xfrm>
+            <a:off x="4224528" y="2066543"/>
+            <a:ext cx="3739896" cy="841248"/>
+          </a:xfrm>
+          <a:prstGeom prst="roundRect">
+            <a:avLst>
+              <a:gd name="adj" fmla="val 5000"/>
+            </a:avLst>
+          </a:prstGeom>
+          <a:solidFill>
+            <a:srgbClr val="E6E8FA"/>
+          </a:solidFill>
+          <a:ln w="15875">
+            <a:solidFill>
+              <a:srgbClr val="4353CC"/>
+            </a:solidFill>
+          </a:ln>
+          <a:effectLst/>
+        </p:spPr>
+        <p:style>
+          <a:lnRef idx="1">
+            <a:schemeClr val="accent1"/>
+          </a:lnRef>
+          <a:fillRef idx="3">
+            <a:schemeClr val="accent1"/>
+          </a:fillRef>
+          <a:effectRef idx="2">
+            <a:schemeClr val="accent1"/>
+          </a:effectRef>
+          <a:fontRef idx="minor">
+            <a:schemeClr val="lt1"/>
+          </a:fontRef>
+        </p:style>
+        <p:txBody>
+          <a:bodyPr rtlCol="0" anchor="t" wrap="square" lIns="182880" rIns="182880" tIns="128016" bIns="128016"/>
+          <a:lstStyle/>
+          <a:p>
+            <a:pPr algn="ctr">
+              <a:spcAft>
+                <a:spcPts val="100"/>
+              </a:spcAft>
+            </a:pPr>
+            <a:r>
+              <a:rPr sz="2000" b="1">
                 <a:solidFill>
                   <a:srgbClr val="3542B8"/>
                 </a:solidFill>
@@ -6863,17 +7641,76 @@
               </a:rPr>
               <a:t>47.632</a:t>
             </a:r>
+          </a:p>
+          <a:p>
+            <a:pPr algn="ctr">
+              <a:spcAft>
+                <a:spcPts val="0"/>
+              </a:spcAft>
+            </a:pPr>
             <a:r>
               <a:rPr sz="1800" b="0">
                 <a:solidFill>
-                  <a:srgbClr val="1E232B"/>
+                  <a:srgbClr val="49525F"/>
                 </a:solidFill>
                 <a:latin typeface="Calibri"/>
               </a:rPr>
-              <a:t> trabajadores con ingreso laboral · </a:t>
-            </a:r>
-            <a:r>
-              <a:rPr sz="1800" b="1">
+              <a:t>trabajadores con ingreso laboral</a:t>
+            </a:r>
+          </a:p>
+        </p:txBody>
+      </p:sp>
+      <p:sp>
+        <p:nvSpPr>
+          <p:cNvPr id="7" name="Rounded Rectangle 6"/>
+          <p:cNvSpPr/>
+          <p:nvPr/>
+        </p:nvSpPr>
+        <p:spPr>
+          <a:xfrm>
+            <a:off x="8238744" y="2066543"/>
+            <a:ext cx="3383280" cy="841248"/>
+          </a:xfrm>
+          <a:prstGeom prst="roundRect">
+            <a:avLst>
+              <a:gd name="adj" fmla="val 5000"/>
+            </a:avLst>
+          </a:prstGeom>
+          <a:solidFill>
+            <a:srgbClr val="E6E8FA"/>
+          </a:solidFill>
+          <a:ln w="15875">
+            <a:solidFill>
+              <a:srgbClr val="4353CC"/>
+            </a:solidFill>
+          </a:ln>
+          <a:effectLst/>
+        </p:spPr>
+        <p:style>
+          <a:lnRef idx="1">
+            <a:schemeClr val="accent1"/>
+          </a:lnRef>
+          <a:fillRef idx="3">
+            <a:schemeClr val="accent1"/>
+          </a:fillRef>
+          <a:effectRef idx="2">
+            <a:schemeClr val="accent1"/>
+          </a:effectRef>
+          <a:fontRef idx="minor">
+            <a:schemeClr val="lt1"/>
+          </a:fontRef>
+        </p:style>
+        <p:txBody>
+          <a:bodyPr rtlCol="0" anchor="t" wrap="square" lIns="182880" rIns="182880" tIns="128016" bIns="128016"/>
+          <a:lstStyle/>
+          <a:p>
+            <a:pPr algn="ctr">
+              <a:spcAft>
+                <a:spcPts val="100"/>
+              </a:spcAft>
+            </a:pPr>
+            <a:r>
+              <a:rPr sz="2000" b="1">
                 <a:solidFill>
                   <a:srgbClr val="3542B8"/>
                 </a:solidFill>
@@ -6882,56 +7719,36 @@
               <a:t>11</a:t>
             </a:r>
             <a:r>
-              <a:rPr sz="1800" b="0">
-                <a:solidFill>
-                  <a:srgbClr val="1E232B"/>
+              <a:rPr sz="2000" b="1">
+                <a:solidFill>
+                  <a:srgbClr val="3542B8"/>
                 </a:solidFill>
                 <a:latin typeface="Calibri"/>
               </a:rPr>
-              <a:t> variables de entrada: </a:t>
-            </a:r>
-            <a:r>
-              <a:rPr sz="1800" b="1">
-                <a:solidFill>
-                  <a:srgbClr val="3542B8"/>
-                </a:solidFill>
-                <a:latin typeface="Consolas"/>
-              </a:rPr>
-              <a:t>5</a:t>
-            </a:r>
+              <a:t> variables</a:t>
+            </a:r>
+          </a:p>
+          <a:p>
+            <a:pPr algn="ctr">
+              <a:spcAft>
+                <a:spcPts val="0"/>
+              </a:spcAft>
+            </a:pPr>
             <a:r>
               <a:rPr sz="1800" b="0">
                 <a:solidFill>
-                  <a:srgbClr val="1E232B"/>
+                  <a:srgbClr val="49525F"/>
                 </a:solidFill>
                 <a:latin typeface="Calibri"/>
               </a:rPr>
-              <a:t> numéricas y </a:t>
-            </a:r>
-            <a:r>
-              <a:rPr sz="1800" b="1">
-                <a:solidFill>
-                  <a:srgbClr val="3542B8"/>
-                </a:solidFill>
-                <a:latin typeface="Consolas"/>
-              </a:rPr>
-              <a:t>6</a:t>
-            </a:r>
-            <a:r>
-              <a:rPr sz="1800" b="0">
-                <a:solidFill>
-                  <a:srgbClr val="1E232B"/>
-                </a:solidFill>
-                <a:latin typeface="Calibri"/>
-              </a:rPr>
-              <a:t> categóricas</a:t>
+              <a:t>5 numéricas · 6 categóricas</a:t>
             </a:r>
           </a:p>
         </p:txBody>
       </p:sp>
       <p:pic>
         <p:nvPicPr>
-          <p:cNvPr id="6" name="Picture 5" descr="cloud_reg_panel_pulida.png"/>
+          <p:cNvPr id="8" name="Picture 7" descr="cloud_reg_panel_pulida.png"/>
           <p:cNvPicPr>
             <a:picLocks noChangeAspect="1"/>
           </p:cNvPicPr>
@@ -6945,8 +7762,8 @@
         </p:blipFill>
         <p:spPr>
           <a:xfrm>
-            <a:off x="1681567" y="2907791"/>
-            <a:ext cx="3129105" cy="2212848"/>
+            <a:off x="1759148" y="3017520"/>
+            <a:ext cx="2973943" cy="2103120"/>
           </a:xfrm>
           <a:prstGeom prst="rect">
             <a:avLst/>
@@ -6955,7 +7772,7 @@
       </p:pic>
       <p:pic>
         <p:nvPicPr>
-          <p:cNvPr id="7" name="Picture 6" descr="cloud_clf_panel_pulida.png"/>
+          <p:cNvPr id="9" name="Picture 8" descr="cloud_clf_panel_pulida.png"/>
           <p:cNvPicPr>
             <a:picLocks noChangeAspect="1"/>
           </p:cNvPicPr>
@@ -6969,8 +7786,8 @@
         </p:blipFill>
         <p:spPr>
           <a:xfrm>
-            <a:off x="7378279" y="2907791"/>
-            <a:ext cx="3129105" cy="2212848"/>
+            <a:off x="7455860" y="3017520"/>
+            <a:ext cx="2973943" cy="2103120"/>
           </a:xfrm>
           <a:prstGeom prst="rect">
             <a:avLst/>
@@ -6979,7 +7796,7 @@
       </p:pic>
       <p:sp>
         <p:nvSpPr>
-          <p:cNvPr id="8" name="Rounded Rectangle 7"/>
+          <p:cNvPr id="10" name="Rounded Rectangle 9"/>
           <p:cNvSpPr/>
           <p:nvPr/>
         </p:nvSpPr>
@@ -7059,7 +7876,7 @@
       </p:sp>
       <p:sp>
         <p:nvSpPr>
-          <p:cNvPr id="9" name="Rounded Rectangle 8"/>
+          <p:cNvPr id="11" name="Rounded Rectangle 10"/>
           <p:cNvSpPr/>
           <p:nvPr/>
         </p:nvSpPr>
@@ -7139,7 +7956,7 @@
       </p:sp>
       <p:sp>
         <p:nvSpPr>
-          <p:cNvPr id="10" name="TextBox 9"/>
+          <p:cNvPr id="12" name="TextBox 11"/>
           <p:cNvSpPr txBox="1"/>
           <p:nvPr/>
         </p:nvSpPr>
@@ -7283,7 +8100,7 @@
                 </a:solidFill>
                 <a:latin typeface="Calibri"/>
               </a:rPr>
-              <a:t>Cada push a main redespliega la app en la nube, sin pasos manuales</a:t>
+              <a:t>Las 11 variables: cuáles son y cómo quedaron elegidas</a:t>
             </a:r>
           </a:p>
         </p:txBody>
@@ -7325,45 +8142,671 @@
                 </a:solidFill>
                 <a:latin typeface="Calibri"/>
               </a:rPr>
-              <a:t>Del editor al navegador solo hay commits: Streamlit Cloud reconstruye y publica en cada push.</a:t>
-            </a:r>
-          </a:p>
-        </p:txBody>
-      </p:sp>
-      <p:pic>
-        <p:nvPicPr>
-          <p:cNvPr id="5" name="Picture 4" descr="fig_arquitectura.png"/>
-          <p:cNvPicPr>
-            <a:picLocks noChangeAspect="1"/>
-          </p:cNvPicPr>
+              <a:t>Las mismas once entradas alimentan el regresor y el clasificador; un torneo de especificaciones decidió quedarse con ellas.</a:t>
+            </a:r>
+          </a:p>
+        </p:txBody>
+      </p:sp>
+      <p:graphicFrame>
+        <p:nvGraphicFramePr>
+          <p:cNvPr id="5" name="Table 4"/>
+          <p:cNvGraphicFramePr>
+            <a:graphicFrameLocks noGrp="1"/>
+          </p:cNvGraphicFramePr>
           <p:nvPr/>
-        </p:nvPicPr>
-        <p:blipFill>
-          <a:blip r:embed="rId2"/>
-          <a:stretch>
-            <a:fillRect/>
-          </a:stretch>
-        </p:blipFill>
-        <p:spPr>
-          <a:xfrm>
-            <a:off x="1943553" y="2066543"/>
-            <a:ext cx="8301844" cy="3200399"/>
-          </a:xfrm>
-          <a:prstGeom prst="rect">
-            <a:avLst/>
-          </a:prstGeom>
-        </p:spPr>
-      </p:pic>
-      <p:sp>
-        <p:nvSpPr>
-          <p:cNvPr id="6" name="Rounded Rectangle 5"/>
+        </p:nvGraphicFramePr>
+        <p:xfrm>
+          <a:off x="566928" y="2066543"/>
+          <a:ext cx="5358383" cy="1783080"/>
+        </p:xfrm>
+        <a:graphic>
+          <a:graphicData uri="http://schemas.openxmlformats.org/drawingml/2006/table">
+            <a:tbl>
+              <a:tblPr firstRow="1" bandRow="1">
+                <a:tableStyleId>{5C22544A-7EE6-4342-B048-85BDC9FD1C3A}</a:tableStyleId>
+              </a:tblPr>
+              <a:tblGrid>
+                <a:gridCol w="2357688"/>
+                <a:gridCol w="3000695"/>
+              </a:tblGrid>
+              <a:tr h="297180">
+                <a:tc>
+                  <a:txBody>
+                    <a:bodyPr wrap="square"/>
+                    <a:lstStyle/>
+                    <a:p>
+                      <a:r>
+                        <a:rPr sz="1600" b="1">
+                          <a:solidFill>
+                            <a:srgbClr val="5F6875"/>
+                          </a:solidFill>
+                          <a:latin typeface="Calibri"/>
+                        </a:rPr>
+                        <a:t>Numéricas (5)</a:t>
+                      </a:r>
+                    </a:p>
+                  </a:txBody>
+                  <a:tcPr marL="91440" marR="91440" marT="45720" marB="45720" anchor="ctr">
+                    <a:solidFill>
+                      <a:srgbClr val="F1EFE8"/>
+                    </a:solidFill>
+                  </a:tcPr>
+                </a:tc>
+                <a:tc>
+                  <a:txBody>
+                    <a:bodyPr wrap="square"/>
+                    <a:lstStyle/>
+                    <a:p>
+                      <a:r>
+                        <a:rPr sz="1600" b="1">
+                          <a:solidFill>
+                            <a:srgbClr val="5F6875"/>
+                          </a:solidFill>
+                          <a:latin typeface="Calibri"/>
+                        </a:rPr>
+                        <a:t>Qué es</a:t>
+                      </a:r>
+                    </a:p>
+                  </a:txBody>
+                  <a:tcPr marL="91440" marR="91440" marT="45720" marB="45720" anchor="ctr">
+                    <a:solidFill>
+                      <a:srgbClr val="F1EFE8"/>
+                    </a:solidFill>
+                  </a:tcPr>
+                </a:tc>
+              </a:tr>
+              <a:tr h="297180">
+                <a:tc>
+                  <a:txBody>
+                    <a:bodyPr wrap="square"/>
+                    <a:lstStyle/>
+                    <a:p>
+                      <a:r>
+                        <a:rPr sz="1600" b="0">
+                          <a:solidFill>
+                            <a:srgbClr val="1E232B"/>
+                          </a:solidFill>
+                          <a:latin typeface="Calibri"/>
+                        </a:rPr>
+                        <a:t>Años de educación</a:t>
+                      </a:r>
+                    </a:p>
+                  </a:txBody>
+                  <a:tcPr marL="91440" marR="91440" marT="45720" marB="45720" anchor="ctr">
+                    <a:solidFill>
+                      <a:srgbClr val="FCFBF8"/>
+                    </a:solidFill>
+                  </a:tcPr>
+                </a:tc>
+                <a:tc>
+                  <a:txBody>
+                    <a:bodyPr wrap="square"/>
+                    <a:lstStyle/>
+                    <a:p>
+                      <a:r>
+                        <a:rPr sz="1600" b="0">
+                          <a:solidFill>
+                            <a:srgbClr val="1E232B"/>
+                          </a:solidFill>
+                          <a:latin typeface="Calibri"/>
+                        </a:rPr>
+                        <a:t>de 0 a 18 años aprobados</a:t>
+                      </a:r>
+                    </a:p>
+                  </a:txBody>
+                  <a:tcPr marL="91440" marR="91440" marT="45720" marB="45720" anchor="ctr">
+                    <a:solidFill>
+                      <a:srgbClr val="FCFBF8"/>
+                    </a:solidFill>
+                  </a:tcPr>
+                </a:tc>
+              </a:tr>
+              <a:tr h="297180">
+                <a:tc>
+                  <a:txBody>
+                    <a:bodyPr wrap="square"/>
+                    <a:lstStyle/>
+                    <a:p>
+                      <a:r>
+                        <a:rPr sz="1600" b="0">
+                          <a:solidFill>
+                            <a:srgbClr val="1E232B"/>
+                          </a:solidFill>
+                          <a:latin typeface="Calibri"/>
+                        </a:rPr>
+                        <a:t>Edad</a:t>
+                      </a:r>
+                    </a:p>
+                  </a:txBody>
+                  <a:tcPr marL="91440" marR="91440" marT="45720" marB="45720" anchor="ctr">
+                    <a:solidFill>
+                      <a:srgbClr val="FCFBF8"/>
+                    </a:solidFill>
+                  </a:tcPr>
+                </a:tc>
+                <a:tc>
+                  <a:txBody>
+                    <a:bodyPr wrap="square"/>
+                    <a:lstStyle/>
+                    <a:p>
+                      <a:r>
+                        <a:rPr sz="1600" b="0">
+                          <a:solidFill>
+                            <a:srgbClr val="1E232B"/>
+                          </a:solidFill>
+                          <a:latin typeface="Calibri"/>
+                        </a:rPr>
+                        <a:t>de 14 a 80 años</a:t>
+                      </a:r>
+                    </a:p>
+                  </a:txBody>
+                  <a:tcPr marL="91440" marR="91440" marT="45720" marB="45720" anchor="ctr">
+                    <a:solidFill>
+                      <a:srgbClr val="FCFBF8"/>
+                    </a:solidFill>
+                  </a:tcPr>
+                </a:tc>
+              </a:tr>
+              <a:tr h="297180">
+                <a:tc>
+                  <a:txBody>
+                    <a:bodyPr wrap="square"/>
+                    <a:lstStyle/>
+                    <a:p>
+                      <a:r>
+                        <a:rPr sz="1600" b="0">
+                          <a:solidFill>
+                            <a:srgbClr val="1E232B"/>
+                          </a:solidFill>
+                          <a:latin typeface="Calibri"/>
+                        </a:rPr>
+                        <a:t>Experiencia potencial</a:t>
+                      </a:r>
+                    </a:p>
+                  </a:txBody>
+                  <a:tcPr marL="91440" marR="91440" marT="45720" marB="45720" anchor="ctr">
+                    <a:solidFill>
+                      <a:srgbClr val="FCFBF8"/>
+                    </a:solidFill>
+                  </a:tcPr>
+                </a:tc>
+                <a:tc>
+                  <a:txBody>
+                    <a:bodyPr wrap="square"/>
+                    <a:lstStyle/>
+                    <a:p>
+                      <a:r>
+                        <a:rPr sz="1600" b="0">
+                          <a:solidFill>
+                            <a:srgbClr val="1E232B"/>
+                          </a:solidFill>
+                          <a:latin typeface="Calibri"/>
+                        </a:rPr>
+                        <a:t>edad − educación − 6</a:t>
+                      </a:r>
+                    </a:p>
+                  </a:txBody>
+                  <a:tcPr marL="91440" marR="91440" marT="45720" marB="45720" anchor="ctr">
+                    <a:solidFill>
+                      <a:srgbClr val="FCFBF8"/>
+                    </a:solidFill>
+                  </a:tcPr>
+                </a:tc>
+              </a:tr>
+              <a:tr h="297180">
+                <a:tc>
+                  <a:txBody>
+                    <a:bodyPr wrap="square"/>
+                    <a:lstStyle/>
+                    <a:p>
+                      <a:r>
+                        <a:rPr sz="1600" b="0">
+                          <a:solidFill>
+                            <a:srgbClr val="1E232B"/>
+                          </a:solidFill>
+                          <a:latin typeface="Calibri"/>
+                        </a:rPr>
+                        <a:t>Experiencia²</a:t>
+                      </a:r>
+                    </a:p>
+                  </a:txBody>
+                  <a:tcPr marL="91440" marR="91440" marT="45720" marB="45720" anchor="ctr">
+                    <a:solidFill>
+                      <a:srgbClr val="FCFBF8"/>
+                    </a:solidFill>
+                  </a:tcPr>
+                </a:tc>
+                <a:tc>
+                  <a:txBody>
+                    <a:bodyPr wrap="square"/>
+                    <a:lstStyle/>
+                    <a:p>
+                      <a:r>
+                        <a:rPr sz="1600" b="0">
+                          <a:solidFill>
+                            <a:srgbClr val="1E232B"/>
+                          </a:solidFill>
+                          <a:latin typeface="Calibri"/>
+                        </a:rPr>
+                        <a:t>su cuadrado: efecto curvo</a:t>
+                      </a:r>
+                    </a:p>
+                  </a:txBody>
+                  <a:tcPr marL="91440" marR="91440" marT="45720" marB="45720" anchor="ctr">
+                    <a:solidFill>
+                      <a:srgbClr val="FCFBF8"/>
+                    </a:solidFill>
+                  </a:tcPr>
+                </a:tc>
+              </a:tr>
+              <a:tr h="297180">
+                <a:tc>
+                  <a:txBody>
+                    <a:bodyPr wrap="square"/>
+                    <a:lstStyle/>
+                    <a:p>
+                      <a:r>
+                        <a:rPr sz="1600" b="0">
+                          <a:solidFill>
+                            <a:srgbClr val="1E232B"/>
+                          </a:solidFill>
+                          <a:latin typeface="Calibri"/>
+                        </a:rPr>
+                        <a:t>Horas semanales</a:t>
+                      </a:r>
+                    </a:p>
+                  </a:txBody>
+                  <a:tcPr marL="91440" marR="91440" marT="45720" marB="45720" anchor="ctr">
+                    <a:solidFill>
+                      <a:srgbClr val="FCFBF8"/>
+                    </a:solidFill>
+                  </a:tcPr>
+                </a:tc>
+                <a:tc>
+                  <a:txBody>
+                    <a:bodyPr wrap="square"/>
+                    <a:lstStyle/>
+                    <a:p>
+                      <a:r>
+                        <a:rPr sz="1600" b="0">
+                          <a:solidFill>
+                            <a:srgbClr val="1E232B"/>
+                          </a:solidFill>
+                          <a:latin typeface="Calibri"/>
+                        </a:rPr>
+                        <a:t>de 4 a 84 a la semana</a:t>
+                      </a:r>
+                    </a:p>
+                  </a:txBody>
+                  <a:tcPr marL="91440" marR="91440" marT="45720" marB="45720" anchor="ctr">
+                    <a:solidFill>
+                      <a:srgbClr val="FCFBF8"/>
+                    </a:solidFill>
+                  </a:tcPr>
+                </a:tc>
+              </a:tr>
+            </a:tbl>
+          </a:graphicData>
+        </a:graphic>
+      </p:graphicFrame>
+      <p:graphicFrame>
+        <p:nvGraphicFramePr>
+          <p:cNvPr id="6" name="Table 5"/>
+          <p:cNvGraphicFramePr>
+            <a:graphicFrameLocks noGrp="1"/>
+          </p:cNvGraphicFramePr>
+          <p:nvPr/>
+        </p:nvGraphicFramePr>
+        <p:xfrm>
+          <a:off x="6263640" y="2066543"/>
+          <a:ext cx="5358383" cy="2084831"/>
+        </p:xfrm>
+        <a:graphic>
+          <a:graphicData uri="http://schemas.openxmlformats.org/drawingml/2006/table">
+            <a:tbl>
+              <a:tblPr firstRow="1" bandRow="1">
+                <a:tableStyleId>{5C22544A-7EE6-4342-B048-85BDC9FD1C3A}</a:tableStyleId>
+              </a:tblPr>
+              <a:tblGrid>
+                <a:gridCol w="2357688"/>
+                <a:gridCol w="3000695"/>
+              </a:tblGrid>
+              <a:tr h="297833">
+                <a:tc>
+                  <a:txBody>
+                    <a:bodyPr wrap="square"/>
+                    <a:lstStyle/>
+                    <a:p>
+                      <a:r>
+                        <a:rPr sz="1600" b="1">
+                          <a:solidFill>
+                            <a:srgbClr val="5F6875"/>
+                          </a:solidFill>
+                          <a:latin typeface="Calibri"/>
+                        </a:rPr>
+                        <a:t>Categóricas (6)</a:t>
+                      </a:r>
+                    </a:p>
+                  </a:txBody>
+                  <a:tcPr marL="91440" marR="91440" marT="45720" marB="45720" anchor="ctr">
+                    <a:solidFill>
+                      <a:srgbClr val="F1EFE8"/>
+                    </a:solidFill>
+                  </a:tcPr>
+                </a:tc>
+                <a:tc>
+                  <a:txBody>
+                    <a:bodyPr wrap="square"/>
+                    <a:lstStyle/>
+                    <a:p>
+                      <a:r>
+                        <a:rPr sz="1600" b="1">
+                          <a:solidFill>
+                            <a:srgbClr val="5F6875"/>
+                          </a:solidFill>
+                          <a:latin typeface="Calibri"/>
+                        </a:rPr>
+                        <a:t>Qué es</a:t>
+                      </a:r>
+                    </a:p>
+                  </a:txBody>
+                  <a:tcPr marL="91440" marR="91440" marT="45720" marB="45720" anchor="ctr">
+                    <a:solidFill>
+                      <a:srgbClr val="F1EFE8"/>
+                    </a:solidFill>
+                  </a:tcPr>
+                </a:tc>
+              </a:tr>
+              <a:tr h="297833">
+                <a:tc>
+                  <a:txBody>
+                    <a:bodyPr wrap="square"/>
+                    <a:lstStyle/>
+                    <a:p>
+                      <a:r>
+                        <a:rPr sz="1600" b="0">
+                          <a:solidFill>
+                            <a:srgbClr val="1E232B"/>
+                          </a:solidFill>
+                          <a:latin typeface="Calibri"/>
+                        </a:rPr>
+                        <a:t>Sexo</a:t>
+                      </a:r>
+                    </a:p>
+                  </a:txBody>
+                  <a:tcPr marL="91440" marR="91440" marT="45720" marB="45720" anchor="ctr">
+                    <a:solidFill>
+                      <a:srgbClr val="FCFBF8"/>
+                    </a:solidFill>
+                  </a:tcPr>
+                </a:tc>
+                <a:tc>
+                  <a:txBody>
+                    <a:bodyPr wrap="square"/>
+                    <a:lstStyle/>
+                    <a:p>
+                      <a:r>
+                        <a:rPr sz="1600" b="0">
+                          <a:solidFill>
+                            <a:srgbClr val="1E232B"/>
+                          </a:solidFill>
+                          <a:latin typeface="Calibri"/>
+                        </a:rPr>
+                        <a:t>Hombre / Mujer</a:t>
+                      </a:r>
+                    </a:p>
+                  </a:txBody>
+                  <a:tcPr marL="91440" marR="91440" marT="45720" marB="45720" anchor="ctr">
+                    <a:solidFill>
+                      <a:srgbClr val="FCFBF8"/>
+                    </a:solidFill>
+                  </a:tcPr>
+                </a:tc>
+              </a:tr>
+              <a:tr h="297833">
+                <a:tc>
+                  <a:txBody>
+                    <a:bodyPr wrap="square"/>
+                    <a:lstStyle/>
+                    <a:p>
+                      <a:r>
+                        <a:rPr sz="1600" b="0">
+                          <a:solidFill>
+                            <a:srgbClr val="1E232B"/>
+                          </a:solidFill>
+                          <a:latin typeface="Calibri"/>
+                        </a:rPr>
+                        <a:t>Área de residencia</a:t>
+                      </a:r>
+                    </a:p>
+                  </a:txBody>
+                  <a:tcPr marL="91440" marR="91440" marT="45720" marB="45720" anchor="ctr">
+                    <a:solidFill>
+                      <a:srgbClr val="FCFBF8"/>
+                    </a:solidFill>
+                  </a:tcPr>
+                </a:tc>
+                <a:tc>
+                  <a:txBody>
+                    <a:bodyPr wrap="square"/>
+                    <a:lstStyle/>
+                    <a:p>
+                      <a:r>
+                        <a:rPr sz="1600" b="0">
+                          <a:solidFill>
+                            <a:srgbClr val="1E232B"/>
+                          </a:solidFill>
+                          <a:latin typeface="Calibri"/>
+                        </a:rPr>
+                        <a:t>Rural / Urbana</a:t>
+                      </a:r>
+                    </a:p>
+                  </a:txBody>
+                  <a:tcPr marL="91440" marR="91440" marT="45720" marB="45720" anchor="ctr">
+                    <a:solidFill>
+                      <a:srgbClr val="FCFBF8"/>
+                    </a:solidFill>
+                  </a:tcPr>
+                </a:tc>
+              </a:tr>
+              <a:tr h="297833">
+                <a:tc>
+                  <a:txBody>
+                    <a:bodyPr wrap="square"/>
+                    <a:lstStyle/>
+                    <a:p>
+                      <a:r>
+                        <a:rPr sz="1600" b="0">
+                          <a:solidFill>
+                            <a:srgbClr val="1E232B"/>
+                          </a:solidFill>
+                          <a:latin typeface="Calibri"/>
+                        </a:rPr>
+                        <a:t>Dominio geográfico</a:t>
+                      </a:r>
+                    </a:p>
+                  </a:txBody>
+                  <a:tcPr marL="91440" marR="91440" marT="45720" marB="45720" anchor="ctr">
+                    <a:solidFill>
+                      <a:srgbClr val="FCFBF8"/>
+                    </a:solidFill>
+                  </a:tcPr>
+                </a:tc>
+                <a:tc>
+                  <a:txBody>
+                    <a:bodyPr wrap="square"/>
+                    <a:lstStyle/>
+                    <a:p>
+                      <a:r>
+                        <a:rPr sz="1600" b="0">
+                          <a:solidFill>
+                            <a:srgbClr val="1E232B"/>
+                          </a:solidFill>
+                          <a:latin typeface="Calibri"/>
+                        </a:rPr>
+                        <a:t>8 regiones del país</a:t>
+                      </a:r>
+                    </a:p>
+                  </a:txBody>
+                  <a:tcPr marL="91440" marR="91440" marT="45720" marB="45720" anchor="ctr">
+                    <a:solidFill>
+                      <a:srgbClr val="FCFBF8"/>
+                    </a:solidFill>
+                  </a:tcPr>
+                </a:tc>
+              </a:tr>
+              <a:tr h="297833">
+                <a:tc>
+                  <a:txBody>
+                    <a:bodyPr wrap="square"/>
+                    <a:lstStyle/>
+                    <a:p>
+                      <a:r>
+                        <a:rPr sz="1600" b="0">
+                          <a:solidFill>
+                            <a:srgbClr val="1E232B"/>
+                          </a:solidFill>
+                          <a:latin typeface="Calibri"/>
+                        </a:rPr>
+                        <a:t>Rama de actividad</a:t>
+                      </a:r>
+                    </a:p>
+                  </a:txBody>
+                  <a:tcPr marL="91440" marR="91440" marT="45720" marB="45720" anchor="ctr">
+                    <a:solidFill>
+                      <a:srgbClr val="FCFBF8"/>
+                    </a:solidFill>
+                  </a:tcPr>
+                </a:tc>
+                <a:tc>
+                  <a:txBody>
+                    <a:bodyPr wrap="square"/>
+                    <a:lstStyle/>
+                    <a:p>
+                      <a:r>
+                        <a:rPr sz="1600" b="0">
+                          <a:solidFill>
+                            <a:srgbClr val="1E232B"/>
+                          </a:solidFill>
+                          <a:latin typeface="Calibri"/>
+                        </a:rPr>
+                        <a:t>13 sectores agrupados</a:t>
+                      </a:r>
+                    </a:p>
+                  </a:txBody>
+                  <a:tcPr marL="91440" marR="91440" marT="45720" marB="45720" anchor="ctr">
+                    <a:solidFill>
+                      <a:srgbClr val="FCFBF8"/>
+                    </a:solidFill>
+                  </a:tcPr>
+                </a:tc>
+              </a:tr>
+              <a:tr h="297833">
+                <a:tc>
+                  <a:txBody>
+                    <a:bodyPr wrap="square"/>
+                    <a:lstStyle/>
+                    <a:p>
+                      <a:r>
+                        <a:rPr sz="1600" b="0">
+                          <a:solidFill>
+                            <a:srgbClr val="1E232B"/>
+                          </a:solidFill>
+                          <a:latin typeface="Calibri"/>
+                        </a:rPr>
+                        <a:t>Tamaño de empresa</a:t>
+                      </a:r>
+                    </a:p>
+                  </a:txBody>
+                  <a:tcPr marL="91440" marR="91440" marT="45720" marB="45720" anchor="ctr">
+                    <a:solidFill>
+                      <a:srgbClr val="FCFBF8"/>
+                    </a:solidFill>
+                  </a:tcPr>
+                </a:tc>
+                <a:tc>
+                  <a:txBody>
+                    <a:bodyPr wrap="square"/>
+                    <a:lstStyle/>
+                    <a:p>
+                      <a:r>
+                        <a:rPr sz="1600" b="0">
+                          <a:solidFill>
+                            <a:srgbClr val="1E232B"/>
+                          </a:solidFill>
+                          <a:latin typeface="Calibri"/>
+                        </a:rPr>
+                        <a:t>5 tramos, desde «Hasta 20»</a:t>
+                      </a:r>
+                    </a:p>
+                  </a:txBody>
+                  <a:tcPr marL="91440" marR="91440" marT="45720" marB="45720" anchor="ctr">
+                    <a:solidFill>
+                      <a:srgbClr val="FCFBF8"/>
+                    </a:solidFill>
+                  </a:tcPr>
+                </a:tc>
+              </a:tr>
+              <a:tr h="297833">
+                <a:tc>
+                  <a:txBody>
+                    <a:bodyPr wrap="square"/>
+                    <a:lstStyle/>
+                    <a:p>
+                      <a:r>
+                        <a:rPr sz="1600" b="0">
+                          <a:solidFill>
+                            <a:srgbClr val="1E232B"/>
+                          </a:solidFill>
+                          <a:latin typeface="Calibri"/>
+                        </a:rPr>
+                        <a:t>Categoría ocupacional</a:t>
+                      </a:r>
+                    </a:p>
+                  </a:txBody>
+                  <a:tcPr marL="91440" marR="91440" marT="45720" marB="45720" anchor="ctr">
+                    <a:solidFill>
+                      <a:srgbClr val="FCFBF8"/>
+                    </a:solidFill>
+                  </a:tcPr>
+                </a:tc>
+                <a:tc>
+                  <a:txBody>
+                    <a:bodyPr wrap="square"/>
+                    <a:lstStyle/>
+                    <a:p>
+                      <a:r>
+                        <a:rPr sz="1600" b="0">
+                          <a:solidFill>
+                            <a:srgbClr val="1E232B"/>
+                          </a:solidFill>
+                          <a:latin typeface="Calibri"/>
+                        </a:rPr>
+                        <a:t>5 tipos de vínculo laboral</a:t>
+                      </a:r>
+                    </a:p>
+                  </a:txBody>
+                  <a:tcPr marL="91440" marR="91440" marT="45720" marB="45720" anchor="ctr">
+                    <a:solidFill>
+                      <a:srgbClr val="FCFBF8"/>
+                    </a:solidFill>
+                  </a:tcPr>
+                </a:tc>
+              </a:tr>
+            </a:tbl>
+          </a:graphicData>
+        </a:graphic>
+      </p:graphicFrame>
+      <p:sp>
+        <p:nvSpPr>
+          <p:cNvPr id="7" name="Rounded Rectangle 6"/>
           <p:cNvSpPr/>
           <p:nvPr/>
         </p:nvSpPr>
         <p:spPr>
           <a:xfrm>
-            <a:off x="566928" y="5413248"/>
-            <a:ext cx="11055096" cy="804672"/>
+            <a:off x="566928" y="4718304"/>
+            <a:ext cx="11055096" cy="1426464"/>
           </a:xfrm>
           <a:prstGeom prst="roundRect">
             <a:avLst>
@@ -7371,11 +8814,11 @@
             </a:avLst>
           </a:prstGeom>
           <a:solidFill>
-            <a:srgbClr val="E2F2E9"/>
+            <a:srgbClr val="E6E8FA"/>
           </a:solidFill>
           <a:ln w="15875">
             <a:solidFill>
-              <a:srgbClr val="177A4C"/>
+              <a:srgbClr val="4353CC"/>
             </a:solidFill>
           </a:ln>
           <a:effectLst/>
@@ -7399,28 +8842,44 @@
           <a:lstStyle/>
           <a:p>
             <a:pPr algn="ctr">
+              <a:spcAft>
+                <a:spcPts val="400"/>
+              </a:spcAft>
+            </a:pPr>
+            <a:r>
+              <a:rPr sz="1400" b="0">
+                <a:solidFill>
+                  <a:srgbClr val="3542B8"/>
+                </a:solidFill>
+                <a:latin typeface="Consolas"/>
+              </a:rPr>
+              <a:t>CÓMO QUEDARON ELEGIDAS</a:t>
+            </a:r>
+          </a:p>
+          <a:p>
+            <a:pPr>
               <a:lnSpc>
-                <a:spcPct val="106000"/>
+                <a:spcPct val="105000"/>
               </a:lnSpc>
               <a:spcAft>
                 <a:spcPts val="0"/>
               </a:spcAft>
             </a:pPr>
             <a:r>
-              <a:rPr sz="1800" b="1">
-                <a:solidFill>
-                  <a:srgbClr val="177A4C"/>
+              <a:rPr sz="1800" b="0">
+                <a:solidFill>
+                  <a:srgbClr val="1E232B"/>
                 </a:solidFill>
                 <a:latin typeface="Calibri"/>
               </a:rPr>
-              <a:t>Los microdatos se quedan en la máquina: los 601,3 MB de la ENAHO no viajan al repositorio, que enlaza a la fuente oficial del INEI.</a:t>
-            </a:r>
-          </a:p>
-        </p:txBody>
-      </p:sp>
-      <p:sp>
-        <p:nvSpPr>
-          <p:cNvPr id="7" name="TextBox 6"/>
+              <a:t>Un torneo de nueve especificaciones — de la consigna del curso (E1, S/ 900,6 de error al mes) a variantes más ricas — compitió con los mismos datos y pliegues. Ganó E9: Gradient Boosting sobre el logaritmo, con estas once variables y S/ 610,9 en validación cruzada. Nunca se eligió por el test.</a:t>
+            </a:r>
+          </a:p>
+        </p:txBody>
+      </p:sp>
+      <p:sp>
+        <p:nvSpPr>
+          <p:cNvPr id="8" name="TextBox 7"/>
           <p:cNvSpPr txBox="1"/>
           <p:nvPr/>
         </p:nvSpPr>
@@ -7452,7 +8911,7 @@
                 </a:solidFill>
                 <a:latin typeface="Calibri"/>
               </a:rPr>
-              <a:t>Fuente: docs/arquitectura.md · .gitignore · git ls-files · tamaños medidos del disco al generar esta lámina</a:t>
+              <a:t>Fuente: models/feature_schema.json (nombre, tipo, rango y niveles de cada variable) · models/ui_artifacts.json (torneo.tabla) · docs/METODOLOGIA_TORNEO.md</a:t>
             </a:r>
           </a:p>
         </p:txBody>
@@ -7564,7 +9023,7 @@
                 </a:solidFill>
                 <a:latin typeface="Calibri"/>
               </a:rPr>
-              <a:t>La app no calcula al abrirse: lee resultados ya guardados</a:t>
+              <a:t>Cada push a main redespliega la app en la nube, sin pasos manuales</a:t>
             </a:r>
           </a:p>
         </p:txBody>
@@ -7606,14 +9065,14 @@
                 </a:solidFill>
                 <a:latin typeface="Calibri"/>
               </a:rPr>
-              <a:t>Curvas, histogramas y tablas se calcularon una sola vez, al entrenar. La app solo las lee y las dibuja.</a:t>
+              <a:t>Del editor al navegador solo hay commits: Streamlit Cloud reconstruye y publica en cada push.</a:t>
             </a:r>
           </a:p>
         </p:txBody>
       </p:sp>
       <p:pic>
         <p:nvPicPr>
-          <p:cNvPr id="5" name="Picture 4" descr="fig_precomputo.png"/>
+          <p:cNvPr id="5" name="Picture 4" descr="fig_arquitectura.png"/>
           <p:cNvPicPr>
             <a:picLocks noChangeAspect="1"/>
           </p:cNvPicPr>
@@ -7627,8 +9086,8 @@
         </p:blipFill>
         <p:spPr>
           <a:xfrm>
-            <a:off x="2734838" y="2066543"/>
-            <a:ext cx="6719275" cy="2834640"/>
+            <a:off x="1943553" y="2066543"/>
+            <a:ext cx="8301844" cy="3200399"/>
           </a:xfrm>
           <a:prstGeom prst="rect">
             <a:avLst/>
@@ -7643,8 +9102,8 @@
         </p:nvSpPr>
         <p:spPr>
           <a:xfrm>
-            <a:off x="566928" y="5020055"/>
-            <a:ext cx="11055096" cy="1142999"/>
+            <a:off x="566928" y="5413248"/>
+            <a:ext cx="11055096" cy="804672"/>
           </a:xfrm>
           <a:prstGeom prst="roundRect">
             <a:avLst>
@@ -7652,11 +9111,11 @@
             </a:avLst>
           </a:prstGeom>
           <a:solidFill>
-            <a:srgbClr val="E6E8FA"/>
+            <a:srgbClr val="E2F2E9"/>
           </a:solidFill>
           <a:ln w="15875">
             <a:solidFill>
-              <a:srgbClr val="4353CC"/>
+              <a:srgbClr val="177A4C"/>
             </a:solidFill>
           </a:ln>
           <a:effectLst/>
@@ -7676,103 +9135,25 @@
           </a:fontRef>
         </p:style>
         <p:txBody>
-          <a:bodyPr rtlCol="0" anchor="ctr" wrap="square" lIns="182880" rIns="182880" tIns="128016" bIns="128016"/>
+          <a:bodyPr rtlCol="0" anchor="t" wrap="square" lIns="182880" rIns="182880" tIns="128016" bIns="128016"/>
           <a:lstStyle/>
           <a:p>
             <a:pPr algn="ctr">
+              <a:lnSpc>
+                <a:spcPct val="106000"/>
+              </a:lnSpc>
               <a:spcAft>
                 <a:spcPts val="0"/>
               </a:spcAft>
             </a:pPr>
             <a:r>
-              <a:rPr sz="1800" b="0">
-                <a:solidFill>
-                  <a:srgbClr val="49525F"/>
+              <a:rPr sz="1800" b="1">
+                <a:solidFill>
+                  <a:srgbClr val="177A4C"/>
                 </a:solidFill>
                 <a:latin typeface="Calibri"/>
               </a:rPr>
-              <a:t>Abrir la app</a:t>
-            </a:r>
-            <a:r>
-              <a:rPr sz="1800" b="1">
-                <a:solidFill>
-                  <a:srgbClr val="5F6875"/>
-                </a:solidFill>
-                <a:latin typeface="Consolas"/>
-              </a:rPr>
-              <a:t>  →  </a:t>
-            </a:r>
-            <a:r>
-              <a:rPr sz="2600" b="1">
-                <a:solidFill>
-                  <a:srgbClr val="177A4C"/>
-                </a:solidFill>
-                <a:latin typeface="Consolas"/>
-              </a:rPr>
-              <a:t>0</a:t>
-            </a:r>
-            <a:r>
-              <a:rPr sz="1800" b="0">
-                <a:solidFill>
-                  <a:srgbClr val="49525F"/>
-                </a:solidFill>
-                <a:latin typeface="Calibri"/>
-              </a:rPr>
-              <a:t> ejecuciones</a:t>
-            </a:r>
-            <a:r>
-              <a:rPr sz="1800" b="0">
-                <a:solidFill>
-                  <a:srgbClr val="49525F"/>
-                </a:solidFill>
-                <a:latin typeface="Calibri"/>
-              </a:rPr>
-              <a:t>      Pulsar «Estimar»</a:t>
-            </a:r>
-            <a:r>
-              <a:rPr sz="1800" b="1">
-                <a:solidFill>
-                  <a:srgbClr val="5F6875"/>
-                </a:solidFill>
-                <a:latin typeface="Consolas"/>
-              </a:rPr>
-              <a:t>  →  </a:t>
-            </a:r>
-            <a:r>
-              <a:rPr sz="2600" b="1">
-                <a:solidFill>
-                  <a:srgbClr val="4353CC"/>
-                </a:solidFill>
-                <a:latin typeface="Consolas"/>
-              </a:rPr>
-              <a:t>1</a:t>
-            </a:r>
-            <a:r>
-              <a:rPr sz="1800" b="0">
-                <a:solidFill>
-                  <a:srgbClr val="49525F"/>
-                </a:solidFill>
-                <a:latin typeface="Calibri"/>
-              </a:rPr>
-              <a:t> predicción</a:t>
-            </a:r>
-            <a:r>
-              <a:rPr sz="1800" b="1">
-                <a:solidFill>
-                  <a:srgbClr val="5F6875"/>
-                </a:solidFill>
-                <a:latin typeface="Consolas"/>
-              </a:rPr>
-              <a:t>  →  </a:t>
-            </a:r>
-            <a:r>
-              <a:rPr sz="2600" b="1">
-                <a:solidFill>
-                  <a:srgbClr val="3542B8"/>
-                </a:solidFill>
-                <a:latin typeface="Consolas"/>
-              </a:rPr>
-              <a:t>S/ 849</a:t>
+              <a:t>Los microdatos se quedan en la máquina: los 601,3 MB de la ENAHO no viajan al repositorio, que enlaza a la fuente oficial del INEI.</a:t>
             </a:r>
           </a:p>
         </p:txBody>
@@ -7811,7 +9192,7 @@
                 </a:solidFill>
                 <a:latin typeface="Calibri"/>
               </a:rPr>
-              <a:t>Fuente: src/09_precomputar_ui.py · models/ui_artifacts.json · models/*.joblib · docs/presentacion/verificacion_local.py</a:t>
+              <a:t>Fuente: docs/arquitectura.md · .gitignore · git ls-files · tamaños medidos del disco al generar esta lámina</a:t>
             </a:r>
           </a:p>
         </p:txBody>
@@ -7923,7 +9304,7 @@
                 </a:solidFill>
                 <a:latin typeface="Calibri"/>
               </a:rPr>
-              <a:t>El pickle exige la misma scikit-learn que lo entrenó: cada versión queda fijada</a:t>
+              <a:t>La app no calcula al abrirse: lee resultados ya guardados</a:t>
             </a:r>
           </a:p>
         </p:txBody>
@@ -7965,14 +9346,14 @@
                 </a:solidFill>
                 <a:latin typeface="Calibri"/>
               </a:rPr>
-              <a:t>requirements.txt fija las versiones que generaron los artefactos, y Streamlit Cloud reconstruye ese mismo entorno.</a:t>
+              <a:t>Curvas, histogramas y tablas se calcularon una sola vez, al entrenar. La app solo las lee y las dibuja.</a:t>
             </a:r>
           </a:p>
         </p:txBody>
       </p:sp>
       <p:pic>
         <p:nvPicPr>
-          <p:cNvPr id="5" name="Picture 4" descr="fig_requisitos.png"/>
+          <p:cNvPr id="5" name="Picture 4" descr="fig_precomputo.png"/>
           <p:cNvPicPr>
             <a:picLocks noChangeAspect="1"/>
           </p:cNvPicPr>
@@ -7986,8 +9367,8 @@
         </p:blipFill>
         <p:spPr>
           <a:xfrm>
-            <a:off x="566928" y="2424282"/>
-            <a:ext cx="7589520" cy="3262162"/>
+            <a:off x="852572" y="2066543"/>
+            <a:ext cx="10483807" cy="2834640"/>
           </a:xfrm>
           <a:prstGeom prst="rect">
             <a:avLst/>
@@ -8002,8 +9383,8 @@
         </p:nvSpPr>
         <p:spPr>
           <a:xfrm>
-            <a:off x="8366760" y="2139696"/>
-            <a:ext cx="3255264" cy="1901952"/>
+            <a:off x="566928" y="5020055"/>
+            <a:ext cx="11055096" cy="1142999"/>
           </a:xfrm>
           <a:prstGeom prst="roundRect">
             <a:avLst>
@@ -8011,11 +9392,11 @@
             </a:avLst>
           </a:prstGeom>
           <a:solidFill>
-            <a:srgbClr val="FCFBF8"/>
+            <a:srgbClr val="E6E8FA"/>
           </a:solidFill>
           <a:ln w="15875">
             <a:solidFill>
-              <a:srgbClr val="D5D1C6"/>
+              <a:srgbClr val="4353CC"/>
             </a:solidFill>
           </a:ln>
           <a:effectLst/>
@@ -8035,48 +9416,10 @@
           </a:fontRef>
         </p:style>
         <p:txBody>
-          <a:bodyPr rtlCol="0" anchor="t" wrap="square" lIns="182880" rIns="182880" tIns="128016" bIns="128016"/>
+          <a:bodyPr rtlCol="0" anchor="ctr" wrap="square" lIns="182880" rIns="182880" tIns="128016" bIns="128016"/>
           <a:lstStyle/>
           <a:p>
             <a:pPr algn="ctr">
-              <a:spcAft>
-                <a:spcPts val="400"/>
-              </a:spcAft>
-            </a:pPr>
-            <a:r>
-              <a:rPr sz="1400" b="0">
-                <a:solidFill>
-                  <a:srgbClr val="5F6875"/>
-                </a:solidFill>
-                <a:latin typeface="Consolas"/>
-              </a:rPr>
-              <a:t>SCIKIT-LEARN FIJADO</a:t>
-            </a:r>
-          </a:p>
-          <a:p>
-            <a:pPr>
-              <a:lnSpc>
-                <a:spcPct val="95000"/>
-              </a:lnSpc>
-              <a:spcAft>
-                <a:spcPts val="600"/>
-              </a:spcAft>
-            </a:pPr>
-            <a:r>
-              <a:rPr sz="3400" b="1">
-                <a:solidFill>
-                  <a:srgbClr val="4353CC"/>
-                </a:solidFill>
-                <a:latin typeface="Consolas"/>
-              </a:rPr>
-              <a:t>1.9.0</a:t>
-            </a:r>
-          </a:p>
-          <a:p>
-            <a:pPr>
-              <a:lnSpc>
-                <a:spcPct val="105000"/>
-              </a:lnSpc>
               <a:spcAft>
                 <a:spcPts val="0"/>
               </a:spcAft>
@@ -8088,98 +9431,26 @@
                 </a:solidFill>
                 <a:latin typeface="Calibri"/>
               </a:rPr>
-              <a:t>La misma que entrenó los .joblib. Si dejan de coincidir, este generador aborta.</a:t>
-            </a:r>
-          </a:p>
-        </p:txBody>
-      </p:sp>
-      <p:sp>
-        <p:nvSpPr>
-          <p:cNvPr id="7" name="Rounded Rectangle 6"/>
-          <p:cNvSpPr/>
-          <p:nvPr/>
-        </p:nvSpPr>
-        <p:spPr>
-          <a:xfrm>
-            <a:off x="8366760" y="4133087"/>
-            <a:ext cx="3255264" cy="1901952"/>
-          </a:xfrm>
-          <a:prstGeom prst="roundRect">
-            <a:avLst>
-              <a:gd name="adj" fmla="val 5000"/>
-            </a:avLst>
-          </a:prstGeom>
-          <a:solidFill>
-            <a:srgbClr val="FCFBF8"/>
-          </a:solidFill>
-          <a:ln w="15875">
-            <a:solidFill>
-              <a:srgbClr val="D5D1C6"/>
-            </a:solidFill>
-          </a:ln>
-          <a:effectLst/>
-        </p:spPr>
-        <p:style>
-          <a:lnRef idx="1">
-            <a:schemeClr val="accent1"/>
-          </a:lnRef>
-          <a:fillRef idx="3">
-            <a:schemeClr val="accent1"/>
-          </a:fillRef>
-          <a:effectRef idx="2">
-            <a:schemeClr val="accent1"/>
-          </a:effectRef>
-          <a:fontRef idx="minor">
-            <a:schemeClr val="lt1"/>
-          </a:fontRef>
-        </p:style>
-        <p:txBody>
-          <a:bodyPr rtlCol="0" anchor="t" wrap="square" lIns="182880" rIns="182880" tIns="128016" bIns="128016"/>
-          <a:lstStyle/>
-          <a:p>
-            <a:pPr algn="ctr">
-              <a:spcAft>
-                <a:spcPts val="400"/>
-              </a:spcAft>
-            </a:pPr>
-            <a:r>
-              <a:rPr sz="1400" b="0">
+              <a:t>Abrir la app</a:t>
+            </a:r>
+            <a:r>
+              <a:rPr sz="1800" b="1">
                 <a:solidFill>
                   <a:srgbClr val="5F6875"/>
                 </a:solidFill>
                 <a:latin typeface="Consolas"/>
               </a:rPr>
-              <a:t>LA NUBE APUNTA A</a:t>
-            </a:r>
-          </a:p>
-          <a:p>
-            <a:pPr>
-              <a:lnSpc>
-                <a:spcPct val="95000"/>
-              </a:lnSpc>
-              <a:spcAft>
-                <a:spcPts val="600"/>
-              </a:spcAft>
-            </a:pPr>
-            <a:r>
-              <a:rPr sz="3000" b="1">
+              <a:t>  →  </a:t>
+            </a:r>
+            <a:r>
+              <a:rPr sz="2600" b="1">
                 <a:solidFill>
                   <a:srgbClr val="177A4C"/>
                 </a:solidFill>
                 <a:latin typeface="Consolas"/>
               </a:rPr>
-              <a:t>main</a:t>
-            </a:r>
-          </a:p>
-          <a:p>
-            <a:pPr>
-              <a:lnSpc>
-                <a:spcPct val="105000"/>
-              </a:lnSpc>
-              <a:spcAft>
-                <a:spcPts val="0"/>
-              </a:spcAft>
-            </a:pPr>
+              <a:t>0</a:t>
+            </a:r>
             <a:r>
               <a:rPr sz="1800" b="0">
                 <a:solidFill>
@@ -8187,14 +9458,68 @@
                 </a:solidFill>
                 <a:latin typeface="Calibri"/>
               </a:rPr>
-              <a:t>Streamlit Cloud sigue esa rama y reconstruye el entorno en cada push.</a:t>
-            </a:r>
-          </a:p>
-        </p:txBody>
-      </p:sp>
-      <p:sp>
-        <p:nvSpPr>
-          <p:cNvPr id="8" name="TextBox 7"/>
+              <a:t> ejecuciones</a:t>
+            </a:r>
+            <a:r>
+              <a:rPr sz="1800" b="0">
+                <a:solidFill>
+                  <a:srgbClr val="49525F"/>
+                </a:solidFill>
+                <a:latin typeface="Calibri"/>
+              </a:rPr>
+              <a:t>      Pulsar «Estimar»</a:t>
+            </a:r>
+            <a:r>
+              <a:rPr sz="1800" b="1">
+                <a:solidFill>
+                  <a:srgbClr val="5F6875"/>
+                </a:solidFill>
+                <a:latin typeface="Consolas"/>
+              </a:rPr>
+              <a:t>  →  </a:t>
+            </a:r>
+            <a:r>
+              <a:rPr sz="2600" b="1">
+                <a:solidFill>
+                  <a:srgbClr val="4353CC"/>
+                </a:solidFill>
+                <a:latin typeface="Consolas"/>
+              </a:rPr>
+              <a:t>1</a:t>
+            </a:r>
+            <a:r>
+              <a:rPr sz="1800" b="0">
+                <a:solidFill>
+                  <a:srgbClr val="49525F"/>
+                </a:solidFill>
+                <a:latin typeface="Calibri"/>
+              </a:rPr>
+              <a:t> predicción</a:t>
+            </a:r>
+            <a:r>
+              <a:rPr sz="1800" b="1">
+                <a:solidFill>
+                  <a:srgbClr val="5F6875"/>
+                </a:solidFill>
+                <a:latin typeface="Consolas"/>
+              </a:rPr>
+              <a:t>  →  </a:t>
+            </a:r>
+            <a:r>
+              <a:rPr sz="2600" b="1">
+                <a:solidFill>
+                  <a:srgbClr val="3542B8"/>
+                </a:solidFill>
+                <a:latin typeface="Consolas"/>
+              </a:rPr>
+              <a:t>S/ 849</a:t>
+            </a:r>
+          </a:p>
+        </p:txBody>
+      </p:sp>
+      <p:sp>
+        <p:nvSpPr>
+          <p:cNvPr id="7" name="TextBox 6"/>
           <p:cNvSpPr txBox="1"/>
           <p:nvPr/>
         </p:nvSpPr>
@@ -8226,7 +9551,7 @@
                 </a:solidFill>
                 <a:latin typeface="Calibri"/>
               </a:rPr>
-              <a:t>Fuente: requirements.txt · models/ui_artifacts.json (meta) · panel de Streamlit Community Cloud</a:t>
+              <a:t>Fuente: src/09_precomputar_ui.py · models/ui_artifacts.json · models/*.joblib · docs/presentacion/verificacion_local.py</a:t>
             </a:r>
           </a:p>
         </p:txBody>
@@ -8338,7 +9663,7 @@
                 </a:solidFill>
                 <a:latin typeface="Calibri"/>
               </a:rPr>
-              <a:t>El formulario no declara ni un campo a mano: se genera desde feature_schema.json</a:t>
+              <a:t>El pickle exige la misma scikit-learn que lo entrenó: cada versión queda fijada</a:t>
             </a:r>
           </a:p>
         </p:txBody>
@@ -8380,14 +9705,14 @@
                 </a:solidFill>
                 <a:latin typeface="Calibri"/>
               </a:rPr>
-              <a:t>Cada componente de Streamlit resuelve un problema concreto; si el schema cambia, el formulario cambia solo.</a:t>
+              <a:t>requirements.txt fija las versiones que generaron los artefactos, y Streamlit Cloud reconstruye ese mismo entorno.</a:t>
             </a:r>
           </a:p>
         </p:txBody>
       </p:sp>
       <p:pic>
         <p:nvPicPr>
-          <p:cNvPr id="5" name="Picture 4" descr="cloud_form_pulida.png"/>
+          <p:cNvPr id="5" name="Picture 4" descr="fig_requisitos.png"/>
           <p:cNvPicPr>
             <a:picLocks noChangeAspect="1"/>
           </p:cNvPicPr>
@@ -8401,8 +9726,8 @@
         </p:blipFill>
         <p:spPr>
           <a:xfrm>
-            <a:off x="566928" y="2066543"/>
-            <a:ext cx="6309360" cy="4206240"/>
+            <a:off x="566928" y="2424282"/>
+            <a:ext cx="7589520" cy="3262162"/>
           </a:xfrm>
           <a:prstGeom prst="rect">
             <a:avLst/>
@@ -8417,415 +9742,8 @@
         </p:nvSpPr>
         <p:spPr>
           <a:xfrm>
-            <a:off x="1197864" y="4169664"/>
-            <a:ext cx="144475" cy="274320"/>
-          </a:xfrm>
-          <a:prstGeom prst="roundRect">
-            <a:avLst>
-              <a:gd name="adj" fmla="val 35000"/>
-            </a:avLst>
-          </a:prstGeom>
-          <a:solidFill>
-            <a:srgbClr val="E6E8FA"/>
-          </a:solidFill>
-          <a:ln w="12700">
-            <a:solidFill>
-              <a:srgbClr val="3542B8"/>
-            </a:solidFill>
-          </a:ln>
-          <a:effectLst/>
-        </p:spPr>
-        <p:style>
-          <a:lnRef idx="1">
-            <a:schemeClr val="accent1"/>
-          </a:lnRef>
-          <a:fillRef idx="3">
-            <a:schemeClr val="accent1"/>
-          </a:fillRef>
-          <a:effectRef idx="2">
-            <a:schemeClr val="accent1"/>
-          </a:effectRef>
-          <a:fontRef idx="minor">
-            <a:schemeClr val="lt1"/>
-          </a:fontRef>
-        </p:style>
-        <p:txBody>
-          <a:bodyPr rtlCol="0" anchor="ctr" lIns="54864" rIns="54864" tIns="0" bIns="0"/>
-          <a:lstStyle/>
-          <a:p>
-            <a:pPr algn="ctr">
-              <a:spcAft>
-                <a:spcPts val="0"/>
-              </a:spcAft>
-            </a:pPr>
-            <a:r>
-              <a:rPr sz="1400" b="1">
-                <a:solidFill>
-                  <a:srgbClr val="3542B8"/>
-                </a:solidFill>
-                <a:latin typeface="Consolas"/>
-              </a:rPr>
-              <a:t>1</a:t>
-            </a:r>
-          </a:p>
-        </p:txBody>
-      </p:sp>
-      <p:sp>
-        <p:nvSpPr>
-          <p:cNvPr id="7" name="Rounded Rectangle 6"/>
-          <p:cNvSpPr/>
-          <p:nvPr/>
-        </p:nvSpPr>
-        <p:spPr>
-          <a:xfrm>
-            <a:off x="2459736" y="3833164"/>
-            <a:ext cx="144475" cy="274320"/>
-          </a:xfrm>
-          <a:prstGeom prst="roundRect">
-            <a:avLst>
-              <a:gd name="adj" fmla="val 35000"/>
-            </a:avLst>
-          </a:prstGeom>
-          <a:solidFill>
-            <a:srgbClr val="E6E8FA"/>
-          </a:solidFill>
-          <a:ln w="12700">
-            <a:solidFill>
-              <a:srgbClr val="3542B8"/>
-            </a:solidFill>
-          </a:ln>
-          <a:effectLst/>
-        </p:spPr>
-        <p:style>
-          <a:lnRef idx="1">
-            <a:schemeClr val="accent1"/>
-          </a:lnRef>
-          <a:fillRef idx="3">
-            <a:schemeClr val="accent1"/>
-          </a:fillRef>
-          <a:effectRef idx="2">
-            <a:schemeClr val="accent1"/>
-          </a:effectRef>
-          <a:fontRef idx="minor">
-            <a:schemeClr val="lt1"/>
-          </a:fontRef>
-        </p:style>
-        <p:txBody>
-          <a:bodyPr rtlCol="0" anchor="ctr" lIns="54864" rIns="54864" tIns="0" bIns="0"/>
-          <a:lstStyle/>
-          <a:p>
-            <a:pPr algn="ctr">
-              <a:spcAft>
-                <a:spcPts val="0"/>
-              </a:spcAft>
-            </a:pPr>
-            <a:r>
-              <a:rPr sz="1400" b="1">
-                <a:solidFill>
-                  <a:srgbClr val="3542B8"/>
-                </a:solidFill>
-                <a:latin typeface="Consolas"/>
-              </a:rPr>
-              <a:t>2</a:t>
-            </a:r>
-          </a:p>
-        </p:txBody>
-      </p:sp>
-      <p:sp>
-        <p:nvSpPr>
-          <p:cNvPr id="8" name="Rounded Rectangle 7"/>
-          <p:cNvSpPr/>
-          <p:nvPr/>
-        </p:nvSpPr>
-        <p:spPr>
-          <a:xfrm>
-            <a:off x="2459736" y="5095036"/>
-            <a:ext cx="144475" cy="274320"/>
-          </a:xfrm>
-          <a:prstGeom prst="roundRect">
-            <a:avLst>
-              <a:gd name="adj" fmla="val 35000"/>
-            </a:avLst>
-          </a:prstGeom>
-          <a:solidFill>
-            <a:srgbClr val="E6E8FA"/>
-          </a:solidFill>
-          <a:ln w="12700">
-            <a:solidFill>
-              <a:srgbClr val="3542B8"/>
-            </a:solidFill>
-          </a:ln>
-          <a:effectLst/>
-        </p:spPr>
-        <p:style>
-          <a:lnRef idx="1">
-            <a:schemeClr val="accent1"/>
-          </a:lnRef>
-          <a:fillRef idx="3">
-            <a:schemeClr val="accent1"/>
-          </a:fillRef>
-          <a:effectRef idx="2">
-            <a:schemeClr val="accent1"/>
-          </a:effectRef>
-          <a:fontRef idx="minor">
-            <a:schemeClr val="lt1"/>
-          </a:fontRef>
-        </p:style>
-        <p:txBody>
-          <a:bodyPr rtlCol="0" anchor="ctr" lIns="54864" rIns="54864" tIns="0" bIns="0"/>
-          <a:lstStyle/>
-          <a:p>
-            <a:pPr algn="ctr">
-              <a:spcAft>
-                <a:spcPts val="0"/>
-              </a:spcAft>
-            </a:pPr>
-            <a:r>
-              <a:rPr sz="1400" b="1">
-                <a:solidFill>
-                  <a:srgbClr val="3542B8"/>
-                </a:solidFill>
-                <a:latin typeface="Consolas"/>
-              </a:rPr>
-              <a:t>3</a:t>
-            </a:r>
-          </a:p>
-        </p:txBody>
-      </p:sp>
-      <p:sp>
-        <p:nvSpPr>
-          <p:cNvPr id="9" name="Rounded Rectangle 8"/>
-          <p:cNvSpPr/>
-          <p:nvPr/>
-        </p:nvSpPr>
-        <p:spPr>
-          <a:xfrm>
-            <a:off x="2333548" y="2991916"/>
-            <a:ext cx="144475" cy="274320"/>
-          </a:xfrm>
-          <a:prstGeom prst="roundRect">
-            <a:avLst>
-              <a:gd name="adj" fmla="val 35000"/>
-            </a:avLst>
-          </a:prstGeom>
-          <a:solidFill>
-            <a:srgbClr val="E6E8FA"/>
-          </a:solidFill>
-          <a:ln w="12700">
-            <a:solidFill>
-              <a:srgbClr val="3542B8"/>
-            </a:solidFill>
-          </a:ln>
-          <a:effectLst/>
-        </p:spPr>
-        <p:style>
-          <a:lnRef idx="1">
-            <a:schemeClr val="accent1"/>
-          </a:lnRef>
-          <a:fillRef idx="3">
-            <a:schemeClr val="accent1"/>
-          </a:fillRef>
-          <a:effectRef idx="2">
-            <a:schemeClr val="accent1"/>
-          </a:effectRef>
-          <a:fontRef idx="minor">
-            <a:schemeClr val="lt1"/>
-          </a:fontRef>
-        </p:style>
-        <p:txBody>
-          <a:bodyPr rtlCol="0" anchor="ctr" lIns="54864" rIns="54864" tIns="0" bIns="0"/>
-          <a:lstStyle/>
-          <a:p>
-            <a:pPr algn="ctr">
-              <a:spcAft>
-                <a:spcPts val="0"/>
-              </a:spcAft>
-            </a:pPr>
-            <a:r>
-              <a:rPr sz="1400" b="1">
-                <a:solidFill>
-                  <a:srgbClr val="3542B8"/>
-                </a:solidFill>
-                <a:latin typeface="Consolas"/>
-              </a:rPr>
-              <a:t>4</a:t>
-            </a:r>
-          </a:p>
-        </p:txBody>
-      </p:sp>
-      <p:sp>
-        <p:nvSpPr>
-          <p:cNvPr id="10" name="TextBox 9"/>
-          <p:cNvSpPr txBox="1"/>
-          <p:nvPr/>
-        </p:nvSpPr>
-        <p:spPr>
-          <a:xfrm>
-            <a:off x="7086600" y="2084831"/>
-            <a:ext cx="4535424" cy="2267712"/>
-          </a:xfrm>
-          <a:prstGeom prst="rect">
-            <a:avLst/>
-          </a:prstGeom>
-          <a:noFill/>
-        </p:spPr>
-        <p:txBody>
-          <a:bodyPr wrap="square" lIns="0" rIns="0" tIns="0" bIns="0">
-            <a:spAutoFit/>
-          </a:bodyPr>
-          <a:lstStyle/>
-          <a:p>
-            <a:pPr>
-              <a:spcAft>
-                <a:spcPts val="100"/>
-              </a:spcAft>
-            </a:pPr>
-            <a:r>
-              <a:rPr sz="1800" b="1">
-                <a:solidFill>
-                  <a:srgbClr val="3542B8"/>
-                </a:solidFill>
-                <a:latin typeface="Consolas"/>
-              </a:rPr>
-              <a:t>1 · st.radio</a:t>
-            </a:r>
-          </a:p>
-          <a:p>
-            <a:pPr>
-              <a:lnSpc>
-                <a:spcPct val="100000"/>
-              </a:lnSpc>
-              <a:spcAft>
-                <a:spcPts val="400"/>
-              </a:spcAft>
-            </a:pPr>
-            <a:r>
-              <a:rPr sz="1800" b="0">
-                <a:solidFill>
-                  <a:srgbClr val="49525F"/>
-                </a:solidFill>
-                <a:latin typeface="Calibri"/>
-              </a:rPr>
-              <a:t>cambia de tema desde PALETAS</a:t>
-            </a:r>
-          </a:p>
-          <a:p>
-            <a:pPr>
-              <a:spcAft>
-                <a:spcPts val="100"/>
-              </a:spcAft>
-            </a:pPr>
-            <a:r>
-              <a:rPr sz="1800" b="1">
-                <a:solidFill>
-                  <a:srgbClr val="3542B8"/>
-                </a:solidFill>
-                <a:latin typeface="Consolas"/>
-              </a:rPr>
-              <a:t>2 · st.number_input</a:t>
-            </a:r>
-          </a:p>
-          <a:p>
-            <a:pPr>
-              <a:lnSpc>
-                <a:spcPct val="100000"/>
-              </a:lnSpc>
-              <a:spcAft>
-                <a:spcPts val="400"/>
-              </a:spcAft>
-            </a:pPr>
-            <a:r>
-              <a:rPr sz="1800" b="0">
-                <a:solidFill>
-                  <a:srgbClr val="49525F"/>
-                </a:solidFill>
-                <a:latin typeface="Calibri"/>
-              </a:rPr>
-              <a:t>una por variable numérica</a:t>
-            </a:r>
-          </a:p>
-          <a:p>
-            <a:pPr>
-              <a:spcAft>
-                <a:spcPts val="100"/>
-              </a:spcAft>
-            </a:pPr>
-            <a:r>
-              <a:rPr sz="1800" b="1">
-                <a:solidFill>
-                  <a:srgbClr val="3542B8"/>
-                </a:solidFill>
-                <a:latin typeface="Consolas"/>
-              </a:rPr>
-              <a:t>3 · st.selectbox</a:t>
-            </a:r>
-          </a:p>
-          <a:p>
-            <a:pPr>
-              <a:lnSpc>
-                <a:spcPct val="100000"/>
-              </a:lnSpc>
-              <a:spcAft>
-                <a:spcPts val="400"/>
-              </a:spcAft>
-            </a:pPr>
-            <a:r>
-              <a:rPr sz="1800" b="0">
-                <a:solidFill>
-                  <a:srgbClr val="49525F"/>
-                </a:solidFill>
-                <a:latin typeface="Calibri"/>
-              </a:rPr>
-              <a:t>una por variable categórica</a:t>
-            </a:r>
-          </a:p>
-          <a:p>
-            <a:pPr>
-              <a:spcAft>
-                <a:spcPts val="100"/>
-              </a:spcAft>
-            </a:pPr>
-            <a:r>
-              <a:rPr sz="1800" b="1">
-                <a:solidFill>
-                  <a:srgbClr val="3542B8"/>
-                </a:solidFill>
-                <a:latin typeface="Consolas"/>
-              </a:rPr>
-              <a:t>4 · st.expander · st.popover</a:t>
-            </a:r>
-          </a:p>
-          <a:p>
-            <a:pPr>
-              <a:lnSpc>
-                <a:spcPct val="100000"/>
-              </a:lnSpc>
-              <a:spcAft>
-                <a:spcPts val="400"/>
-              </a:spcAft>
-            </a:pPr>
-            <a:r>
-              <a:rPr sz="1800" b="0">
-                <a:solidFill>
-                  <a:srgbClr val="49525F"/>
-                </a:solidFill>
-                <a:latin typeface="Calibri"/>
-              </a:rPr>
-              <a:t>lectura llana y lectura técnica</a:t>
-            </a:r>
-          </a:p>
-        </p:txBody>
-      </p:sp>
-      <p:sp>
-        <p:nvSpPr>
-          <p:cNvPr id="11" name="Rounded Rectangle 10"/>
-          <p:cNvSpPr/>
-          <p:nvPr/>
-        </p:nvSpPr>
-        <p:spPr>
-          <a:xfrm>
-            <a:off x="7086600" y="4626864"/>
-            <a:ext cx="4535424" cy="1668948"/>
+            <a:off x="8366760" y="2139696"/>
+            <a:ext cx="3255264" cy="1901952"/>
           </a:xfrm>
           <a:prstGeom prst="roundRect">
             <a:avLst>
@@ -8833,11 +9751,11 @@
             </a:avLst>
           </a:prstGeom>
           <a:solidFill>
-            <a:srgbClr val="E6E8FA"/>
+            <a:srgbClr val="FCFBF8"/>
           </a:solidFill>
           <a:ln w="15875">
             <a:solidFill>
-              <a:srgbClr val="4353CC"/>
+              <a:srgbClr val="D5D1C6"/>
             </a:solidFill>
           </a:ln>
           <a:effectLst/>
@@ -8860,20 +9778,170 @@
           <a:bodyPr rtlCol="0" anchor="t" wrap="square" lIns="182880" rIns="182880" tIns="128016" bIns="128016"/>
           <a:lstStyle/>
           <a:p>
-            <a:pPr algn="ctr"/>
-          </a:p>
-        </p:txBody>
-      </p:sp>
-      <p:sp>
-        <p:nvSpPr>
-          <p:cNvPr id="12" name="TextBox 11"/>
+            <a:pPr algn="ctr">
+              <a:spcAft>
+                <a:spcPts val="400"/>
+              </a:spcAft>
+            </a:pPr>
+            <a:r>
+              <a:rPr sz="1400" b="0">
+                <a:solidFill>
+                  <a:srgbClr val="5F6875"/>
+                </a:solidFill>
+                <a:latin typeface="Consolas"/>
+              </a:rPr>
+              <a:t>SCIKIT-LEARN FIJADO</a:t>
+            </a:r>
+          </a:p>
+          <a:p>
+            <a:pPr>
+              <a:lnSpc>
+                <a:spcPct val="95000"/>
+              </a:lnSpc>
+              <a:spcAft>
+                <a:spcPts val="600"/>
+              </a:spcAft>
+            </a:pPr>
+            <a:r>
+              <a:rPr sz="3400" b="1">
+                <a:solidFill>
+                  <a:srgbClr val="4353CC"/>
+                </a:solidFill>
+                <a:latin typeface="Consolas"/>
+              </a:rPr>
+              <a:t>1.9.0</a:t>
+            </a:r>
+          </a:p>
+          <a:p>
+            <a:pPr>
+              <a:lnSpc>
+                <a:spcPct val="105000"/>
+              </a:lnSpc>
+              <a:spcAft>
+                <a:spcPts val="0"/>
+              </a:spcAft>
+            </a:pPr>
+            <a:r>
+              <a:rPr sz="1800" b="0">
+                <a:solidFill>
+                  <a:srgbClr val="49525F"/>
+                </a:solidFill>
+                <a:latin typeface="Calibri"/>
+              </a:rPr>
+              <a:t>La misma que entrenó los .joblib. Si dejan de coincidir, este generador aborta.</a:t>
+            </a:r>
+          </a:p>
+        </p:txBody>
+      </p:sp>
+      <p:sp>
+        <p:nvSpPr>
+          <p:cNvPr id="7" name="Rounded Rectangle 6"/>
+          <p:cNvSpPr/>
+          <p:nvPr/>
+        </p:nvSpPr>
+        <p:spPr>
+          <a:xfrm>
+            <a:off x="8366760" y="4133087"/>
+            <a:ext cx="3255264" cy="1901952"/>
+          </a:xfrm>
+          <a:prstGeom prst="roundRect">
+            <a:avLst>
+              <a:gd name="adj" fmla="val 5000"/>
+            </a:avLst>
+          </a:prstGeom>
+          <a:solidFill>
+            <a:srgbClr val="FCFBF8"/>
+          </a:solidFill>
+          <a:ln w="15875">
+            <a:solidFill>
+              <a:srgbClr val="D5D1C6"/>
+            </a:solidFill>
+          </a:ln>
+          <a:effectLst/>
+        </p:spPr>
+        <p:style>
+          <a:lnRef idx="1">
+            <a:schemeClr val="accent1"/>
+          </a:lnRef>
+          <a:fillRef idx="3">
+            <a:schemeClr val="accent1"/>
+          </a:fillRef>
+          <a:effectRef idx="2">
+            <a:schemeClr val="accent1"/>
+          </a:effectRef>
+          <a:fontRef idx="minor">
+            <a:schemeClr val="lt1"/>
+          </a:fontRef>
+        </p:style>
+        <p:txBody>
+          <a:bodyPr rtlCol="0" anchor="t" wrap="square" lIns="182880" rIns="182880" tIns="128016" bIns="128016"/>
+          <a:lstStyle/>
+          <a:p>
+            <a:pPr algn="ctr">
+              <a:spcAft>
+                <a:spcPts val="400"/>
+              </a:spcAft>
+            </a:pPr>
+            <a:r>
+              <a:rPr sz="1400" b="0">
+                <a:solidFill>
+                  <a:srgbClr val="5F6875"/>
+                </a:solidFill>
+                <a:latin typeface="Consolas"/>
+              </a:rPr>
+              <a:t>LA NUBE APUNTA A</a:t>
+            </a:r>
+          </a:p>
+          <a:p>
+            <a:pPr>
+              <a:lnSpc>
+                <a:spcPct val="95000"/>
+              </a:lnSpc>
+              <a:spcAft>
+                <a:spcPts val="600"/>
+              </a:spcAft>
+            </a:pPr>
+            <a:r>
+              <a:rPr sz="3000" b="1">
+                <a:solidFill>
+                  <a:srgbClr val="177A4C"/>
+                </a:solidFill>
+                <a:latin typeface="Consolas"/>
+              </a:rPr>
+              <a:t>main</a:t>
+            </a:r>
+          </a:p>
+          <a:p>
+            <a:pPr>
+              <a:lnSpc>
+                <a:spcPct val="105000"/>
+              </a:lnSpc>
+              <a:spcAft>
+                <a:spcPts val="0"/>
+              </a:spcAft>
+            </a:pPr>
+            <a:r>
+              <a:rPr sz="1800" b="0">
+                <a:solidFill>
+                  <a:srgbClr val="49525F"/>
+                </a:solidFill>
+                <a:latin typeface="Calibri"/>
+              </a:rPr>
+              <a:t>Streamlit Cloud sigue esa rama y reconstruye el entorno en cada push.</a:t>
+            </a:r>
+          </a:p>
+        </p:txBody>
+      </p:sp>
+      <p:sp>
+        <p:nvSpPr>
+          <p:cNvPr id="8" name="TextBox 7"/>
           <p:cNvSpPr txBox="1"/>
           <p:nvPr/>
         </p:nvSpPr>
         <p:spPr>
           <a:xfrm>
-            <a:off x="7269480" y="4754879"/>
-            <a:ext cx="4206240" cy="292608"/>
+            <a:off x="566928" y="6419088"/>
+            <a:ext cx="11057839" cy="310896"/>
           </a:xfrm>
           <a:prstGeom prst="rect">
             <a:avLst/>
@@ -8892,137 +9960,13 @@
               </a:spcAft>
             </a:pPr>
             <a:r>
-              <a:rPr sz="1800" b="1">
-                <a:solidFill>
-                  <a:srgbClr val="3542B8"/>
-                </a:solidFill>
-                <a:latin typeface="Consolas"/>
-              </a:rPr>
-              <a:t>5 · st.slider + st.fragment</a:t>
-            </a:r>
-          </a:p>
-        </p:txBody>
-      </p:sp>
-      <p:pic>
-        <p:nvPicPr>
-          <p:cNvPr id="13" name="Picture 12" descr="cloud_umbral_control_pulida.png"/>
-          <p:cNvPicPr>
-            <a:picLocks noChangeAspect="1"/>
-          </p:cNvPicPr>
-          <p:nvPr/>
-        </p:nvPicPr>
-        <p:blipFill>
-          <a:blip r:embed="rId3"/>
-          <a:stretch>
-            <a:fillRect/>
-          </a:stretch>
-        </p:blipFill>
-        <p:spPr>
-          <a:xfrm>
-            <a:off x="7242048" y="5102352"/>
-            <a:ext cx="4224528" cy="974004"/>
-          </a:xfrm>
-          <a:prstGeom prst="rect">
-            <a:avLst/>
-          </a:prstGeom>
-        </p:spPr>
-      </p:pic>
-      <p:sp>
-        <p:nvSpPr>
-          <p:cNvPr id="14" name="Rounded Rectangle 13"/>
-          <p:cNvSpPr/>
-          <p:nvPr/>
-        </p:nvSpPr>
-        <p:spPr>
-          <a:xfrm>
-            <a:off x="10030236" y="5530913"/>
-            <a:ext cx="144475" cy="274320"/>
-          </a:xfrm>
-          <a:prstGeom prst="roundRect">
-            <a:avLst>
-              <a:gd name="adj" fmla="val 35000"/>
-            </a:avLst>
-          </a:prstGeom>
-          <a:solidFill>
-            <a:srgbClr val="E6E8FA"/>
-          </a:solidFill>
-          <a:ln w="12700">
-            <a:solidFill>
-              <a:srgbClr val="3542B8"/>
-            </a:solidFill>
-          </a:ln>
-          <a:effectLst/>
-        </p:spPr>
-        <p:style>
-          <a:lnRef idx="1">
-            <a:schemeClr val="accent1"/>
-          </a:lnRef>
-          <a:fillRef idx="3">
-            <a:schemeClr val="accent1"/>
-          </a:fillRef>
-          <a:effectRef idx="2">
-            <a:schemeClr val="accent1"/>
-          </a:effectRef>
-          <a:fontRef idx="minor">
-            <a:schemeClr val="lt1"/>
-          </a:fontRef>
-        </p:style>
-        <p:txBody>
-          <a:bodyPr rtlCol="0" anchor="ctr" lIns="54864" rIns="54864" tIns="0" bIns="0"/>
-          <a:lstStyle/>
-          <a:p>
-            <a:pPr algn="ctr">
-              <a:spcAft>
-                <a:spcPts val="0"/>
-              </a:spcAft>
-            </a:pPr>
-            <a:r>
-              <a:rPr sz="1400" b="1">
-                <a:solidFill>
-                  <a:srgbClr val="3542B8"/>
-                </a:solidFill>
-                <a:latin typeface="Consolas"/>
-              </a:rPr>
-              <a:t>5</a:t>
-            </a:r>
-          </a:p>
-        </p:txBody>
-      </p:sp>
-      <p:sp>
-        <p:nvSpPr>
-          <p:cNvPr id="15" name="TextBox 14"/>
-          <p:cNvSpPr txBox="1"/>
-          <p:nvPr/>
-        </p:nvSpPr>
-        <p:spPr>
-          <a:xfrm>
-            <a:off x="566928" y="6419088"/>
-            <a:ext cx="11057839" cy="310896"/>
-          </a:xfrm>
-          <a:prstGeom prst="rect">
-            <a:avLst/>
-          </a:prstGeom>
-          <a:noFill/>
-        </p:spPr>
-        <p:txBody>
-          <a:bodyPr wrap="square" lIns="0" rIns="0" tIns="0" bIns="0">
-            <a:spAutoFit/>
-          </a:bodyPr>
-          <a:lstStyle/>
-          <a:p>
-            <a:pPr>
-              <a:spcAft>
-                <a:spcPts val="0"/>
-              </a:spcAft>
-            </a:pPr>
-            <a:r>
               <a:rPr sz="1200" b="0">
                 <a:solidFill>
                   <a:srgbClr val="5F6875"/>
                 </a:solidFill>
                 <a:latin typeface="Calibri"/>
               </a:rPr>
-              <a:t>Fuente: captura de la app desplegada · app/streamlit_app.py (componentes realmente usados) · models/feature_schema.json</a:t>
+              <a:t>Fuente: requirements.txt · models/ui_artifacts.json (meta) · panel de Streamlit Community Cloud</a:t>
             </a:r>
           </a:p>
         </p:txBody>
@@ -9134,7 +10078,7 @@
                 </a:solidFill>
                 <a:latin typeface="Calibri"/>
               </a:rPr>
-              <a:t>Lo que se publica va firmado, con tests y medido sobre la app viva</a:t>
+              <a:t>El formulario no declara ni un campo a mano: se genera desde feature_schema.json</a:t>
             </a:r>
           </a:p>
         </p:txBody>
@@ -9176,7 +10120,803 @@
                 </a:solidFill>
                 <a:latin typeface="Calibri"/>
               </a:rPr>
-              <a:t>Tres controles rodean cada entrega: que la app y los archivos del modelo digan lo mismo, quién publicó cada versión, y qué se ve de verdad en la app.</a:t>
+              <a:t>Cada componente de Streamlit resuelve un problema concreto; si el schema cambia, el formulario cambia solo.</a:t>
+            </a:r>
+          </a:p>
+        </p:txBody>
+      </p:sp>
+      <p:pic>
+        <p:nvPicPr>
+          <p:cNvPr id="5" name="Picture 4" descr="cloud_form_pulida.png"/>
+          <p:cNvPicPr>
+            <a:picLocks noChangeAspect="1"/>
+          </p:cNvPicPr>
+          <p:nvPr/>
+        </p:nvPicPr>
+        <p:blipFill>
+          <a:blip r:embed="rId2"/>
+          <a:stretch>
+            <a:fillRect/>
+          </a:stretch>
+        </p:blipFill>
+        <p:spPr>
+          <a:xfrm>
+            <a:off x="566928" y="2066543"/>
+            <a:ext cx="6309360" cy="4206240"/>
+          </a:xfrm>
+          <a:prstGeom prst="rect">
+            <a:avLst/>
+          </a:prstGeom>
+        </p:spPr>
+      </p:pic>
+      <p:sp>
+        <p:nvSpPr>
+          <p:cNvPr id="6" name="Rounded Rectangle 5"/>
+          <p:cNvSpPr/>
+          <p:nvPr/>
+        </p:nvSpPr>
+        <p:spPr>
+          <a:xfrm>
+            <a:off x="1197864" y="4169664"/>
+            <a:ext cx="144475" cy="274320"/>
+          </a:xfrm>
+          <a:prstGeom prst="roundRect">
+            <a:avLst>
+              <a:gd name="adj" fmla="val 35000"/>
+            </a:avLst>
+          </a:prstGeom>
+          <a:solidFill>
+            <a:srgbClr val="E6E8FA"/>
+          </a:solidFill>
+          <a:ln w="12700">
+            <a:solidFill>
+              <a:srgbClr val="3542B8"/>
+            </a:solidFill>
+          </a:ln>
+          <a:effectLst/>
+        </p:spPr>
+        <p:style>
+          <a:lnRef idx="1">
+            <a:schemeClr val="accent1"/>
+          </a:lnRef>
+          <a:fillRef idx="3">
+            <a:schemeClr val="accent1"/>
+          </a:fillRef>
+          <a:effectRef idx="2">
+            <a:schemeClr val="accent1"/>
+          </a:effectRef>
+          <a:fontRef idx="minor">
+            <a:schemeClr val="lt1"/>
+          </a:fontRef>
+        </p:style>
+        <p:txBody>
+          <a:bodyPr rtlCol="0" anchor="ctr" lIns="54864" rIns="54864" tIns="0" bIns="0"/>
+          <a:lstStyle/>
+          <a:p>
+            <a:pPr algn="ctr">
+              <a:spcAft>
+                <a:spcPts val="0"/>
+              </a:spcAft>
+            </a:pPr>
+            <a:r>
+              <a:rPr sz="1400" b="1">
+                <a:solidFill>
+                  <a:srgbClr val="3542B8"/>
+                </a:solidFill>
+                <a:latin typeface="Consolas"/>
+              </a:rPr>
+              <a:t>1</a:t>
+            </a:r>
+          </a:p>
+        </p:txBody>
+      </p:sp>
+      <p:sp>
+        <p:nvSpPr>
+          <p:cNvPr id="7" name="Rounded Rectangle 6"/>
+          <p:cNvSpPr/>
+          <p:nvPr/>
+        </p:nvSpPr>
+        <p:spPr>
+          <a:xfrm>
+            <a:off x="2459736" y="3833164"/>
+            <a:ext cx="144475" cy="274320"/>
+          </a:xfrm>
+          <a:prstGeom prst="roundRect">
+            <a:avLst>
+              <a:gd name="adj" fmla="val 35000"/>
+            </a:avLst>
+          </a:prstGeom>
+          <a:solidFill>
+            <a:srgbClr val="E6E8FA"/>
+          </a:solidFill>
+          <a:ln w="12700">
+            <a:solidFill>
+              <a:srgbClr val="3542B8"/>
+            </a:solidFill>
+          </a:ln>
+          <a:effectLst/>
+        </p:spPr>
+        <p:style>
+          <a:lnRef idx="1">
+            <a:schemeClr val="accent1"/>
+          </a:lnRef>
+          <a:fillRef idx="3">
+            <a:schemeClr val="accent1"/>
+          </a:fillRef>
+          <a:effectRef idx="2">
+            <a:schemeClr val="accent1"/>
+          </a:effectRef>
+          <a:fontRef idx="minor">
+            <a:schemeClr val="lt1"/>
+          </a:fontRef>
+        </p:style>
+        <p:txBody>
+          <a:bodyPr rtlCol="0" anchor="ctr" lIns="54864" rIns="54864" tIns="0" bIns="0"/>
+          <a:lstStyle/>
+          <a:p>
+            <a:pPr algn="ctr">
+              <a:spcAft>
+                <a:spcPts val="0"/>
+              </a:spcAft>
+            </a:pPr>
+            <a:r>
+              <a:rPr sz="1400" b="1">
+                <a:solidFill>
+                  <a:srgbClr val="3542B8"/>
+                </a:solidFill>
+                <a:latin typeface="Consolas"/>
+              </a:rPr>
+              <a:t>2</a:t>
+            </a:r>
+          </a:p>
+        </p:txBody>
+      </p:sp>
+      <p:sp>
+        <p:nvSpPr>
+          <p:cNvPr id="8" name="Rounded Rectangle 7"/>
+          <p:cNvSpPr/>
+          <p:nvPr/>
+        </p:nvSpPr>
+        <p:spPr>
+          <a:xfrm>
+            <a:off x="2459736" y="5095036"/>
+            <a:ext cx="144475" cy="274320"/>
+          </a:xfrm>
+          <a:prstGeom prst="roundRect">
+            <a:avLst>
+              <a:gd name="adj" fmla="val 35000"/>
+            </a:avLst>
+          </a:prstGeom>
+          <a:solidFill>
+            <a:srgbClr val="E6E8FA"/>
+          </a:solidFill>
+          <a:ln w="12700">
+            <a:solidFill>
+              <a:srgbClr val="3542B8"/>
+            </a:solidFill>
+          </a:ln>
+          <a:effectLst/>
+        </p:spPr>
+        <p:style>
+          <a:lnRef idx="1">
+            <a:schemeClr val="accent1"/>
+          </a:lnRef>
+          <a:fillRef idx="3">
+            <a:schemeClr val="accent1"/>
+          </a:fillRef>
+          <a:effectRef idx="2">
+            <a:schemeClr val="accent1"/>
+          </a:effectRef>
+          <a:fontRef idx="minor">
+            <a:schemeClr val="lt1"/>
+          </a:fontRef>
+        </p:style>
+        <p:txBody>
+          <a:bodyPr rtlCol="0" anchor="ctr" lIns="54864" rIns="54864" tIns="0" bIns="0"/>
+          <a:lstStyle/>
+          <a:p>
+            <a:pPr algn="ctr">
+              <a:spcAft>
+                <a:spcPts val="0"/>
+              </a:spcAft>
+            </a:pPr>
+            <a:r>
+              <a:rPr sz="1400" b="1">
+                <a:solidFill>
+                  <a:srgbClr val="3542B8"/>
+                </a:solidFill>
+                <a:latin typeface="Consolas"/>
+              </a:rPr>
+              <a:t>3</a:t>
+            </a:r>
+          </a:p>
+        </p:txBody>
+      </p:sp>
+      <p:sp>
+        <p:nvSpPr>
+          <p:cNvPr id="9" name="Rounded Rectangle 8"/>
+          <p:cNvSpPr/>
+          <p:nvPr/>
+        </p:nvSpPr>
+        <p:spPr>
+          <a:xfrm>
+            <a:off x="2333548" y="2991916"/>
+            <a:ext cx="144475" cy="274320"/>
+          </a:xfrm>
+          <a:prstGeom prst="roundRect">
+            <a:avLst>
+              <a:gd name="adj" fmla="val 35000"/>
+            </a:avLst>
+          </a:prstGeom>
+          <a:solidFill>
+            <a:srgbClr val="E6E8FA"/>
+          </a:solidFill>
+          <a:ln w="12700">
+            <a:solidFill>
+              <a:srgbClr val="3542B8"/>
+            </a:solidFill>
+          </a:ln>
+          <a:effectLst/>
+        </p:spPr>
+        <p:style>
+          <a:lnRef idx="1">
+            <a:schemeClr val="accent1"/>
+          </a:lnRef>
+          <a:fillRef idx="3">
+            <a:schemeClr val="accent1"/>
+          </a:fillRef>
+          <a:effectRef idx="2">
+            <a:schemeClr val="accent1"/>
+          </a:effectRef>
+          <a:fontRef idx="minor">
+            <a:schemeClr val="lt1"/>
+          </a:fontRef>
+        </p:style>
+        <p:txBody>
+          <a:bodyPr rtlCol="0" anchor="ctr" lIns="54864" rIns="54864" tIns="0" bIns="0"/>
+          <a:lstStyle/>
+          <a:p>
+            <a:pPr algn="ctr">
+              <a:spcAft>
+                <a:spcPts val="0"/>
+              </a:spcAft>
+            </a:pPr>
+            <a:r>
+              <a:rPr sz="1400" b="1">
+                <a:solidFill>
+                  <a:srgbClr val="3542B8"/>
+                </a:solidFill>
+                <a:latin typeface="Consolas"/>
+              </a:rPr>
+              <a:t>4</a:t>
+            </a:r>
+          </a:p>
+        </p:txBody>
+      </p:sp>
+      <p:sp>
+        <p:nvSpPr>
+          <p:cNvPr id="10" name="TextBox 9"/>
+          <p:cNvSpPr txBox="1"/>
+          <p:nvPr/>
+        </p:nvSpPr>
+        <p:spPr>
+          <a:xfrm>
+            <a:off x="7086600" y="2084831"/>
+            <a:ext cx="4535424" cy="2267712"/>
+          </a:xfrm>
+          <a:prstGeom prst="rect">
+            <a:avLst/>
+          </a:prstGeom>
+          <a:noFill/>
+        </p:spPr>
+        <p:txBody>
+          <a:bodyPr wrap="square" lIns="0" rIns="0" tIns="0" bIns="0">
+            <a:spAutoFit/>
+          </a:bodyPr>
+          <a:lstStyle/>
+          <a:p>
+            <a:pPr>
+              <a:spcAft>
+                <a:spcPts val="100"/>
+              </a:spcAft>
+            </a:pPr>
+            <a:r>
+              <a:rPr sz="1800" b="1">
+                <a:solidFill>
+                  <a:srgbClr val="3542B8"/>
+                </a:solidFill>
+                <a:latin typeface="Consolas"/>
+              </a:rPr>
+              <a:t>1 · st.radio</a:t>
+            </a:r>
+          </a:p>
+          <a:p>
+            <a:pPr>
+              <a:lnSpc>
+                <a:spcPct val="100000"/>
+              </a:lnSpc>
+              <a:spcAft>
+                <a:spcPts val="400"/>
+              </a:spcAft>
+            </a:pPr>
+            <a:r>
+              <a:rPr sz="1800" b="0">
+                <a:solidFill>
+                  <a:srgbClr val="49525F"/>
+                </a:solidFill>
+                <a:latin typeface="Calibri"/>
+              </a:rPr>
+              <a:t>cambia de tema desde PALETAS</a:t>
+            </a:r>
+          </a:p>
+          <a:p>
+            <a:pPr>
+              <a:spcAft>
+                <a:spcPts val="100"/>
+              </a:spcAft>
+            </a:pPr>
+            <a:r>
+              <a:rPr sz="1800" b="1">
+                <a:solidFill>
+                  <a:srgbClr val="3542B8"/>
+                </a:solidFill>
+                <a:latin typeface="Consolas"/>
+              </a:rPr>
+              <a:t>2 · st.number_input</a:t>
+            </a:r>
+          </a:p>
+          <a:p>
+            <a:pPr>
+              <a:lnSpc>
+                <a:spcPct val="100000"/>
+              </a:lnSpc>
+              <a:spcAft>
+                <a:spcPts val="400"/>
+              </a:spcAft>
+            </a:pPr>
+            <a:r>
+              <a:rPr sz="1800" b="0">
+                <a:solidFill>
+                  <a:srgbClr val="49525F"/>
+                </a:solidFill>
+                <a:latin typeface="Calibri"/>
+              </a:rPr>
+              <a:t>una por variable numérica</a:t>
+            </a:r>
+          </a:p>
+          <a:p>
+            <a:pPr>
+              <a:spcAft>
+                <a:spcPts val="100"/>
+              </a:spcAft>
+            </a:pPr>
+            <a:r>
+              <a:rPr sz="1800" b="1">
+                <a:solidFill>
+                  <a:srgbClr val="3542B8"/>
+                </a:solidFill>
+                <a:latin typeface="Consolas"/>
+              </a:rPr>
+              <a:t>3 · st.selectbox</a:t>
+            </a:r>
+          </a:p>
+          <a:p>
+            <a:pPr>
+              <a:lnSpc>
+                <a:spcPct val="100000"/>
+              </a:lnSpc>
+              <a:spcAft>
+                <a:spcPts val="400"/>
+              </a:spcAft>
+            </a:pPr>
+            <a:r>
+              <a:rPr sz="1800" b="0">
+                <a:solidFill>
+                  <a:srgbClr val="49525F"/>
+                </a:solidFill>
+                <a:latin typeface="Calibri"/>
+              </a:rPr>
+              <a:t>una por variable categórica</a:t>
+            </a:r>
+          </a:p>
+          <a:p>
+            <a:pPr>
+              <a:spcAft>
+                <a:spcPts val="100"/>
+              </a:spcAft>
+            </a:pPr>
+            <a:r>
+              <a:rPr sz="1800" b="1">
+                <a:solidFill>
+                  <a:srgbClr val="3542B8"/>
+                </a:solidFill>
+                <a:latin typeface="Consolas"/>
+              </a:rPr>
+              <a:t>4 · st.expander · st.popover</a:t>
+            </a:r>
+          </a:p>
+          <a:p>
+            <a:pPr>
+              <a:lnSpc>
+                <a:spcPct val="100000"/>
+              </a:lnSpc>
+              <a:spcAft>
+                <a:spcPts val="400"/>
+              </a:spcAft>
+            </a:pPr>
+            <a:r>
+              <a:rPr sz="1800" b="0">
+                <a:solidFill>
+                  <a:srgbClr val="49525F"/>
+                </a:solidFill>
+                <a:latin typeface="Calibri"/>
+              </a:rPr>
+              <a:t>lectura llana y lectura técnica</a:t>
+            </a:r>
+          </a:p>
+        </p:txBody>
+      </p:sp>
+      <p:sp>
+        <p:nvSpPr>
+          <p:cNvPr id="11" name="Rounded Rectangle 10"/>
+          <p:cNvSpPr/>
+          <p:nvPr/>
+        </p:nvSpPr>
+        <p:spPr>
+          <a:xfrm>
+            <a:off x="7086600" y="4626864"/>
+            <a:ext cx="4535424" cy="1668948"/>
+          </a:xfrm>
+          <a:prstGeom prst="roundRect">
+            <a:avLst>
+              <a:gd name="adj" fmla="val 5000"/>
+            </a:avLst>
+          </a:prstGeom>
+          <a:solidFill>
+            <a:srgbClr val="E6E8FA"/>
+          </a:solidFill>
+          <a:ln w="15875">
+            <a:solidFill>
+              <a:srgbClr val="4353CC"/>
+            </a:solidFill>
+          </a:ln>
+          <a:effectLst/>
+        </p:spPr>
+        <p:style>
+          <a:lnRef idx="1">
+            <a:schemeClr val="accent1"/>
+          </a:lnRef>
+          <a:fillRef idx="3">
+            <a:schemeClr val="accent1"/>
+          </a:fillRef>
+          <a:effectRef idx="2">
+            <a:schemeClr val="accent1"/>
+          </a:effectRef>
+          <a:fontRef idx="minor">
+            <a:schemeClr val="lt1"/>
+          </a:fontRef>
+        </p:style>
+        <p:txBody>
+          <a:bodyPr rtlCol="0" anchor="t" wrap="square" lIns="182880" rIns="182880" tIns="128016" bIns="128016"/>
+          <a:lstStyle/>
+          <a:p>
+            <a:pPr algn="ctr"/>
+          </a:p>
+        </p:txBody>
+      </p:sp>
+      <p:sp>
+        <p:nvSpPr>
+          <p:cNvPr id="12" name="TextBox 11"/>
+          <p:cNvSpPr txBox="1"/>
+          <p:nvPr/>
+        </p:nvSpPr>
+        <p:spPr>
+          <a:xfrm>
+            <a:off x="7269480" y="4754879"/>
+            <a:ext cx="4206240" cy="292608"/>
+          </a:xfrm>
+          <a:prstGeom prst="rect">
+            <a:avLst/>
+          </a:prstGeom>
+          <a:noFill/>
+        </p:spPr>
+        <p:txBody>
+          <a:bodyPr wrap="square" lIns="0" rIns="0" tIns="0" bIns="0">
+            <a:spAutoFit/>
+          </a:bodyPr>
+          <a:lstStyle/>
+          <a:p>
+            <a:pPr>
+              <a:spcAft>
+                <a:spcPts val="0"/>
+              </a:spcAft>
+            </a:pPr>
+            <a:r>
+              <a:rPr sz="1800" b="1">
+                <a:solidFill>
+                  <a:srgbClr val="3542B8"/>
+                </a:solidFill>
+                <a:latin typeface="Consolas"/>
+              </a:rPr>
+              <a:t>5 · st.slider + st.fragment</a:t>
+            </a:r>
+          </a:p>
+        </p:txBody>
+      </p:sp>
+      <p:pic>
+        <p:nvPicPr>
+          <p:cNvPr id="13" name="Picture 12" descr="cloud_umbral_control_pulida.png"/>
+          <p:cNvPicPr>
+            <a:picLocks noChangeAspect="1"/>
+          </p:cNvPicPr>
+          <p:nvPr/>
+        </p:nvPicPr>
+        <p:blipFill>
+          <a:blip r:embed="rId3"/>
+          <a:stretch>
+            <a:fillRect/>
+          </a:stretch>
+        </p:blipFill>
+        <p:spPr>
+          <a:xfrm>
+            <a:off x="7242048" y="5102352"/>
+            <a:ext cx="4224528" cy="974004"/>
+          </a:xfrm>
+          <a:prstGeom prst="rect">
+            <a:avLst/>
+          </a:prstGeom>
+        </p:spPr>
+      </p:pic>
+      <p:sp>
+        <p:nvSpPr>
+          <p:cNvPr id="14" name="Rounded Rectangle 13"/>
+          <p:cNvSpPr/>
+          <p:nvPr/>
+        </p:nvSpPr>
+        <p:spPr>
+          <a:xfrm>
+            <a:off x="10030236" y="5530913"/>
+            <a:ext cx="144475" cy="274320"/>
+          </a:xfrm>
+          <a:prstGeom prst="roundRect">
+            <a:avLst>
+              <a:gd name="adj" fmla="val 35000"/>
+            </a:avLst>
+          </a:prstGeom>
+          <a:solidFill>
+            <a:srgbClr val="E6E8FA"/>
+          </a:solidFill>
+          <a:ln w="12700">
+            <a:solidFill>
+              <a:srgbClr val="3542B8"/>
+            </a:solidFill>
+          </a:ln>
+          <a:effectLst/>
+        </p:spPr>
+        <p:style>
+          <a:lnRef idx="1">
+            <a:schemeClr val="accent1"/>
+          </a:lnRef>
+          <a:fillRef idx="3">
+            <a:schemeClr val="accent1"/>
+          </a:fillRef>
+          <a:effectRef idx="2">
+            <a:schemeClr val="accent1"/>
+          </a:effectRef>
+          <a:fontRef idx="minor">
+            <a:schemeClr val="lt1"/>
+          </a:fontRef>
+        </p:style>
+        <p:txBody>
+          <a:bodyPr rtlCol="0" anchor="ctr" lIns="54864" rIns="54864" tIns="0" bIns="0"/>
+          <a:lstStyle/>
+          <a:p>
+            <a:pPr algn="ctr">
+              <a:spcAft>
+                <a:spcPts val="0"/>
+              </a:spcAft>
+            </a:pPr>
+            <a:r>
+              <a:rPr sz="1400" b="1">
+                <a:solidFill>
+                  <a:srgbClr val="3542B8"/>
+                </a:solidFill>
+                <a:latin typeface="Consolas"/>
+              </a:rPr>
+              <a:t>5</a:t>
+            </a:r>
+          </a:p>
+        </p:txBody>
+      </p:sp>
+      <p:sp>
+        <p:nvSpPr>
+          <p:cNvPr id="15" name="TextBox 14"/>
+          <p:cNvSpPr txBox="1"/>
+          <p:nvPr/>
+        </p:nvSpPr>
+        <p:spPr>
+          <a:xfrm>
+            <a:off x="566928" y="6419088"/>
+            <a:ext cx="11057839" cy="310896"/>
+          </a:xfrm>
+          <a:prstGeom prst="rect">
+            <a:avLst/>
+          </a:prstGeom>
+          <a:noFill/>
+        </p:spPr>
+        <p:txBody>
+          <a:bodyPr wrap="square" lIns="0" rIns="0" tIns="0" bIns="0">
+            <a:spAutoFit/>
+          </a:bodyPr>
+          <a:lstStyle/>
+          <a:p>
+            <a:pPr>
+              <a:spcAft>
+                <a:spcPts val="0"/>
+              </a:spcAft>
+            </a:pPr>
+            <a:r>
+              <a:rPr sz="1200" b="0">
+                <a:solidFill>
+                  <a:srgbClr val="5F6875"/>
+                </a:solidFill>
+                <a:latin typeface="Calibri"/>
+              </a:rPr>
+              <a:t>Fuente: captura de la app desplegada · app/streamlit_app.py (componentes realmente usados) · models/feature_schema.json</a:t>
+            </a:r>
+          </a:p>
+        </p:txBody>
+      </p:sp>
+    </p:spTree>
+  </p:cSld>
+  <p:clrMapOvr>
+    <a:masterClrMapping/>
+  </p:clrMapOvr>
+</p:sld>
+</file>
+
+<file path=ppt/slides/slide8.xml><?xml version="1.0" encoding="utf-8"?>
+<p:sld xmlns:a="http://schemas.openxmlformats.org/drawingml/2006/main" xmlns:p="http://schemas.openxmlformats.org/presentationml/2006/main" xmlns:r="http://schemas.openxmlformats.org/officeDocument/2006/relationships">
+  <p:cSld>
+    <p:bg>
+      <p:bgPr>
+        <a:solidFill>
+          <a:srgbClr val="F7F5F0"/>
+        </a:solidFill>
+        <a:effectLst/>
+      </p:bgPr>
+    </p:bg>
+    <p:spTree>
+      <p:nvGrpSpPr>
+        <p:cNvPr id="1" name=""/>
+        <p:cNvGrpSpPr/>
+        <p:nvPr/>
+      </p:nvGrpSpPr>
+      <p:grpSpPr/>
+      <p:sp>
+        <p:nvSpPr>
+          <p:cNvPr id="2" name="Rectangle 1"/>
+          <p:cNvSpPr/>
+          <p:nvPr/>
+        </p:nvSpPr>
+        <p:spPr>
+          <a:xfrm>
+            <a:off x="0" y="0"/>
+            <a:ext cx="12191695" cy="64008"/>
+          </a:xfrm>
+          <a:prstGeom prst="rect">
+            <a:avLst/>
+          </a:prstGeom>
+          <a:solidFill>
+            <a:srgbClr val="4353CC"/>
+          </a:solidFill>
+          <a:ln>
+            <a:noFill/>
+          </a:ln>
+          <a:effectLst/>
+        </p:spPr>
+        <p:style>
+          <a:lnRef idx="1">
+            <a:schemeClr val="accent1"/>
+          </a:lnRef>
+          <a:fillRef idx="3">
+            <a:schemeClr val="accent1"/>
+          </a:fillRef>
+          <a:effectRef idx="2">
+            <a:schemeClr val="accent1"/>
+          </a:effectRef>
+          <a:fontRef idx="minor">
+            <a:schemeClr val="lt1"/>
+          </a:fontRef>
+        </p:style>
+        <p:txBody>
+          <a:bodyPr rtlCol="0" anchor="ctr"/>
+          <a:lstStyle/>
+          <a:p>
+            <a:pPr algn="ctr"/>
+          </a:p>
+        </p:txBody>
+      </p:sp>
+      <p:sp>
+        <p:nvSpPr>
+          <p:cNvPr id="3" name="TextBox 2"/>
+          <p:cNvSpPr txBox="1"/>
+          <p:nvPr/>
+        </p:nvSpPr>
+        <p:spPr>
+          <a:xfrm>
+            <a:off x="566928" y="384048"/>
+            <a:ext cx="11057839" cy="969264"/>
+          </a:xfrm>
+          <a:prstGeom prst="rect">
+            <a:avLst/>
+          </a:prstGeom>
+          <a:noFill/>
+        </p:spPr>
+        <p:txBody>
+          <a:bodyPr wrap="square" lIns="0" rIns="0" tIns="0" bIns="0">
+            <a:spAutoFit/>
+          </a:bodyPr>
+          <a:lstStyle/>
+          <a:p>
+            <a:pPr>
+              <a:lnSpc>
+                <a:spcPct val="92000"/>
+              </a:lnSpc>
+              <a:spcAft>
+                <a:spcPts val="0"/>
+              </a:spcAft>
+            </a:pPr>
+            <a:r>
+              <a:rPr sz="3600" b="1">
+                <a:solidFill>
+                  <a:srgbClr val="1E232B"/>
+                </a:solidFill>
+                <a:latin typeface="Calibri"/>
+              </a:rPr>
+              <a:t>Lo que se publica lleva tests, cifras verificadas y medición sobre la app viva</a:t>
+            </a:r>
+          </a:p>
+        </p:txBody>
+      </p:sp>
+      <p:sp>
+        <p:nvSpPr>
+          <p:cNvPr id="4" name="TextBox 3"/>
+          <p:cNvSpPr txBox="1"/>
+          <p:nvPr/>
+        </p:nvSpPr>
+        <p:spPr>
+          <a:xfrm>
+            <a:off x="566928" y="1408176"/>
+            <a:ext cx="10881360" cy="603504"/>
+          </a:xfrm>
+          <a:prstGeom prst="rect">
+            <a:avLst/>
+          </a:prstGeom>
+          <a:noFill/>
+        </p:spPr>
+        <p:txBody>
+          <a:bodyPr wrap="square" lIns="0" rIns="0" tIns="0" bIns="0">
+            <a:spAutoFit/>
+          </a:bodyPr>
+          <a:lstStyle/>
+          <a:p>
+            <a:pPr>
+              <a:lnSpc>
+                <a:spcPct val="102000"/>
+              </a:lnSpc>
+              <a:spcAft>
+                <a:spcPts val="0"/>
+              </a:spcAft>
+            </a:pPr>
+            <a:r>
+              <a:rPr sz="2000" b="0">
+                <a:solidFill>
+                  <a:srgbClr val="49525F"/>
+                </a:solidFill>
+                <a:latin typeface="Calibri"/>
+              </a:rPr>
+              <a:t>Tres controles rodean cada entrega: que la app y los archivos del modelo digan lo mismo, que cada cifra salga de su archivo, y qué se ve de verdad en la app.</a:t>
             </a:r>
           </a:p>
         </p:txBody>
@@ -9353,7 +11093,7 @@
                           </a:solidFill>
                           <a:latin typeface="Calibri"/>
                         </a:rPr>
-                        <a:t>Commits firmados</a:t>
+                        <a:t>Cifras verificadas</a:t>
                       </a:r>
                     </a:p>
                   </a:txBody>
@@ -9375,7 +11115,7 @@
                           </a:solidFill>
                           <a:latin typeface="Calibri"/>
                         </a:rPr>
-                        <a:t>Cada versión publicada lleva la firma SSH del autor: se sabe quién publicó qué.</a:t>
+                        <a:t>Cada número de estas láminas se comprueba contra el archivo que lo genera; si una cifra no tiene fuente, la exposición no se genera.</a:t>
                       </a:r>
                     </a:p>
                   </a:txBody>
@@ -9397,7 +11137,7 @@
                           </a:solidFill>
                           <a:latin typeface="Calibri"/>
                         </a:rPr>
-                        <a:t>git log --show-signature</a:t>
+                        <a:t>verificar_ppt.py</a:t>
                       </a:r>
                     </a:p>
                   </a:txBody>
@@ -9632,7 +11372,7 @@
                 </a:solidFill>
                 <a:latin typeface="Calibri"/>
               </a:rPr>
-              <a:t>Fuente: tests/test_contratos.py · git log --show-signature · docs/POST_ENTREGA.md (estándares de la corrida de entrega)</a:t>
+              <a:t>Fuente: tests/test_contratos.py · docs/presentacion/verificar_ppt.py · docs/POST_ENTREGA.md (estándares de la corrida de entrega)</a:t>
             </a:r>
           </a:p>
         </p:txBody>
@@ -9645,7 +11385,7 @@
 </p:sld>
 </file>
 
-<file path=ppt/slides/slide8.xml><?xml version="1.0" encoding="utf-8"?>
+<file path=ppt/slides/slide9.xml><?xml version="1.0" encoding="utf-8"?>
 <p:sld xmlns:a="http://schemas.openxmlformats.org/drawingml/2006/main" xmlns:p="http://schemas.openxmlformats.org/presentationml/2006/main" xmlns:r="http://schemas.openxmlformats.org/officeDocument/2006/relationships">
   <p:cSld>
     <p:bg>
@@ -10267,7 +12007,7 @@
         </p:nvSpPr>
         <p:spPr>
           <a:xfrm>
-            <a:off x="566928" y="5596127"/>
+            <a:off x="566928" y="5413248"/>
             <a:ext cx="11055096" cy="822960"/>
           </a:xfrm>
           <a:prstGeom prst="roundRect">
@@ -10358,582 +12098,6 @@
                 <a:latin typeface="Calibri"/>
               </a:rPr>
               <a:t>Fuente: models/ui_artifacts.json (torneo.tabla, clasificador.comparacion) · models/feature_schema.json · src/04, src/06</a:t>
-            </a:r>
-          </a:p>
-        </p:txBody>
-      </p:sp>
-    </p:spTree>
-  </p:cSld>
-  <p:clrMapOvr>
-    <a:masterClrMapping/>
-  </p:clrMapOvr>
-</p:sld>
-</file>
-
-<file path=ppt/slides/slide9.xml><?xml version="1.0" encoding="utf-8"?>
-<p:sld xmlns:a="http://schemas.openxmlformats.org/drawingml/2006/main" xmlns:p="http://schemas.openxmlformats.org/presentationml/2006/main" xmlns:r="http://schemas.openxmlformats.org/officeDocument/2006/relationships">
-  <p:cSld>
-    <p:bg>
-      <p:bgPr>
-        <a:solidFill>
-          <a:srgbClr val="F7F5F0"/>
-        </a:solidFill>
-        <a:effectLst/>
-      </p:bgPr>
-    </p:bg>
-    <p:spTree>
-      <p:nvGrpSpPr>
-        <p:cNvPr id="1" name=""/>
-        <p:cNvGrpSpPr/>
-        <p:nvPr/>
-      </p:nvGrpSpPr>
-      <p:grpSpPr/>
-      <p:sp>
-        <p:nvSpPr>
-          <p:cNvPr id="2" name="Rectangle 1"/>
-          <p:cNvSpPr/>
-          <p:nvPr/>
-        </p:nvSpPr>
-        <p:spPr>
-          <a:xfrm>
-            <a:off x="0" y="0"/>
-            <a:ext cx="12191695" cy="64008"/>
-          </a:xfrm>
-          <a:prstGeom prst="rect">
-            <a:avLst/>
-          </a:prstGeom>
-          <a:solidFill>
-            <a:srgbClr val="4353CC"/>
-          </a:solidFill>
-          <a:ln>
-            <a:noFill/>
-          </a:ln>
-          <a:effectLst/>
-        </p:spPr>
-        <p:style>
-          <a:lnRef idx="1">
-            <a:schemeClr val="accent1"/>
-          </a:lnRef>
-          <a:fillRef idx="3">
-            <a:schemeClr val="accent1"/>
-          </a:fillRef>
-          <a:effectRef idx="2">
-            <a:schemeClr val="accent1"/>
-          </a:effectRef>
-          <a:fontRef idx="minor">
-            <a:schemeClr val="lt1"/>
-          </a:fontRef>
-        </p:style>
-        <p:txBody>
-          <a:bodyPr rtlCol="0" anchor="ctr"/>
-          <a:lstStyle/>
-          <a:p>
-            <a:pPr algn="ctr"/>
-          </a:p>
-        </p:txBody>
-      </p:sp>
-      <p:sp>
-        <p:nvSpPr>
-          <p:cNvPr id="3" name="TextBox 2"/>
-          <p:cNvSpPr txBox="1"/>
-          <p:nvPr/>
-        </p:nvSpPr>
-        <p:spPr>
-          <a:xfrm>
-            <a:off x="566928" y="384048"/>
-            <a:ext cx="11057839" cy="969264"/>
-          </a:xfrm>
-          <a:prstGeom prst="rect">
-            <a:avLst/>
-          </a:prstGeom>
-          <a:noFill/>
-        </p:spPr>
-        <p:txBody>
-          <a:bodyPr wrap="square" lIns="0" rIns="0" tIns="0" bIns="0">
-            <a:spAutoFit/>
-          </a:bodyPr>
-          <a:lstStyle/>
-          <a:p>
-            <a:pPr>
-              <a:lnSpc>
-                <a:spcPct val="92000"/>
-              </a:lnSpc>
-              <a:spcAft>
-                <a:spcPts val="0"/>
-              </a:spcAft>
-            </a:pPr>
-            <a:r>
-              <a:rPr sz="3600" b="1">
-                <a:solidFill>
-                  <a:srgbClr val="1E232B"/>
-                </a:solidFill>
-                <a:latin typeface="Calibri"/>
-              </a:rPr>
-              <a:t>Las mismas tres variables cargan los dos modelos: categoría, educación y tamaño de empresa</a:t>
-            </a:r>
-          </a:p>
-        </p:txBody>
-      </p:sp>
-      <p:sp>
-        <p:nvSpPr>
-          <p:cNvPr id="4" name="TextBox 3"/>
-          <p:cNvSpPr txBox="1"/>
-          <p:nvPr/>
-        </p:nvSpPr>
-        <p:spPr>
-          <a:xfrm>
-            <a:off x="566928" y="1408176"/>
-            <a:ext cx="10881360" cy="603504"/>
-          </a:xfrm>
-          <a:prstGeom prst="rect">
-            <a:avLst/>
-          </a:prstGeom>
-          <a:noFill/>
-        </p:spPr>
-        <p:txBody>
-          <a:bodyPr wrap="square" lIns="0" rIns="0" tIns="0" bIns="0">
-            <a:spAutoFit/>
-          </a:bodyPr>
-          <a:lstStyle/>
-          <a:p>
-            <a:pPr>
-              <a:lnSpc>
-                <a:spcPct val="102000"/>
-              </a:lnSpc>
-              <a:spcAft>
-                <a:spcPts val="0"/>
-              </a:spcAft>
-            </a:pPr>
-            <a:r>
-              <a:rPr sz="2000" b="0">
-                <a:solidFill>
-                  <a:srgbClr val="49525F"/>
-                </a:solidFill>
-                <a:latin typeface="Calibri"/>
-              </a:rPr>
-              <a:t>Con cada modelo ya entrenado, desordenamos una columna a la vez y medimos cuánto empeora: soles de error en el regresor, puntos de PR-AUC en el clasificador. Uso, no causa.</a:t>
-            </a:r>
-          </a:p>
-        </p:txBody>
-      </p:sp>
-      <p:pic>
-        <p:nvPicPr>
-          <p:cNvPr id="5" name="Picture 4" descr="fig_importancia.png"/>
-          <p:cNvPicPr>
-            <a:picLocks noChangeAspect="1"/>
-          </p:cNvPicPr>
-          <p:nvPr/>
-        </p:nvPicPr>
-        <p:blipFill>
-          <a:blip r:embed="rId2"/>
-          <a:stretch>
-            <a:fillRect/>
-          </a:stretch>
-        </p:blipFill>
-        <p:spPr>
-          <a:xfrm>
-            <a:off x="566928" y="2240966"/>
-            <a:ext cx="7315200" cy="3811674"/>
-          </a:xfrm>
-          <a:prstGeom prst="rect">
-            <a:avLst/>
-          </a:prstGeom>
-        </p:spPr>
-      </p:pic>
-      <p:sp>
-        <p:nvSpPr>
-          <p:cNvPr id="6" name="Rounded Rectangle 5"/>
-          <p:cNvSpPr/>
-          <p:nvPr/>
-        </p:nvSpPr>
-        <p:spPr>
-          <a:xfrm>
-            <a:off x="8101583" y="2112263"/>
-            <a:ext cx="3520440" cy="1261872"/>
-          </a:xfrm>
-          <a:prstGeom prst="roundRect">
-            <a:avLst>
-              <a:gd name="adj" fmla="val 5000"/>
-            </a:avLst>
-          </a:prstGeom>
-          <a:solidFill>
-            <a:srgbClr val="FCFBF8"/>
-          </a:solidFill>
-          <a:ln w="15875">
-            <a:solidFill>
-              <a:srgbClr val="D5D1C6"/>
-            </a:solidFill>
-          </a:ln>
-          <a:effectLst/>
-        </p:spPr>
-        <p:style>
-          <a:lnRef idx="1">
-            <a:schemeClr val="accent1"/>
-          </a:lnRef>
-          <a:fillRef idx="3">
-            <a:schemeClr val="accent1"/>
-          </a:fillRef>
-          <a:effectRef idx="2">
-            <a:schemeClr val="accent1"/>
-          </a:effectRef>
-          <a:fontRef idx="minor">
-            <a:schemeClr val="lt1"/>
-          </a:fontRef>
-        </p:style>
-        <p:txBody>
-          <a:bodyPr rtlCol="0" anchor="t" wrap="square" lIns="182880" rIns="182880" tIns="128016" bIns="128016"/>
-          <a:lstStyle/>
-          <a:p>
-            <a:pPr algn="ctr">
-              <a:spcAft>
-                <a:spcPts val="400"/>
-              </a:spcAft>
-            </a:pPr>
-            <a:r>
-              <a:rPr sz="1400" b="0">
-                <a:solidFill>
-                  <a:srgbClr val="5F6875"/>
-                </a:solidFill>
-                <a:latin typeface="Consolas"/>
-              </a:rPr>
-              <a:t>CATEGORÍA OCUPACIONAL</a:t>
-            </a:r>
-          </a:p>
-          <a:p>
-            <a:pPr>
-              <a:lnSpc>
-                <a:spcPct val="95000"/>
-              </a:lnSpc>
-              <a:spcAft>
-                <a:spcPts val="600"/>
-              </a:spcAft>
-            </a:pPr>
-            <a:r>
-              <a:rPr sz="3000" b="1">
-                <a:solidFill>
-                  <a:srgbClr val="4353CC"/>
-                </a:solidFill>
-                <a:latin typeface="Consolas"/>
-              </a:rPr>
-              <a:t>S/ 139</a:t>
-            </a:r>
-          </a:p>
-          <a:p>
-            <a:pPr>
-              <a:lnSpc>
-                <a:spcPct val="105000"/>
-              </a:lnSpc>
-              <a:spcAft>
-                <a:spcPts val="0"/>
-              </a:spcAft>
-            </a:pPr>
-            <a:r>
-              <a:rPr sz="1800" b="0">
-                <a:solidFill>
-                  <a:srgbClr val="49525F"/>
-                </a:solidFill>
-                <a:latin typeface="Calibri"/>
-              </a:rPr>
-              <a:t>Soles de error si se pierde.</a:t>
-            </a:r>
-          </a:p>
-        </p:txBody>
-      </p:sp>
-      <p:sp>
-        <p:nvSpPr>
-          <p:cNvPr id="7" name="Rounded Rectangle 6"/>
-          <p:cNvSpPr/>
-          <p:nvPr/>
-        </p:nvSpPr>
-        <p:spPr>
-          <a:xfrm>
-            <a:off x="8101583" y="3465576"/>
-            <a:ext cx="3520440" cy="1261872"/>
-          </a:xfrm>
-          <a:prstGeom prst="roundRect">
-            <a:avLst>
-              <a:gd name="adj" fmla="val 5000"/>
-            </a:avLst>
-          </a:prstGeom>
-          <a:solidFill>
-            <a:srgbClr val="FCFBF8"/>
-          </a:solidFill>
-          <a:ln w="15875">
-            <a:solidFill>
-              <a:srgbClr val="D5D1C6"/>
-            </a:solidFill>
-          </a:ln>
-          <a:effectLst/>
-        </p:spPr>
-        <p:style>
-          <a:lnRef idx="1">
-            <a:schemeClr val="accent1"/>
-          </a:lnRef>
-          <a:fillRef idx="3">
-            <a:schemeClr val="accent1"/>
-          </a:fillRef>
-          <a:effectRef idx="2">
-            <a:schemeClr val="accent1"/>
-          </a:effectRef>
-          <a:fontRef idx="minor">
-            <a:schemeClr val="lt1"/>
-          </a:fontRef>
-        </p:style>
-        <p:txBody>
-          <a:bodyPr rtlCol="0" anchor="t" wrap="square" lIns="182880" rIns="182880" tIns="128016" bIns="128016"/>
-          <a:lstStyle/>
-          <a:p>
-            <a:pPr algn="ctr">
-              <a:spcAft>
-                <a:spcPts val="400"/>
-              </a:spcAft>
-            </a:pPr>
-            <a:r>
-              <a:rPr sz="1400" b="0">
-                <a:solidFill>
-                  <a:srgbClr val="5F6875"/>
-                </a:solidFill>
-                <a:latin typeface="Consolas"/>
-              </a:rPr>
-              <a:t>AÑOS DE EDUCACIÓN</a:t>
-            </a:r>
-          </a:p>
-          <a:p>
-            <a:pPr>
-              <a:lnSpc>
-                <a:spcPct val="95000"/>
-              </a:lnSpc>
-              <a:spcAft>
-                <a:spcPts val="600"/>
-              </a:spcAft>
-            </a:pPr>
-            <a:r>
-              <a:rPr sz="3000" b="1">
-                <a:solidFill>
-                  <a:srgbClr val="4353CC"/>
-                </a:solidFill>
-                <a:latin typeface="Consolas"/>
-              </a:rPr>
-              <a:t>S/ 128</a:t>
-            </a:r>
-          </a:p>
-          <a:p>
-            <a:pPr>
-              <a:lnSpc>
-                <a:spcPct val="105000"/>
-              </a:lnSpc>
-              <a:spcAft>
-                <a:spcPts val="0"/>
-              </a:spcAft>
-            </a:pPr>
-            <a:r>
-              <a:rPr sz="1800" b="0">
-                <a:solidFill>
-                  <a:srgbClr val="49525F"/>
-                </a:solidFill>
-                <a:latin typeface="Calibri"/>
-              </a:rPr>
-              <a:t>La segunda, mismo cálculo.</a:t>
-            </a:r>
-          </a:p>
-        </p:txBody>
-      </p:sp>
-      <p:sp>
-        <p:nvSpPr>
-          <p:cNvPr id="8" name="Rounded Rectangle 7"/>
-          <p:cNvSpPr/>
-          <p:nvPr/>
-        </p:nvSpPr>
-        <p:spPr>
-          <a:xfrm>
-            <a:off x="8101583" y="4818888"/>
-            <a:ext cx="3520440" cy="1517904"/>
-          </a:xfrm>
-          <a:prstGeom prst="roundRect">
-            <a:avLst>
-              <a:gd name="adj" fmla="val 5000"/>
-            </a:avLst>
-          </a:prstGeom>
-          <a:solidFill>
-            <a:srgbClr val="E6E8FA"/>
-          </a:solidFill>
-          <a:ln w="15875">
-            <a:solidFill>
-              <a:srgbClr val="4353CC"/>
-            </a:solidFill>
-          </a:ln>
-          <a:effectLst/>
-        </p:spPr>
-        <p:style>
-          <a:lnRef idx="1">
-            <a:schemeClr val="accent1"/>
-          </a:lnRef>
-          <a:fillRef idx="3">
-            <a:schemeClr val="accent1"/>
-          </a:fillRef>
-          <a:effectRef idx="2">
-            <a:schemeClr val="accent1"/>
-          </a:effectRef>
-          <a:fontRef idx="minor">
-            <a:schemeClr val="lt1"/>
-          </a:fontRef>
-        </p:style>
-        <p:txBody>
-          <a:bodyPr rtlCol="0" anchor="t" wrap="square" lIns="182880" rIns="182880" tIns="128016" bIns="128016"/>
-          <a:lstStyle/>
-          <a:p>
-            <a:pPr algn="ctr">
-              <a:spcAft>
-                <a:spcPts val="400"/>
-              </a:spcAft>
-            </a:pPr>
-            <a:r>
-              <a:rPr sz="1400" b="0">
-                <a:solidFill>
-                  <a:srgbClr val="3542B8"/>
-                </a:solidFill>
-                <a:latin typeface="Consolas"/>
-              </a:rPr>
-              <a:t>Y EN EL CLASIFICADOR · TOP 3</a:t>
-            </a:r>
-          </a:p>
-          <a:p>
-            <a:pPr>
-              <a:lnSpc>
-                <a:spcPct val="100000"/>
-              </a:lnSpc>
-              <a:spcAft>
-                <a:spcPts val="200"/>
-              </a:spcAft>
-            </a:pPr>
-            <a:r>
-              <a:rPr sz="1800" b="0">
-                <a:solidFill>
-                  <a:srgbClr val="1E232B"/>
-                </a:solidFill>
-                <a:latin typeface="Calibri"/>
-              </a:rPr>
-              <a:t>tamaño de empresa</a:t>
-            </a:r>
-            <a:r>
-              <a:rPr sz="1800" b="1">
-                <a:solidFill>
-                  <a:srgbClr val="3542B8"/>
-                </a:solidFill>
-                <a:latin typeface="Consolas"/>
-              </a:rPr>
-              <a:t>  −0,046</a:t>
-            </a:r>
-          </a:p>
-          <a:p>
-            <a:pPr>
-              <a:lnSpc>
-                <a:spcPct val="100000"/>
-              </a:lnSpc>
-              <a:spcAft>
-                <a:spcPts val="200"/>
-              </a:spcAft>
-            </a:pPr>
-            <a:r>
-              <a:rPr sz="1800" b="0">
-                <a:solidFill>
-                  <a:srgbClr val="1E232B"/>
-                </a:solidFill>
-                <a:latin typeface="Calibri"/>
-              </a:rPr>
-              <a:t>categoría ocupacional</a:t>
-            </a:r>
-            <a:r>
-              <a:rPr sz="1800" b="1">
-                <a:solidFill>
-                  <a:srgbClr val="3542B8"/>
-                </a:solidFill>
-                <a:latin typeface="Consolas"/>
-              </a:rPr>
-              <a:t>  −0,031</a:t>
-            </a:r>
-          </a:p>
-          <a:p>
-            <a:pPr>
-              <a:lnSpc>
-                <a:spcPct val="100000"/>
-              </a:lnSpc>
-              <a:spcAft>
-                <a:spcPts val="200"/>
-              </a:spcAft>
-            </a:pPr>
-            <a:r>
-              <a:rPr sz="1800" b="0">
-                <a:solidFill>
-                  <a:srgbClr val="1E232B"/>
-                </a:solidFill>
-                <a:latin typeface="Calibri"/>
-              </a:rPr>
-              <a:t>años de educación</a:t>
-            </a:r>
-            <a:r>
-              <a:rPr sz="1800" b="1">
-                <a:solidFill>
-                  <a:srgbClr val="3542B8"/>
-                </a:solidFill>
-                <a:latin typeface="Consolas"/>
-              </a:rPr>
-              <a:t>  −0,025</a:t>
-            </a:r>
-          </a:p>
-          <a:p>
-            <a:pPr>
-              <a:spcAft>
-                <a:spcPts val="0"/>
-              </a:spcAft>
-            </a:pPr>
-            <a:r>
-              <a:rPr sz="1400" b="0">
-                <a:solidFill>
-                  <a:srgbClr val="5F6875"/>
-                </a:solidFill>
-                <a:latin typeface="Consolas"/>
-              </a:rPr>
-              <a:t>PUNTOS DE PR-AUC PERDIDOS</a:t>
-            </a:r>
-          </a:p>
-        </p:txBody>
-      </p:sp>
-      <p:sp>
-        <p:nvSpPr>
-          <p:cNvPr id="9" name="TextBox 8"/>
-          <p:cNvSpPr txBox="1"/>
-          <p:nvPr/>
-        </p:nvSpPr>
-        <p:spPr>
-          <a:xfrm>
-            <a:off x="566928" y="6419088"/>
-            <a:ext cx="11057839" cy="310896"/>
-          </a:xfrm>
-          <a:prstGeom prst="rect">
-            <a:avLst/>
-          </a:prstGeom>
-          <a:noFill/>
-        </p:spPr>
-        <p:txBody>
-          <a:bodyPr wrap="square" lIns="0" rIns="0" tIns="0" bIns="0">
-            <a:spAutoFit/>
-          </a:bodyPr>
-          <a:lstStyle/>
-          <a:p>
-            <a:pPr>
-              <a:spcAft>
-                <a:spcPts val="0"/>
-              </a:spcAft>
-            </a:pPr>
-            <a:r>
-              <a:rPr sz="1200" b="0">
-                <a:solidFill>
-                  <a:srgbClr val="5F6875"/>
-                </a:solidFill>
-                <a:latin typeface="Calibri"/>
-              </a:rPr>
-              <a:t>Fuente: models/ui_artifacts.json (importancia_permutacion del regresor y del clasificador): 5 repeticiones sobre 9.000 filas de test en ambos</a:t>
             </a:r>
           </a:p>
         </p:txBody>

--- a/docs/presentacion/ENAHO_exposicion.pptx
+++ b/docs/presentacion/ENAHO_exposicion.pptx
@@ -18,6 +18,7 @@
     <p:sldId id="266" r:id="rId17"/>
     <p:sldId id="267" r:id="rId18"/>
     <p:sldId id="268" r:id="rId19"/>
+    <p:sldId id="269" r:id="rId20"/>
   </p:sldIdLst>
   <p:sldSz cx="12191695" cy="6858000" type="screen4x3"/>
   <p:notesSz cx="6858000" cy="9144000"/>
@@ -750,6 +751,76 @@
 </file>
 
 <file path=ppt/notesSlides/notesSlide13.xml><?xml version="1.0" encoding="utf-8"?>
+<p:notes xmlns:a="http://schemas.openxmlformats.org/drawingml/2006/main" xmlns:p="http://schemas.openxmlformats.org/presentationml/2006/main" xmlns:r="http://schemas.openxmlformats.org/officeDocument/2006/relationships">
+  <p:cSld>
+    <p:spTree>
+      <p:nvGrpSpPr>
+        <p:cNvPr id="1" name=""/>
+        <p:cNvGrpSpPr/>
+        <p:nvPr/>
+      </p:nvGrpSpPr>
+      <p:grpSpPr>
+        <a:xfrm>
+          <a:off x="0" y="0"/>
+          <a:ext cx="0" cy="0"/>
+          <a:chOff x="0" y="0"/>
+          <a:chExt cx="0" cy="0"/>
+        </a:xfrm>
+      </p:grpSpPr>
+      <p:sp>
+        <p:nvSpPr>
+          <p:cNvPr id="2" name="Slide Image Placeholder 1"/>
+          <p:cNvSpPr>
+            <a:spLocks noGrp="1"/>
+          </p:cNvSpPr>
+          <p:nvPr>
+            <p:ph type="sldImg" idx="2"/>
+          </p:nvPr>
+        </p:nvSpPr>
+        <p:spPr/>
+      </p:sp>
+      <p:sp>
+        <p:nvSpPr>
+          <p:cNvPr id="3" name="Notes Placeholder 2"/>
+          <p:cNvSpPr>
+            <a:spLocks noGrp="1"/>
+          </p:cNvSpPr>
+          <p:nvPr>
+            <p:ph type="body" idx="3" sz="quarter"/>
+          </p:nvPr>
+        </p:nvSpPr>
+        <p:spPr/>
+        <p:txBody>
+          <a:bodyPr/>
+          <a:lstStyle/>
+          <a:p>
+            <a:r>
+              <a:t>Fuente: models/feature_schema.json · models/ui_artifacts.json · requirements.txt · tests/test_contratos.py · docs/presentacion/verificar_ppt.py</a:t>
+            </a:r>
+          </a:p>
+        </p:txBody>
+      </p:sp>
+      <p:sp>
+        <p:nvSpPr>
+          <p:cNvPr id="4" name="Slide Number Placeholder 3"/>
+          <p:cNvSpPr>
+            <a:spLocks noGrp="1"/>
+          </p:cNvSpPr>
+          <p:nvPr>
+            <p:ph type="sldNum" idx="5" sz="quarter"/>
+          </p:nvPr>
+        </p:nvSpPr>
+        <p:spPr/>
+      </p:sp>
+    </p:spTree>
+  </p:cSld>
+  <p:clrMapOvr>
+    <a:masterClrMapping/>
+  </p:clrMapOvr>
+</p:notes>
+</file>
+
+<file path=ppt/notesSlides/notesSlide14.xml><?xml version="1.0" encoding="utf-8"?>
 <p:notes xmlns:a="http://schemas.openxmlformats.org/drawingml/2006/main" xmlns:p="http://schemas.openxmlformats.org/presentationml/2006/main" xmlns:r="http://schemas.openxmlformats.org/officeDocument/2006/relationships">
   <p:cSld>
     <p:spTree>
@@ -5026,7 +5097,7 @@
         <p:spPr>
           <a:xfrm>
             <a:off x="8101583" y="2084831"/>
-            <a:ext cx="3520440" cy="1207008"/>
+            <a:ext cx="3520440" cy="1170432"/>
           </a:xfrm>
           <a:prstGeom prst="roundRect">
             <a:avLst>
@@ -5086,7 +5157,7 @@
               </a:spcAft>
             </a:pPr>
             <a:r>
-              <a:rPr sz="3000" b="1">
+              <a:rPr sz="2800" b="1">
                 <a:solidFill>
                   <a:srgbClr val="4353CC"/>
                 </a:solidFill>
@@ -5124,8 +5195,8 @@
         </p:nvSpPr>
         <p:spPr>
           <a:xfrm>
-            <a:off x="8101583" y="3401568"/>
-            <a:ext cx="3520440" cy="1207008"/>
+            <a:off x="8101583" y="3364991"/>
+            <a:ext cx="3520440" cy="1170432"/>
           </a:xfrm>
           <a:prstGeom prst="roundRect">
             <a:avLst>
@@ -5185,7 +5256,7 @@
               </a:spcAft>
             </a:pPr>
             <a:r>
-              <a:rPr sz="3000" b="1">
+              <a:rPr sz="2800" b="1">
                 <a:solidFill>
                   <a:srgbClr val="4353CC"/>
                 </a:solidFill>
@@ -5223,8 +5294,8 @@
         </p:nvSpPr>
         <p:spPr>
           <a:xfrm>
-            <a:off x="8101583" y="4718304"/>
-            <a:ext cx="3520440" cy="1645920"/>
+            <a:off x="8101583" y="4645152"/>
+            <a:ext cx="3520440" cy="1609344"/>
           </a:xfrm>
           <a:prstGeom prst="roundRect">
             <a:avLst>
@@ -5283,7 +5354,7 @@
                 <a:spcPct val="100000"/>
               </a:lnSpc>
               <a:spcAft>
-                <a:spcPts val="500"/>
+                <a:spcPts val="400"/>
               </a:spcAft>
             </a:pPr>
             <a:r>
@@ -5311,7 +5382,7 @@
                 <a:spcPct val="100000"/>
               </a:lnSpc>
               <a:spcAft>
-                <a:spcPts val="500"/>
+                <a:spcPts val="400"/>
               </a:spcAft>
             </a:pPr>
             <a:r>
@@ -5339,7 +5410,7 @@
                 <a:spcPct val="100000"/>
               </a:lnSpc>
               <a:spcAft>
-                <a:spcPts val="500"/>
+                <a:spcPts val="400"/>
               </a:spcAft>
             </a:pPr>
             <a:r>
@@ -6793,6 +6864,726 @@
 </file>
 
 <file path=ppt/slides/slide13.xml><?xml version="1.0" encoding="utf-8"?>
+<p:sld xmlns:a="http://schemas.openxmlformats.org/drawingml/2006/main" xmlns:p="http://schemas.openxmlformats.org/presentationml/2006/main" xmlns:r="http://schemas.openxmlformats.org/officeDocument/2006/relationships">
+  <p:cSld>
+    <p:bg>
+      <p:bgPr>
+        <a:solidFill>
+          <a:srgbClr val="F7F5F0"/>
+        </a:solidFill>
+        <a:effectLst/>
+      </p:bgPr>
+    </p:bg>
+    <p:spTree>
+      <p:nvGrpSpPr>
+        <p:cNvPr id="1" name=""/>
+        <p:cNvGrpSpPr/>
+        <p:nvPr/>
+      </p:nvGrpSpPr>
+      <p:grpSpPr/>
+      <p:sp>
+        <p:nvSpPr>
+          <p:cNvPr id="2" name="Rectangle 1"/>
+          <p:cNvSpPr/>
+          <p:nvPr/>
+        </p:nvSpPr>
+        <p:spPr>
+          <a:xfrm>
+            <a:off x="0" y="0"/>
+            <a:ext cx="12191695" cy="64008"/>
+          </a:xfrm>
+          <a:prstGeom prst="rect">
+            <a:avLst/>
+          </a:prstGeom>
+          <a:solidFill>
+            <a:srgbClr val="4353CC"/>
+          </a:solidFill>
+          <a:ln>
+            <a:noFill/>
+          </a:ln>
+          <a:effectLst/>
+        </p:spPr>
+        <p:style>
+          <a:lnRef idx="1">
+            <a:schemeClr val="accent1"/>
+          </a:lnRef>
+          <a:fillRef idx="3">
+            <a:schemeClr val="accent1"/>
+          </a:fillRef>
+          <a:effectRef idx="2">
+            <a:schemeClr val="accent1"/>
+          </a:effectRef>
+          <a:fontRef idx="minor">
+            <a:schemeClr val="lt1"/>
+          </a:fontRef>
+        </p:style>
+        <p:txBody>
+          <a:bodyPr rtlCol="0" anchor="ctr"/>
+          <a:lstStyle/>
+          <a:p>
+            <a:pPr algn="ctr"/>
+          </a:p>
+        </p:txBody>
+      </p:sp>
+      <p:sp>
+        <p:nvSpPr>
+          <p:cNvPr id="3" name="TextBox 2"/>
+          <p:cNvSpPr txBox="1"/>
+          <p:nvPr/>
+        </p:nvSpPr>
+        <p:spPr>
+          <a:xfrm>
+            <a:off x="566928" y="384048"/>
+            <a:ext cx="11057839" cy="969264"/>
+          </a:xfrm>
+          <a:prstGeom prst="rect">
+            <a:avLst/>
+          </a:prstGeom>
+          <a:noFill/>
+        </p:spPr>
+        <p:txBody>
+          <a:bodyPr wrap="square" lIns="0" rIns="0" tIns="0" bIns="0">
+            <a:spAutoFit/>
+          </a:bodyPr>
+          <a:lstStyle/>
+          <a:p>
+            <a:pPr>
+              <a:lnSpc>
+                <a:spcPct val="92000"/>
+              </a:lnSpc>
+              <a:spcAft>
+                <a:spcPts val="0"/>
+              </a:spcAft>
+            </a:pPr>
+            <a:r>
+              <a:rPr sz="3600" b="1">
+                <a:solidFill>
+                  <a:srgbClr val="1E232B"/>
+                </a:solidFill>
+                <a:latin typeface="Calibri"/>
+              </a:rPr>
+              <a:t>Las prácticas que sostienen el código</a:t>
+            </a:r>
+          </a:p>
+        </p:txBody>
+      </p:sp>
+      <p:sp>
+        <p:nvSpPr>
+          <p:cNvPr id="4" name="TextBox 3"/>
+          <p:cNvSpPr txBox="1"/>
+          <p:nvPr/>
+        </p:nvSpPr>
+        <p:spPr>
+          <a:xfrm>
+            <a:off x="566928" y="1408176"/>
+            <a:ext cx="10881360" cy="603504"/>
+          </a:xfrm>
+          <a:prstGeom prst="rect">
+            <a:avLst/>
+          </a:prstGeom>
+          <a:noFill/>
+        </p:spPr>
+        <p:txBody>
+          <a:bodyPr wrap="square" lIns="0" rIns="0" tIns="0" bIns="0">
+            <a:spAutoFit/>
+          </a:bodyPr>
+          <a:lstStyle/>
+          <a:p>
+            <a:pPr>
+              <a:lnSpc>
+                <a:spcPct val="102000"/>
+              </a:lnSpc>
+              <a:spcAft>
+                <a:spcPts val="0"/>
+              </a:spcAft>
+            </a:pPr>
+            <a:r>
+              <a:rPr sz="2000" b="0">
+                <a:solidFill>
+                  <a:srgbClr val="49525F"/>
+                </a:solidFill>
+                <a:latin typeface="Calibri"/>
+              </a:rPr>
+              <a:t>Seis prácticas de ingeniería, cada una con su lugar concreto en este proyecto y el error que evita.</a:t>
+            </a:r>
+          </a:p>
+        </p:txBody>
+      </p:sp>
+      <p:pic>
+        <p:nvPicPr>
+          <p:cNvPr id="5" name="Picture 4" descr="fig_una_fuente.png"/>
+          <p:cNvPicPr>
+            <a:picLocks noChangeAspect="1"/>
+          </p:cNvPicPr>
+          <p:nvPr/>
+        </p:nvPicPr>
+        <p:blipFill>
+          <a:blip r:embed="rId2"/>
+          <a:stretch>
+            <a:fillRect/>
+          </a:stretch>
+        </p:blipFill>
+        <p:spPr>
+          <a:xfrm>
+            <a:off x="1791459" y="2066543"/>
+            <a:ext cx="8606032" cy="1188720"/>
+          </a:xfrm>
+          <a:prstGeom prst="rect">
+            <a:avLst/>
+          </a:prstGeom>
+        </p:spPr>
+      </p:pic>
+      <p:graphicFrame>
+        <p:nvGraphicFramePr>
+          <p:cNvPr id="6" name="Table 5"/>
+          <p:cNvGraphicFramePr>
+            <a:graphicFrameLocks noGrp="1"/>
+          </p:cNvGraphicFramePr>
+          <p:nvPr/>
+        </p:nvGraphicFramePr>
+        <p:xfrm>
+          <a:off x="566928" y="3419856"/>
+          <a:ext cx="11055095" cy="2331720"/>
+        </p:xfrm>
+        <a:graphic>
+          <a:graphicData uri="http://schemas.openxmlformats.org/drawingml/2006/table">
+            <a:tbl>
+              <a:tblPr firstRow="1" bandRow="1">
+                <a:tableStyleId>{5C22544A-7EE6-4342-B048-85BDC9FD1C3A}</a:tableStyleId>
+              </a:tblPr>
+              <a:tblGrid>
+                <a:gridCol w="2211019"/>
+                <a:gridCol w="5527548"/>
+                <a:gridCol w="3316528"/>
+              </a:tblGrid>
+              <a:tr h="333102">
+                <a:tc>
+                  <a:txBody>
+                    <a:bodyPr wrap="square"/>
+                    <a:lstStyle/>
+                    <a:p>
+                      <a:r>
+                        <a:rPr sz="1600" b="1">
+                          <a:solidFill>
+                            <a:srgbClr val="5F6875"/>
+                          </a:solidFill>
+                          <a:latin typeface="Calibri"/>
+                        </a:rPr>
+                        <a:t>Práctica</a:t>
+                      </a:r>
+                    </a:p>
+                  </a:txBody>
+                  <a:tcPr marL="91440" marR="91440" marT="45720" marB="45720" anchor="ctr">
+                    <a:solidFill>
+                      <a:srgbClr val="F1EFE8"/>
+                    </a:solidFill>
+                  </a:tcPr>
+                </a:tc>
+                <a:tc>
+                  <a:txBody>
+                    <a:bodyPr wrap="square"/>
+                    <a:lstStyle/>
+                    <a:p>
+                      <a:r>
+                        <a:rPr sz="1600" b="1">
+                          <a:solidFill>
+                            <a:srgbClr val="5F6875"/>
+                          </a:solidFill>
+                          <a:latin typeface="Calibri"/>
+                        </a:rPr>
+                        <a:t>Dónde vive en este proyecto</a:t>
+                      </a:r>
+                    </a:p>
+                  </a:txBody>
+                  <a:tcPr marL="91440" marR="91440" marT="45720" marB="45720" anchor="ctr">
+                    <a:solidFill>
+                      <a:srgbClr val="F1EFE8"/>
+                    </a:solidFill>
+                  </a:tcPr>
+                </a:tc>
+                <a:tc>
+                  <a:txBody>
+                    <a:bodyPr wrap="square"/>
+                    <a:lstStyle/>
+                    <a:p>
+                      <a:r>
+                        <a:rPr sz="1600" b="1">
+                          <a:solidFill>
+                            <a:srgbClr val="5F6875"/>
+                          </a:solidFill>
+                          <a:latin typeface="Calibri"/>
+                        </a:rPr>
+                        <a:t>Qué error evita</a:t>
+                      </a:r>
+                    </a:p>
+                  </a:txBody>
+                  <a:tcPr marL="91440" marR="91440" marT="45720" marB="45720" anchor="ctr">
+                    <a:solidFill>
+                      <a:srgbClr val="F1EFE8"/>
+                    </a:solidFill>
+                  </a:tcPr>
+                </a:tc>
+              </a:tr>
+              <a:tr h="333102">
+                <a:tc>
+                  <a:txBody>
+                    <a:bodyPr wrap="square"/>
+                    <a:lstStyle/>
+                    <a:p>
+                      <a:r>
+                        <a:rPr sz="1600" b="0">
+                          <a:solidFill>
+                            <a:srgbClr val="1E232B"/>
+                          </a:solidFill>
+                          <a:latin typeface="Calibri"/>
+                        </a:rPr>
+                        <a:t>Fuente única (DRY)</a:t>
+                      </a:r>
+                    </a:p>
+                  </a:txBody>
+                  <a:tcPr marL="91440" marR="91440" marT="45720" marB="45720" anchor="ctr">
+                    <a:solidFill>
+                      <a:srgbClr val="FCFBF8"/>
+                    </a:solidFill>
+                  </a:tcPr>
+                </a:tc>
+                <a:tc>
+                  <a:txBody>
+                    <a:bodyPr wrap="square"/>
+                    <a:lstStyle/>
+                    <a:p>
+                      <a:r>
+                        <a:rPr sz="1600" b="0">
+                          <a:solidFill>
+                            <a:srgbClr val="1E232B"/>
+                          </a:solidFill>
+                          <a:latin typeface="Calibri"/>
+                        </a:rPr>
+                        <a:t>schema→formulario · artefactos→PPT · requirements→nube</a:t>
+                      </a:r>
+                    </a:p>
+                  </a:txBody>
+                  <a:tcPr marL="91440" marR="91440" marT="45720" marB="45720" anchor="ctr">
+                    <a:solidFill>
+                      <a:srgbClr val="FCFBF8"/>
+                    </a:solidFill>
+                  </a:tcPr>
+                </a:tc>
+                <a:tc>
+                  <a:txBody>
+                    <a:bodyPr wrap="square"/>
+                    <a:lstStyle/>
+                    <a:p>
+                      <a:r>
+                        <a:rPr sz="1600" b="0">
+                          <a:solidFill>
+                            <a:srgbClr val="1E232B"/>
+                          </a:solidFill>
+                          <a:latin typeface="Calibri"/>
+                        </a:rPr>
+                        <a:t>Dos copias que se contradicen</a:t>
+                      </a:r>
+                    </a:p>
+                  </a:txBody>
+                  <a:tcPr marL="91440" marR="91440" marT="45720" marB="45720" anchor="ctr">
+                    <a:solidFill>
+                      <a:srgbClr val="FCFBF8"/>
+                    </a:solidFill>
+                  </a:tcPr>
+                </a:tc>
+              </a:tr>
+              <a:tr h="333102">
+                <a:tc>
+                  <a:txBody>
+                    <a:bodyPr wrap="square"/>
+                    <a:lstStyle/>
+                    <a:p>
+                      <a:r>
+                        <a:rPr sz="1600" b="0">
+                          <a:solidFill>
+                            <a:srgbClr val="1E232B"/>
+                          </a:solidFill>
+                          <a:latin typeface="Calibri"/>
+                        </a:rPr>
+                        <a:t>Precomputar lo pesado</a:t>
+                      </a:r>
+                    </a:p>
+                  </a:txBody>
+                  <a:tcPr marL="91440" marR="91440" marT="45720" marB="45720" anchor="ctr">
+                    <a:solidFill>
+                      <a:srgbClr val="FCFBF8"/>
+                    </a:solidFill>
+                  </a:tcPr>
+                </a:tc>
+                <a:tc>
+                  <a:txBody>
+                    <a:bodyPr wrap="square"/>
+                    <a:lstStyle/>
+                    <a:p>
+                      <a:r>
+                        <a:rPr sz="1600" b="0">
+                          <a:solidFill>
+                            <a:srgbClr val="1E232B"/>
+                          </a:solidFill>
+                          <a:latin typeface="Calibri"/>
+                        </a:rPr>
+                        <a:t>src/09 → ui_artifacts.json (44,7 KB), la app solo lee</a:t>
+                      </a:r>
+                    </a:p>
+                  </a:txBody>
+                  <a:tcPr marL="91440" marR="91440" marT="45720" marB="45720" anchor="ctr">
+                    <a:solidFill>
+                      <a:srgbClr val="FCFBF8"/>
+                    </a:solidFill>
+                  </a:tcPr>
+                </a:tc>
+                <a:tc>
+                  <a:txBody>
+                    <a:bodyPr wrap="square"/>
+                    <a:lstStyle/>
+                    <a:p>
+                      <a:r>
+                        <a:rPr sz="1600" b="0">
+                          <a:solidFill>
+                            <a:srgbClr val="1E232B"/>
+                          </a:solidFill>
+                          <a:latin typeface="Calibri"/>
+                        </a:rPr>
+                        <a:t>App lenta o sin memoria</a:t>
+                      </a:r>
+                    </a:p>
+                  </a:txBody>
+                  <a:tcPr marL="91440" marR="91440" marT="45720" marB="45720" anchor="ctr">
+                    <a:solidFill>
+                      <a:srgbClr val="FCFBF8"/>
+                    </a:solidFill>
+                  </a:tcPr>
+                </a:tc>
+              </a:tr>
+              <a:tr h="333102">
+                <a:tc>
+                  <a:txBody>
+                    <a:bodyPr wrap="square"/>
+                    <a:lstStyle/>
+                    <a:p>
+                      <a:r>
+                        <a:rPr sz="1600" b="0">
+                          <a:solidFill>
+                            <a:srgbClr val="1E232B"/>
+                          </a:solidFill>
+                          <a:latin typeface="Calibri"/>
+                        </a:rPr>
+                        <a:t>Versiones fijadas</a:t>
+                      </a:r>
+                    </a:p>
+                  </a:txBody>
+                  <a:tcPr marL="91440" marR="91440" marT="45720" marB="45720" anchor="ctr">
+                    <a:solidFill>
+                      <a:srgbClr val="FCFBF8"/>
+                    </a:solidFill>
+                  </a:tcPr>
+                </a:tc>
+                <a:tc>
+                  <a:txBody>
+                    <a:bodyPr wrap="square"/>
+                    <a:lstStyle/>
+                    <a:p>
+                      <a:r>
+                        <a:rPr sz="1600" b="0">
+                          <a:solidFill>
+                            <a:srgbClr val="1E232B"/>
+                          </a:solidFill>
+                          <a:latin typeface="Calibri"/>
+                        </a:rPr>
+                        <a:t>requirements.txt = meta del artefacto, o se aborta</a:t>
+                      </a:r>
+                    </a:p>
+                  </a:txBody>
+                  <a:tcPr marL="91440" marR="91440" marT="45720" marB="45720" anchor="ctr">
+                    <a:solidFill>
+                      <a:srgbClr val="FCFBF8"/>
+                    </a:solidFill>
+                  </a:tcPr>
+                </a:tc>
+                <a:tc>
+                  <a:txBody>
+                    <a:bodyPr wrap="square"/>
+                    <a:lstStyle/>
+                    <a:p>
+                      <a:r>
+                        <a:rPr sz="1600" b="0">
+                          <a:solidFill>
+                            <a:srgbClr val="1E232B"/>
+                          </a:solidFill>
+                          <a:latin typeface="Calibri"/>
+                        </a:rPr>
+                        <a:t>Un modelo distinto en la nube</a:t>
+                      </a:r>
+                    </a:p>
+                  </a:txBody>
+                  <a:tcPr marL="91440" marR="91440" marT="45720" marB="45720" anchor="ctr">
+                    <a:solidFill>
+                      <a:srgbClr val="FCFBF8"/>
+                    </a:solidFill>
+                  </a:tcPr>
+                </a:tc>
+              </a:tr>
+              <a:tr h="333102">
+                <a:tc>
+                  <a:txBody>
+                    <a:bodyPr wrap="square"/>
+                    <a:lstStyle/>
+                    <a:p>
+                      <a:r>
+                        <a:rPr sz="1600" b="0">
+                          <a:solidFill>
+                            <a:srgbClr val="1E232B"/>
+                          </a:solidFill>
+                          <a:latin typeface="Calibri"/>
+                        </a:rPr>
+                        <a:t>Cada bug, un test</a:t>
+                      </a:r>
+                    </a:p>
+                  </a:txBody>
+                  <a:tcPr marL="91440" marR="91440" marT="45720" marB="45720" anchor="ctr">
+                    <a:solidFill>
+                      <a:srgbClr val="FCFBF8"/>
+                    </a:solidFill>
+                  </a:tcPr>
+                </a:tc>
+                <a:tc>
+                  <a:txBody>
+                    <a:bodyPr wrap="square"/>
+                    <a:lstStyle/>
+                    <a:p>
+                      <a:r>
+                        <a:rPr sz="1600" b="0">
+                          <a:solidFill>
+                            <a:srgbClr val="1E232B"/>
+                          </a:solidFill>
+                          <a:latin typeface="Calibri"/>
+                        </a:rPr>
+                        <a:t>test_contratos.py reproduce los tres fallos del 20/08</a:t>
+                      </a:r>
+                    </a:p>
+                  </a:txBody>
+                  <a:tcPr marL="91440" marR="91440" marT="45720" marB="45720" anchor="ctr">
+                    <a:solidFill>
+                      <a:srgbClr val="FCFBF8"/>
+                    </a:solidFill>
+                  </a:tcPr>
+                </a:tc>
+                <a:tc>
+                  <a:txBody>
+                    <a:bodyPr wrap="square"/>
+                    <a:lstStyle/>
+                    <a:p>
+                      <a:r>
+                        <a:rPr sz="1600" b="0">
+                          <a:solidFill>
+                            <a:srgbClr val="1E232B"/>
+                          </a:solidFill>
+                          <a:latin typeface="Calibri"/>
+                        </a:rPr>
+                        <a:t>Que el mismo error regrese</a:t>
+                      </a:r>
+                    </a:p>
+                  </a:txBody>
+                  <a:tcPr marL="91440" marR="91440" marT="45720" marB="45720" anchor="ctr">
+                    <a:solidFill>
+                      <a:srgbClr val="FCFBF8"/>
+                    </a:solidFill>
+                  </a:tcPr>
+                </a:tc>
+              </a:tr>
+              <a:tr h="333102">
+                <a:tc>
+                  <a:txBody>
+                    <a:bodyPr wrap="square"/>
+                    <a:lstStyle/>
+                    <a:p>
+                      <a:r>
+                        <a:rPr sz="1600" b="0">
+                          <a:solidFill>
+                            <a:srgbClr val="1E232B"/>
+                          </a:solidFill>
+                          <a:latin typeface="Calibri"/>
+                        </a:rPr>
+                        <a:t>Despliegue sin manos</a:t>
+                      </a:r>
+                    </a:p>
+                  </a:txBody>
+                  <a:tcPr marL="91440" marR="91440" marT="45720" marB="45720" anchor="ctr">
+                    <a:solidFill>
+                      <a:srgbClr val="FCFBF8"/>
+                    </a:solidFill>
+                  </a:tcPr>
+                </a:tc>
+                <a:tc>
+                  <a:txBody>
+                    <a:bodyPr wrap="square"/>
+                    <a:lstStyle/>
+                    <a:p>
+                      <a:r>
+                        <a:rPr sz="1600" b="0">
+                          <a:solidFill>
+                            <a:srgbClr val="1E232B"/>
+                          </a:solidFill>
+                          <a:latin typeface="Calibri"/>
+                        </a:rPr>
+                        <a:t>push → webhook → redeploy automático</a:t>
+                      </a:r>
+                    </a:p>
+                  </a:txBody>
+                  <a:tcPr marL="91440" marR="91440" marT="45720" marB="45720" anchor="ctr">
+                    <a:solidFill>
+                      <a:srgbClr val="FCFBF8"/>
+                    </a:solidFill>
+                  </a:tcPr>
+                </a:tc>
+                <a:tc>
+                  <a:txBody>
+                    <a:bodyPr wrap="square"/>
+                    <a:lstStyle/>
+                    <a:p>
+                      <a:r>
+                        <a:rPr sz="1600" b="0">
+                          <a:solidFill>
+                            <a:srgbClr val="1E232B"/>
+                          </a:solidFill>
+                          <a:latin typeface="Calibri"/>
+                        </a:rPr>
+                        <a:t>Pasos manuales que se olvidan</a:t>
+                      </a:r>
+                    </a:p>
+                  </a:txBody>
+                  <a:tcPr marL="91440" marR="91440" marT="45720" marB="45720" anchor="ctr">
+                    <a:solidFill>
+                      <a:srgbClr val="FCFBF8"/>
+                    </a:solidFill>
+                  </a:tcPr>
+                </a:tc>
+              </a:tr>
+              <a:tr h="333108">
+                <a:tc>
+                  <a:txBody>
+                    <a:bodyPr wrap="square"/>
+                    <a:lstStyle/>
+                    <a:p>
+                      <a:r>
+                        <a:rPr sz="1600" b="0">
+                          <a:solidFill>
+                            <a:srgbClr val="1E232B"/>
+                          </a:solidFill>
+                          <a:latin typeface="Calibri"/>
+                        </a:rPr>
+                        <a:t>Verificar, no confiar</a:t>
+                      </a:r>
+                    </a:p>
+                  </a:txBody>
+                  <a:tcPr marL="91440" marR="91440" marT="45720" marB="45720" anchor="ctr">
+                    <a:solidFill>
+                      <a:srgbClr val="FCFBF8"/>
+                    </a:solidFill>
+                  </a:tcPr>
+                </a:tc>
+                <a:tc>
+                  <a:txBody>
+                    <a:bodyPr wrap="square"/>
+                    <a:lstStyle/>
+                    <a:p>
+                      <a:r>
+                        <a:rPr sz="1600" b="0">
+                          <a:solidFill>
+                            <a:srgbClr val="1E232B"/>
+                          </a:solidFill>
+                          <a:latin typeface="Calibri"/>
+                        </a:rPr>
+                        <a:t>local = desplegado · verificar_ppt.py traza cada cifra</a:t>
+                      </a:r>
+                    </a:p>
+                  </a:txBody>
+                  <a:tcPr marL="91440" marR="91440" marT="45720" marB="45720" anchor="ctr">
+                    <a:solidFill>
+                      <a:srgbClr val="FCFBF8"/>
+                    </a:solidFill>
+                  </a:tcPr>
+                </a:tc>
+                <a:tc>
+                  <a:txBody>
+                    <a:bodyPr wrap="square"/>
+                    <a:lstStyle/>
+                    <a:p>
+                      <a:r>
+                        <a:rPr sz="1600" b="0">
+                          <a:solidFill>
+                            <a:srgbClr val="1E232B"/>
+                          </a:solidFill>
+                          <a:latin typeface="Calibri"/>
+                        </a:rPr>
+                        <a:t>Números dichos de memoria</a:t>
+                      </a:r>
+                    </a:p>
+                  </a:txBody>
+                  <a:tcPr marL="91440" marR="91440" marT="45720" marB="45720" anchor="ctr">
+                    <a:solidFill>
+                      <a:srgbClr val="FCFBF8"/>
+                    </a:solidFill>
+                  </a:tcPr>
+                </a:tc>
+              </a:tr>
+            </a:tbl>
+          </a:graphicData>
+        </a:graphic>
+      </p:graphicFrame>
+      <p:sp>
+        <p:nvSpPr>
+          <p:cNvPr id="7" name="TextBox 6"/>
+          <p:cNvSpPr txBox="1"/>
+          <p:nvPr/>
+        </p:nvSpPr>
+        <p:spPr>
+          <a:xfrm>
+            <a:off x="566928" y="6419088"/>
+            <a:ext cx="11057839" cy="310896"/>
+          </a:xfrm>
+          <a:prstGeom prst="rect">
+            <a:avLst/>
+          </a:prstGeom>
+          <a:noFill/>
+        </p:spPr>
+        <p:txBody>
+          <a:bodyPr wrap="square" lIns="0" rIns="0" tIns="0" bIns="0">
+            <a:spAutoFit/>
+          </a:bodyPr>
+          <a:lstStyle/>
+          <a:p>
+            <a:pPr>
+              <a:spcAft>
+                <a:spcPts val="0"/>
+              </a:spcAft>
+            </a:pPr>
+            <a:r>
+              <a:rPr sz="1200" b="0">
+                <a:solidFill>
+                  <a:srgbClr val="5F6875"/>
+                </a:solidFill>
+                <a:latin typeface="Calibri"/>
+              </a:rPr>
+              <a:t>Fuente: models/feature_schema.json · models/ui_artifacts.json · requirements.txt · tests/test_contratos.py · docs/presentacion/verificar_ppt.py</a:t>
+            </a:r>
+          </a:p>
+        </p:txBody>
+      </p:sp>
+    </p:spTree>
+  </p:cSld>
+  <p:clrMapOvr>
+    <a:masterClrMapping/>
+  </p:clrMapOvr>
+</p:sld>
+</file>
+
+<file path=ppt/slides/slide14.xml><?xml version="1.0" encoding="utf-8"?>
 <p:sld xmlns:a="http://schemas.openxmlformats.org/drawingml/2006/main" xmlns:p="http://schemas.openxmlformats.org/presentationml/2006/main" xmlns:r="http://schemas.openxmlformats.org/officeDocument/2006/relationships">
   <p:cSld>
     <p:bg>
@@ -9086,8 +9877,8 @@
         </p:blipFill>
         <p:spPr>
           <a:xfrm>
-            <a:off x="1943553" y="2066543"/>
-            <a:ext cx="8301844" cy="3200399"/>
+            <a:off x="2465383" y="2066543"/>
+            <a:ext cx="7258184" cy="2798063"/>
           </a:xfrm>
           <a:prstGeom prst="rect">
             <a:avLst/>
@@ -9102,8 +9893,8 @@
         </p:nvSpPr>
         <p:spPr>
           <a:xfrm>
-            <a:off x="566928" y="5413248"/>
-            <a:ext cx="11055096" cy="804672"/>
+            <a:off x="566928" y="4992623"/>
+            <a:ext cx="11055096" cy="1207008"/>
           </a:xfrm>
           <a:prstGeom prst="roundRect">
             <a:avLst>
@@ -9140,20 +9931,39 @@
           <a:p>
             <a:pPr algn="ctr">
               <a:lnSpc>
-                <a:spcPct val="106000"/>
+                <a:spcPct val="104000"/>
+              </a:lnSpc>
+              <a:spcAft>
+                <a:spcPts val="300"/>
+              </a:spcAft>
+            </a:pPr>
+            <a:r>
+              <a:rPr sz="1800" b="1">
+                <a:solidFill>
+                  <a:srgbClr val="177A4C"/>
+                </a:solidFill>
+                <a:latin typeface="Calibri"/>
+              </a:rPr>
+              <a:t>Al repositorio sube el resumen, no la base: código, modelos ya entrenados y resultados precalculados (8,86 MB).</a:t>
+            </a:r>
+          </a:p>
+          <a:p>
+            <a:pPr algn="ctr">
+              <a:lnSpc>
+                <a:spcPct val="104000"/>
               </a:lnSpc>
               <a:spcAft>
                 <a:spcPts val="0"/>
               </a:spcAft>
             </a:pPr>
             <a:r>
-              <a:rPr sz="1800" b="1">
-                <a:solidFill>
-                  <a:srgbClr val="177A4C"/>
+              <a:rPr sz="1800" b="0">
+                <a:solidFill>
+                  <a:srgbClr val="1E232B"/>
                 </a:solidFill>
                 <a:latin typeface="Calibri"/>
               </a:rPr>
-              <a:t>Los microdatos se quedan en la máquina: los 601,3 MB de la ENAHO no viajan al repositorio, que enlaza a la fuente oficial del INEI.</a:t>
+              <a:t>Los 601,3 MB de microdatos se quedan en la máquina; el README deja el enlace al portal del INEI para quien quiera descargarlos y reproducir todo.</a:t>
             </a:r>
           </a:p>
         </p:txBody>
@@ -9367,7 +10177,7 @@
         </p:blipFill>
         <p:spPr>
           <a:xfrm>
-            <a:off x="852572" y="2066543"/>
+            <a:off x="566928" y="2066543"/>
             <a:ext cx="10483807" cy="2834640"/>
           </a:xfrm>
           <a:prstGeom prst="rect">
@@ -9383,8 +10193,317 @@
         </p:nvSpPr>
         <p:spPr>
           <a:xfrm>
-            <a:off x="566928" y="5020055"/>
-            <a:ext cx="11055096" cy="1142999"/>
+            <a:off x="566928" y="4846320"/>
+            <a:ext cx="3246120" cy="749808"/>
+          </a:xfrm>
+          <a:prstGeom prst="roundRect">
+            <a:avLst>
+              <a:gd name="adj" fmla="val 5000"/>
+            </a:avLst>
+          </a:prstGeom>
+          <a:solidFill>
+            <a:srgbClr val="FCFBF8"/>
+          </a:solidFill>
+          <a:ln w="15875">
+            <a:solidFill>
+              <a:srgbClr val="D5D1C6"/>
+            </a:solidFill>
+          </a:ln>
+          <a:effectLst/>
+        </p:spPr>
+        <p:style>
+          <a:lnRef idx="1">
+            <a:schemeClr val="accent1"/>
+          </a:lnRef>
+          <a:fillRef idx="3">
+            <a:schemeClr val="accent1"/>
+          </a:fillRef>
+          <a:effectRef idx="2">
+            <a:schemeClr val="accent1"/>
+          </a:effectRef>
+          <a:fontRef idx="minor">
+            <a:schemeClr val="lt1"/>
+          </a:fontRef>
+        </p:style>
+        <p:txBody>
+          <a:bodyPr rtlCol="0" anchor="t" wrap="square" lIns="182880" rIns="182880" tIns="128016" bIns="128016"/>
+          <a:lstStyle/>
+          <a:p>
+            <a:pPr algn="ctr">
+              <a:spcAft>
+                <a:spcPts val="100"/>
+              </a:spcAft>
+            </a:pPr>
+            <a:r>
+              <a:rPr sz="2000" b="1">
+                <a:solidFill>
+                  <a:srgbClr val="177A4C"/>
+                </a:solidFill>
+                <a:latin typeface="Consolas"/>
+              </a:rPr>
+              <a:t>601,3 MB</a:t>
+            </a:r>
+          </a:p>
+          <a:p>
+            <a:pPr algn="ctr">
+              <a:spcAft>
+                <a:spcPts val="0"/>
+              </a:spcAft>
+            </a:pPr>
+            <a:r>
+              <a:rPr sz="1800" b="0">
+                <a:solidFill>
+                  <a:srgbClr val="49525F"/>
+                </a:solidFill>
+                <a:latin typeface="Calibri"/>
+              </a:rPr>
+              <a:t>la base, se queda en casa</a:t>
+            </a:r>
+          </a:p>
+        </p:txBody>
+      </p:sp>
+      <p:sp>
+        <p:nvSpPr>
+          <p:cNvPr id="7" name="Rounded Rectangle 6"/>
+          <p:cNvSpPr/>
+          <p:nvPr/>
+        </p:nvSpPr>
+        <p:spPr>
+          <a:xfrm>
+            <a:off x="4261104" y="4846320"/>
+            <a:ext cx="3246120" cy="749808"/>
+          </a:xfrm>
+          <a:prstGeom prst="roundRect">
+            <a:avLst>
+              <a:gd name="adj" fmla="val 5000"/>
+            </a:avLst>
+          </a:prstGeom>
+          <a:solidFill>
+            <a:srgbClr val="FCFBF8"/>
+          </a:solidFill>
+          <a:ln w="15875">
+            <a:solidFill>
+              <a:srgbClr val="D5D1C6"/>
+            </a:solidFill>
+          </a:ln>
+          <a:effectLst/>
+        </p:spPr>
+        <p:style>
+          <a:lnRef idx="1">
+            <a:schemeClr val="accent1"/>
+          </a:lnRef>
+          <a:fillRef idx="3">
+            <a:schemeClr val="accent1"/>
+          </a:fillRef>
+          <a:effectRef idx="2">
+            <a:schemeClr val="accent1"/>
+          </a:effectRef>
+          <a:fontRef idx="minor">
+            <a:schemeClr val="lt1"/>
+          </a:fontRef>
+        </p:style>
+        <p:txBody>
+          <a:bodyPr rtlCol="0" anchor="t" wrap="square" lIns="182880" rIns="182880" tIns="128016" bIns="128016"/>
+          <a:lstStyle/>
+          <a:p>
+            <a:pPr algn="ctr">
+              <a:spcAft>
+                <a:spcPts val="100"/>
+              </a:spcAft>
+            </a:pPr>
+            <a:r>
+              <a:rPr sz="1900" b="1">
+                <a:solidFill>
+                  <a:srgbClr val="4353CC"/>
+                </a:solidFill>
+                <a:latin typeface="Consolas"/>
+              </a:rPr>
+              <a:t>8,86 MB</a:t>
+            </a:r>
+          </a:p>
+          <a:p>
+            <a:pPr algn="ctr">
+              <a:spcAft>
+                <a:spcPts val="0"/>
+              </a:spcAft>
+            </a:pPr>
+            <a:r>
+              <a:rPr sz="1800" b="0">
+                <a:solidFill>
+                  <a:srgbClr val="49525F"/>
+                </a:solidFill>
+                <a:latin typeface="Calibri"/>
+              </a:rPr>
+              <a:t>el resumen, viaja al repo</a:t>
+            </a:r>
+          </a:p>
+        </p:txBody>
+      </p:sp>
+      <p:sp>
+        <p:nvSpPr>
+          <p:cNvPr id="8" name="Rounded Rectangle 7"/>
+          <p:cNvSpPr/>
+          <p:nvPr/>
+        </p:nvSpPr>
+        <p:spPr>
+          <a:xfrm>
+            <a:off x="7955279" y="4846320"/>
+            <a:ext cx="3666744" cy="749808"/>
+          </a:xfrm>
+          <a:prstGeom prst="roundRect">
+            <a:avLst>
+              <a:gd name="adj" fmla="val 5000"/>
+            </a:avLst>
+          </a:prstGeom>
+          <a:solidFill>
+            <a:srgbClr val="FCFBF8"/>
+          </a:solidFill>
+          <a:ln w="15875">
+            <a:solidFill>
+              <a:srgbClr val="D5D1C6"/>
+            </a:solidFill>
+          </a:ln>
+          <a:effectLst/>
+        </p:spPr>
+        <p:style>
+          <a:lnRef idx="1">
+            <a:schemeClr val="accent1"/>
+          </a:lnRef>
+          <a:fillRef idx="3">
+            <a:schemeClr val="accent1"/>
+          </a:fillRef>
+          <a:effectRef idx="2">
+            <a:schemeClr val="accent1"/>
+          </a:effectRef>
+          <a:fontRef idx="minor">
+            <a:schemeClr val="lt1"/>
+          </a:fontRef>
+        </p:style>
+        <p:txBody>
+          <a:bodyPr rtlCol="0" anchor="t" wrap="square" lIns="182880" rIns="182880" tIns="128016" bIns="128016"/>
+          <a:lstStyle/>
+          <a:p>
+            <a:pPr algn="ctr">
+              <a:spcAft>
+                <a:spcPts val="100"/>
+              </a:spcAft>
+            </a:pPr>
+            <a:r>
+              <a:rPr sz="1800" b="1">
+                <a:solidFill>
+                  <a:srgbClr val="3542B8"/>
+                </a:solidFill>
+                <a:latin typeface="Consolas"/>
+              </a:rPr>
+              <a:t>44,7 KB</a:t>
+            </a:r>
+          </a:p>
+          <a:p>
+            <a:pPr algn="ctr">
+              <a:spcAft>
+                <a:spcPts val="0"/>
+              </a:spcAft>
+            </a:pPr>
+            <a:r>
+              <a:rPr sz="1800" b="0">
+                <a:solidFill>
+                  <a:srgbClr val="49525F"/>
+                </a:solidFill>
+                <a:latin typeface="Calibri"/>
+              </a:rPr>
+              <a:t>lo que la app lee en cada visita</a:t>
+            </a:r>
+          </a:p>
+        </p:txBody>
+      </p:sp>
+      <p:sp>
+        <p:nvSpPr>
+          <p:cNvPr id="9" name="TextBox 8"/>
+          <p:cNvSpPr txBox="1"/>
+          <p:nvPr/>
+        </p:nvSpPr>
+        <p:spPr>
+          <a:xfrm>
+            <a:off x="3813048" y="5038344"/>
+            <a:ext cx="448056" cy="365760"/>
+          </a:xfrm>
+          <a:prstGeom prst="rect">
+            <a:avLst/>
+          </a:prstGeom>
+          <a:noFill/>
+        </p:spPr>
+        <p:txBody>
+          <a:bodyPr wrap="square" lIns="0" rIns="0" tIns="0" bIns="0">
+            <a:spAutoFit/>
+          </a:bodyPr>
+          <a:lstStyle/>
+          <a:p>
+            <a:pPr algn="ctr">
+              <a:spcAft>
+                <a:spcPts val="0"/>
+              </a:spcAft>
+            </a:pPr>
+            <a:r>
+              <a:rPr sz="2000" b="1">
+                <a:solidFill>
+                  <a:srgbClr val="5F6875"/>
+                </a:solidFill>
+                <a:latin typeface="Consolas"/>
+              </a:rPr>
+              <a:t>→</a:t>
+            </a:r>
+          </a:p>
+        </p:txBody>
+      </p:sp>
+      <p:sp>
+        <p:nvSpPr>
+          <p:cNvPr id="10" name="TextBox 9"/>
+          <p:cNvSpPr txBox="1"/>
+          <p:nvPr/>
+        </p:nvSpPr>
+        <p:spPr>
+          <a:xfrm>
+            <a:off x="7507223" y="5038344"/>
+            <a:ext cx="448056" cy="365760"/>
+          </a:xfrm>
+          <a:prstGeom prst="rect">
+            <a:avLst/>
+          </a:prstGeom>
+          <a:noFill/>
+        </p:spPr>
+        <p:txBody>
+          <a:bodyPr wrap="square" lIns="0" rIns="0" tIns="0" bIns="0">
+            <a:spAutoFit/>
+          </a:bodyPr>
+          <a:lstStyle/>
+          <a:p>
+            <a:pPr algn="ctr">
+              <a:spcAft>
+                <a:spcPts val="0"/>
+              </a:spcAft>
+            </a:pPr>
+            <a:r>
+              <a:rPr sz="2000" b="1">
+                <a:solidFill>
+                  <a:srgbClr val="5F6875"/>
+                </a:solidFill>
+                <a:latin typeface="Consolas"/>
+              </a:rPr>
+              <a:t>→</a:t>
+            </a:r>
+          </a:p>
+        </p:txBody>
+      </p:sp>
+      <p:sp>
+        <p:nvSpPr>
+          <p:cNvPr id="11" name="Rounded Rectangle 10"/>
+          <p:cNvSpPr/>
+          <p:nvPr/>
+        </p:nvSpPr>
+        <p:spPr>
+          <a:xfrm>
+            <a:off x="566928" y="5760720"/>
+            <a:ext cx="11055096" cy="512064"/>
           </a:xfrm>
           <a:prstGeom prst="roundRect">
             <a:avLst>
@@ -9443,7 +10562,7 @@
               <a:t>  →  </a:t>
             </a:r>
             <a:r>
-              <a:rPr sz="2600" b="1">
+              <a:rPr sz="2000" b="1">
                 <a:solidFill>
                   <a:srgbClr val="177A4C"/>
                 </a:solidFill>
@@ -9479,7 +10598,7 @@
               <a:t>  →  </a:t>
             </a:r>
             <a:r>
-              <a:rPr sz="2600" b="1">
+              <a:rPr sz="2000" b="1">
                 <a:solidFill>
                   <a:srgbClr val="4353CC"/>
                 </a:solidFill>
@@ -9506,7 +10625,7 @@
               <a:t>  →  </a:t>
             </a:r>
             <a:r>
-              <a:rPr sz="2600" b="1">
+              <a:rPr sz="2000" b="1">
                 <a:solidFill>
                   <a:srgbClr val="3542B8"/>
                 </a:solidFill>
@@ -9519,7 +10638,7 @@
       </p:sp>
       <p:sp>
         <p:nvSpPr>
-          <p:cNvPr id="7" name="TextBox 6"/>
+          <p:cNvPr id="12" name="TextBox 11"/>
           <p:cNvSpPr txBox="1"/>
           <p:nvPr/>
         </p:nvSpPr>
@@ -12007,8 +13126,8 @@
         </p:nvSpPr>
         <p:spPr>
           <a:xfrm>
-            <a:off x="566928" y="5413248"/>
-            <a:ext cx="11055096" cy="822960"/>
+            <a:off x="566928" y="5486400"/>
+            <a:ext cx="11055096" cy="786384"/>
           </a:xfrm>
           <a:prstGeom prst="roundRect">
             <a:avLst>
